--- a/lecons/F2/12_F2_M1_FS04_Water_Scarcity.pptx
+++ b/lecons/F2/12_F2_M1_FS04_Water_Scarcity.pptx
@@ -56,9 +56,15 @@
     <p:sldId id="304" r:id="rId50"/>
     <p:sldId id="305" r:id="rId51"/>
     <p:sldId id="306" r:id="rId52"/>
+    <p:sldId id="307" r:id="rId53"/>
+    <p:sldId id="308" r:id="rId54"/>
+    <p:sldId id="309" r:id="rId55"/>
+    <p:sldId id="310" r:id="rId56"/>
+    <p:sldId id="311" r:id="rId57"/>
+    <p:sldId id="312" r:id="rId58"/>
   </p:sldIdLst>
   <p:notesMasterIdLst>
-    <p:notesMasterId r:id="rId53"/>
+    <p:notesMasterId r:id="rId59"/>
   </p:notesMasterIdLst>
   <p:sldSz cx="12192000" cy="6858000"/>
   <p:notesSz cx="6858000" cy="12192000"/>
@@ -728,7 +734,7 @@
           <a:p>
             <a:r>
               <a:rPr lang="en-US" dirty="0"/>
-              <a:t>Good. There is not enough clean water.</a:t>
+              <a:t>Good. There is not enough clean water, and Ali does not know what to do.</a:t>
             </a:r>
             <a:endParaRPr lang="en-US" dirty="0"/>
           </a:p>
@@ -1432,7 +1438,7 @@
           <a:p>
             <a:r>
               <a:rPr lang="en-US" dirty="0"/>
-              <a:t>Here is the question for Activity 1: What is water scarcity? Take one minute to think and write your answer in your rough notebook.</a:t>
+              <a:t>Here is the question for Activity 1: Why do these women carry water from far away? Take one minute to think and write your answer in your rough notebook.</a:t>
             </a:r>
             <a:endParaRPr lang="en-US" dirty="0"/>
           </a:p>
@@ -1608,7 +1614,7 @@
           <a:p>
             <a:r>
               <a:rPr lang="en-US" dirty="0"/>
-              <a:t>Let us check the answer together. A lack of enough clean water for people's needs.</a:t>
+              <a:t>Let us check the answer together. There is not enough clean water near their homes: this is water scarcity.</a:t>
             </a:r>
             <a:endParaRPr lang="en-US" dirty="0"/>
           </a:p>
@@ -1872,7 +1878,7 @@
           <a:p>
             <a:r>
               <a:rPr lang="en-US" dirty="0"/>
-              <a:t>Let us check the answer together. Only about 2.5 %; most is salty sea water.</a:t>
+              <a:t>Let us check the answer together. Only about 2.5 %; most water is salty sea water.</a:t>
             </a:r>
             <a:endParaRPr lang="en-US" dirty="0"/>
           </a:p>
@@ -2312,7 +2318,7 @@
           <a:p>
             <a:r>
               <a:rPr lang="en-US" dirty="0"/>
-              <a:t>Here is the question for Activity 4: Give three uses of water and one way we waste it. Take one minute to think and write your answer in your rough notebook.</a:t>
+              <a:t>Here is the question for Activity 4: How is water wasted in this picture? Take one minute to think and write your answer in your rough notebook.</a:t>
             </a:r>
             <a:endParaRPr lang="en-US" dirty="0"/>
           </a:p>
@@ -2400,7 +2406,7 @@
           <a:p>
             <a:r>
               <a:rPr lang="en-US" dirty="0"/>
-              <a:t>Let us check the answer together. Drinking, cooking and washing (also farming); leaking taps waste water.</a:t>
+              <a:t>Let us check the answer together. The tap leaks, so clean water is lost.</a:t>
             </a:r>
             <a:endParaRPr lang="en-US" dirty="0"/>
           </a:p>
@@ -2664,7 +2670,7 @@
           <a:p>
             <a:r>
               <a:rPr lang="en-US" dirty="0"/>
-              <a:t>Here is the question for Activity 5: Give three ways to manage water well. Take one minute to think and write your answer in your rough notebook.</a:t>
+              <a:t>Here is the question for Activity 5: How can a family keep water for the dry season? Take one minute to think and write your answer in your rough notebook.</a:t>
             </a:r>
             <a:endParaRPr lang="en-US" dirty="0"/>
           </a:p>
@@ -2752,7 +2758,7 @@
           <a:p>
             <a:r>
               <a:rPr lang="en-US" dirty="0"/>
-              <a:t>Let us check the answer together. Store rainwater, repair leaks and treat drinking water (also build boreholes).</a:t>
+              <a:t>Let us check the answer together. By collecting rainwater from the roof in a tank.</a:t>
             </a:r>
             <a:endParaRPr lang="en-US" dirty="0"/>
           </a:p>
@@ -2928,7 +2934,7 @@
           <a:p>
             <a:r>
               <a:rPr lang="en-US" dirty="0"/>
-              <a:t>Let us copy the definitions. The key terms of this lesson are defined as follows. On this slide we have Water scarcity. Write each point on a new line, with the key term first, and explain it in your own words when we revise.</a:t>
+              <a:t>Let us copy the definitions. The key terms of this lesson are defined as follows. On this slide we have Water scarcity and Water management. Write each point on a new line, with the key term first, and explain it in your own words when we revise.</a:t>
             </a:r>
             <a:endParaRPr lang="en-US" dirty="0"/>
           </a:p>
@@ -3016,7 +3022,7 @@
           <a:p>
             <a:r>
               <a:rPr lang="en-US" dirty="0"/>
-              <a:t>Let us copy Quantity and Quality. Water scarcity is a problem of quantity and quality. On this slide we have Quantity and Quality. Write each point on a new line, with the key term first, and explain it in your own words when we revise.</a:t>
+              <a:t>Let us copy Quantity of Water. The quantity of water is limited for the following reasons. Copy the point on Little fresh water on the left, then draw the diagram on the right: water on the Earth. Give it a title and label it clearly.</a:t>
             </a:r>
             <a:endParaRPr lang="en-US" dirty="0"/>
           </a:p>
@@ -3104,7 +3110,7 @@
           <a:p>
             <a:r>
               <a:rPr lang="en-US" dirty="0"/>
-              <a:t>Let us copy Uses of Water. Water has the following uses. On this slide we have Domestic uses and Economic uses. Write each point on a new line, with the key term first, and explain it in your own words when we revise.</a:t>
+              <a:t>We continue with Quantity of Water. On this slide we have Long dry seasons and droughts and Population growth. Write each point on a new line, with the key term first, and explain it in your own words when we revise.</a:t>
             </a:r>
             <a:endParaRPr lang="en-US" dirty="0"/>
           </a:p>
@@ -3192,7 +3198,7 @@
           <a:p>
             <a:r>
               <a:rPr lang="en-US" dirty="0"/>
-              <a:t>Let us copy Management. Water can be managed with the following measures. On this slide we have Saving water and Storing water. Write each point on a new line, with the key term first, and explain it in your own words when we revise. When you finish, we go to the next slide.</a:t>
+              <a:t>Let us copy Quality of Water. The quality of water is a problem for the following reasons. On this slide we have Open wells and rivers and Diseases. Write each point on a new line, with the key term first, and explain it in your own words when we revise.</a:t>
             </a:r>
             <a:endParaRPr lang="en-US" dirty="0"/>
           </a:p>
@@ -3280,7 +3286,7 @@
           <a:p>
             <a:r>
               <a:rPr lang="en-US" dirty="0"/>
-              <a:t>We continue with Management. On this slide we have Clean water. Write each point on a new line, with the key term first, and explain it in your own words when we revise.</a:t>
+              <a:t>Copy the point on Safe sources on the left, then draw the diagram on the right: a borehole. Give it a title and label it clearly.</a:t>
             </a:r>
             <a:endParaRPr lang="en-US" dirty="0"/>
           </a:p>
@@ -3368,7 +3374,7 @@
           <a:p>
             <a:r>
               <a:rPr lang="en-US" dirty="0"/>
-              <a:t>Now draw this illustration in your notebook: collecting rainwater. Give it a title and label it clearly.</a:t>
+              <a:t>Let us copy Uses of Water. Water has the following uses. On this slide we have Domestic uses. Write each point on a new line, with the key term first, and explain it in your own words when we revise.</a:t>
             </a:r>
             <a:endParaRPr lang="en-US" dirty="0"/>
           </a:p>
@@ -3544,7 +3550,7 @@
           <a:p>
             <a:r>
               <a:rPr lang="en-US" dirty="0"/>
-              <a:t>Now let us check what you have understood. Question 1: What is water scarcity? Answer in your exercise book.</a:t>
+              <a:t>Copy the point on Farming and livestock on the left, then draw the diagram on the right: irrigation. Give it a title and label it clearly.</a:t>
             </a:r>
             <a:endParaRPr lang="en-US" dirty="0"/>
           </a:p>
@@ -3632,7 +3638,7 @@
           <a:p>
             <a:r>
               <a:rPr lang="en-US" dirty="0"/>
-              <a:t>The expected answer is: a lack of enough clean water. If you got it right, well done.</a:t>
+              <a:t>We continue with Uses of Water. On this slide we have Industry and energy. Write each point on a new line, with the key term first, and explain it in your own words when we revise.</a:t>
             </a:r>
             <a:endParaRPr lang="en-US" dirty="0"/>
           </a:p>
@@ -3720,7 +3726,7 @@
           <a:p>
             <a:r>
               <a:rPr lang="en-US" dirty="0"/>
-              <a:t>Now let us check what you have understood. Question 2: Give two ways to manage water. Answer in your exercise book.</a:t>
+              <a:t>Copy the point on Waste on the left, then draw the diagram on the right: a leaking tap. Give it a title and label it clearly.</a:t>
             </a:r>
             <a:endParaRPr lang="en-US" dirty="0"/>
           </a:p>
@@ -3808,7 +3814,7 @@
           <a:p>
             <a:r>
               <a:rPr lang="en-US" dirty="0"/>
-              <a:t>The expected answer is: store rainwater and repair leaks. If you got it right, well done.</a:t>
+              <a:t>Let us copy Management of Water. Water can be managed with the following measures. On this slide we have Saving water. Write each point on a new line, with the key term first, and explain it in your own words when we revise.</a:t>
             </a:r>
             <a:endParaRPr lang="en-US" dirty="0"/>
           </a:p>
@@ -3896,7 +3902,7 @@
           <a:p>
             <a:r>
               <a:rPr lang="en-US" dirty="0"/>
-              <a:t>For those who need more practice, fill in the blanks in your exercise book. The answers are: number 1, ; number 2, 5; number 2, borehole; number 3, cholera (or typhoid).</a:t>
+              <a:t>Copy the point on Storing water on the left, then draw the diagram on the right: collecting rainwater. Give it a title and label it clearly.</a:t>
             </a:r>
             <a:endParaRPr lang="en-US" dirty="0"/>
           </a:p>
@@ -3984,7 +3990,7 @@
           <a:p>
             <a:r>
               <a:rPr lang="en-US" dirty="0"/>
-              <a:t>For your homework: Carry out a small enquiry: ask three families where they get water and what problems they have. We shall correct it at the beginning of our next lesson.</a:t>
+              <a:t>We continue with Management of Water. On this slide we have Clean water and Protecting sources. Write each point on a new line, with the key term first, and explain it in your own words when we revise.</a:t>
             </a:r>
             <a:endParaRPr lang="en-US" dirty="0"/>
           </a:p>
@@ -4072,7 +4078,7 @@
           <a:p>
             <a:r>
               <a:rPr lang="en-US" dirty="0"/>
-              <a:t>Our next lesson will be on Lesson 6: Country Sides in Africa. Thank you for your attention, and see you next time.</a:t>
+              <a:t>Now let us check what you have understood. Question 1: What is water scarcity? Answer in your exercise book.</a:t>
             </a:r>
             <a:endParaRPr lang="en-US" dirty="0"/>
           </a:p>
@@ -4160,7 +4166,7 @@
           <a:p>
             <a:r>
               <a:rPr lang="en-US" dirty="0"/>
-              <a:t>Let us play the bilingual game. I say a word in English, and you give me the French word. Then we do the reverse.</a:t>
+              <a:t>The expected answer is: a lack of enough clean water. If you got it right, well done.</a:t>
             </a:r>
             <a:endParaRPr lang="en-US" dirty="0"/>
           </a:p>
@@ -4248,7 +4254,7 @@
           <a:p>
             <a:r>
               <a:rPr lang="en-US" dirty="0"/>
-              <a:t>I record this information in the official logbook of the class after the lesson.</a:t>
+              <a:t>Now let us check what you have understood. Question 2: Give two ways to manage water. Answer in your exercise book.</a:t>
             </a:r>
             <a:endParaRPr lang="en-US" dirty="0"/>
           </a:p>
@@ -4336,7 +4342,7 @@
           <a:p>
             <a:r>
               <a:rPr lang="en-US" dirty="0"/>
-              <a:t>I complete the second page of the logbook: the matter taught, the evaluation, the homework and the attendance.</a:t>
+              <a:t>The expected answer is: store rainwater and repair leaks. If you got it right, well done.</a:t>
             </a:r>
             <a:endParaRPr lang="en-US" dirty="0"/>
           </a:p>
@@ -4512,7 +4518,7 @@
           <a:p>
             <a:r>
               <a:rPr lang="en-US" dirty="0"/>
-              <a:t>This slide is for me, the teacher: it gives the timing of the lesson and what to do if the projector is not available.</a:t>
+              <a:t>For those who need more practice, fill in the blanks in your exercise book. The answers are: number 1, ; number 2, 5; number 2, borehole; number 3, cholera (or typhoid).</a:t>
             </a:r>
             <a:endParaRPr lang="en-US" dirty="0"/>
           </a:p>
@@ -4600,7 +4606,7 @@
           <a:p>
             <a:r>
               <a:rPr lang="en-US" dirty="0"/>
-              <a:t>These are the references and picture credits used to prepare this lesson.</a:t>
+              <a:t>For your homework: Carry out a small enquiry: ask three families where they get water and what problems they have. We shall correct it at the beginning of our next lesson.</a:t>
             </a:r>
             <a:endParaRPr lang="en-US" dirty="0"/>
           </a:p>
@@ -4624,6 +4630,534 @@
             <a:fld id="{F7021451-1387-4CA6-816F-3879F97B5CBC}" type="slidenum">
               <a:rPr lang="en-US"/>
               <a:t>51</a:t>
+            </a:fld>
+            <a:endParaRPr lang="en-US"/>
+          </a:p>
+        </p:txBody>
+      </p:sp>
+    </p:spTree>
+    <p:extLst>
+      <p:ext uri="{BB962C8B-B14F-4D97-AF65-F5344CB8AC3E}">
+        <p14:creationId xmlns:p14="http://schemas.microsoft.com/office/powerpoint/2010/main" val="1024086991"/>
+      </p:ext>
+    </p:extLst>
+  </p:cSld>
+  <p:clrMapOvr>
+    <a:masterClrMapping/>
+  </p:clrMapOvr>
+</p:notes>
+</file>
+
+<file path=ppt/notesSlides/notesSlide52.xml><?xml version="1.0" encoding="utf-8"?>
+<p:notes xmlns:a="http://schemas.openxmlformats.org/drawingml/2006/main" xmlns:r="http://schemas.openxmlformats.org/officeDocument/2006/relationships" xmlns:p="http://schemas.openxmlformats.org/presentationml/2006/main">
+  <p:cSld>
+    <p:spTree>
+      <p:nvGrpSpPr>
+        <p:cNvPr id="1" name=""/>
+        <p:cNvGrpSpPr/>
+        <p:nvPr/>
+      </p:nvGrpSpPr>
+      <p:grpSpPr>
+        <a:xfrm>
+          <a:off x="0" y="0"/>
+          <a:ext cx="0" cy="0"/>
+          <a:chOff x="0" y="0"/>
+          <a:chExt cx="0" cy="0"/>
+        </a:xfrm>
+      </p:grpSpPr>
+      <p:sp>
+        <p:nvSpPr>
+          <p:cNvPr id="2" name="Slide Image Placeholder 1"/>
+          <p:cNvSpPr>
+            <a:spLocks noGrp="1" noRot="1" noChangeAspect="1"/>
+          </p:cNvSpPr>
+          <p:nvPr>
+            <p:ph type="sldImg"/>
+          </p:nvPr>
+        </p:nvSpPr>
+        <p:spPr/>
+      </p:sp>
+      <p:sp>
+        <p:nvSpPr>
+          <p:cNvPr id="3" name="Notes Placeholder 2"/>
+          <p:cNvSpPr>
+            <a:spLocks noGrp="1"/>
+          </p:cNvSpPr>
+          <p:nvPr>
+            <p:ph type="body" idx="1"/>
+          </p:nvPr>
+        </p:nvSpPr>
+        <p:spPr/>
+        <p:txBody>
+          <a:bodyPr/>
+          <a:lstStyle/>
+          <a:p>
+            <a:r>
+              <a:rPr lang="en-US" dirty="0"/>
+              <a:t>Our next lesson will be on Lesson 6: Country Sides in Africa. Thank you for your attention, and see you next time.</a:t>
+            </a:r>
+            <a:endParaRPr lang="en-US" dirty="0"/>
+          </a:p>
+        </p:txBody>
+      </p:sp>
+      <p:sp>
+        <p:nvSpPr>
+          <p:cNvPr id="4" name="Slide Number Placeholder 3"/>
+          <p:cNvSpPr>
+            <a:spLocks noGrp="1"/>
+          </p:cNvSpPr>
+          <p:nvPr>
+            <p:ph type="sldNum" sz="quarter" idx="10"/>
+          </p:nvPr>
+        </p:nvSpPr>
+        <p:spPr/>
+        <p:txBody>
+          <a:bodyPr/>
+          <a:lstStyle/>
+          <a:p>
+            <a:fld id="{F7021451-1387-4CA6-816F-3879F97B5CBC}" type="slidenum">
+              <a:rPr lang="en-US"/>
+              <a:t>52</a:t>
+            </a:fld>
+            <a:endParaRPr lang="en-US"/>
+          </a:p>
+        </p:txBody>
+      </p:sp>
+    </p:spTree>
+    <p:extLst>
+      <p:ext uri="{BB962C8B-B14F-4D97-AF65-F5344CB8AC3E}">
+        <p14:creationId xmlns:p14="http://schemas.microsoft.com/office/powerpoint/2010/main" val="1024086991"/>
+      </p:ext>
+    </p:extLst>
+  </p:cSld>
+  <p:clrMapOvr>
+    <a:masterClrMapping/>
+  </p:clrMapOvr>
+</p:notes>
+</file>
+
+<file path=ppt/notesSlides/notesSlide53.xml><?xml version="1.0" encoding="utf-8"?>
+<p:notes xmlns:a="http://schemas.openxmlformats.org/drawingml/2006/main" xmlns:r="http://schemas.openxmlformats.org/officeDocument/2006/relationships" xmlns:p="http://schemas.openxmlformats.org/presentationml/2006/main">
+  <p:cSld>
+    <p:spTree>
+      <p:nvGrpSpPr>
+        <p:cNvPr id="1" name=""/>
+        <p:cNvGrpSpPr/>
+        <p:nvPr/>
+      </p:nvGrpSpPr>
+      <p:grpSpPr>
+        <a:xfrm>
+          <a:off x="0" y="0"/>
+          <a:ext cx="0" cy="0"/>
+          <a:chOff x="0" y="0"/>
+          <a:chExt cx="0" cy="0"/>
+        </a:xfrm>
+      </p:grpSpPr>
+      <p:sp>
+        <p:nvSpPr>
+          <p:cNvPr id="2" name="Slide Image Placeholder 1"/>
+          <p:cNvSpPr>
+            <a:spLocks noGrp="1" noRot="1" noChangeAspect="1"/>
+          </p:cNvSpPr>
+          <p:nvPr>
+            <p:ph type="sldImg"/>
+          </p:nvPr>
+        </p:nvSpPr>
+        <p:spPr/>
+      </p:sp>
+      <p:sp>
+        <p:nvSpPr>
+          <p:cNvPr id="3" name="Notes Placeholder 2"/>
+          <p:cNvSpPr>
+            <a:spLocks noGrp="1"/>
+          </p:cNvSpPr>
+          <p:nvPr>
+            <p:ph type="body" idx="1"/>
+          </p:nvPr>
+        </p:nvSpPr>
+        <p:spPr/>
+        <p:txBody>
+          <a:bodyPr/>
+          <a:lstStyle/>
+          <a:p>
+            <a:r>
+              <a:rPr lang="en-US" dirty="0"/>
+              <a:t>Let us play the bilingual game. I say a word in English, and you give me the French word. Then we do the reverse.</a:t>
+            </a:r>
+            <a:endParaRPr lang="en-US" dirty="0"/>
+          </a:p>
+        </p:txBody>
+      </p:sp>
+      <p:sp>
+        <p:nvSpPr>
+          <p:cNvPr id="4" name="Slide Number Placeholder 3"/>
+          <p:cNvSpPr>
+            <a:spLocks noGrp="1"/>
+          </p:cNvSpPr>
+          <p:nvPr>
+            <p:ph type="sldNum" sz="quarter" idx="10"/>
+          </p:nvPr>
+        </p:nvSpPr>
+        <p:spPr/>
+        <p:txBody>
+          <a:bodyPr/>
+          <a:lstStyle/>
+          <a:p>
+            <a:fld id="{F7021451-1387-4CA6-816F-3879F97B5CBC}" type="slidenum">
+              <a:rPr lang="en-US"/>
+              <a:t>53</a:t>
+            </a:fld>
+            <a:endParaRPr lang="en-US"/>
+          </a:p>
+        </p:txBody>
+      </p:sp>
+    </p:spTree>
+    <p:extLst>
+      <p:ext uri="{BB962C8B-B14F-4D97-AF65-F5344CB8AC3E}">
+        <p14:creationId xmlns:p14="http://schemas.microsoft.com/office/powerpoint/2010/main" val="1024086991"/>
+      </p:ext>
+    </p:extLst>
+  </p:cSld>
+  <p:clrMapOvr>
+    <a:masterClrMapping/>
+  </p:clrMapOvr>
+</p:notes>
+</file>
+
+<file path=ppt/notesSlides/notesSlide54.xml><?xml version="1.0" encoding="utf-8"?>
+<p:notes xmlns:a="http://schemas.openxmlformats.org/drawingml/2006/main" xmlns:r="http://schemas.openxmlformats.org/officeDocument/2006/relationships" xmlns:p="http://schemas.openxmlformats.org/presentationml/2006/main">
+  <p:cSld>
+    <p:spTree>
+      <p:nvGrpSpPr>
+        <p:cNvPr id="1" name=""/>
+        <p:cNvGrpSpPr/>
+        <p:nvPr/>
+      </p:nvGrpSpPr>
+      <p:grpSpPr>
+        <a:xfrm>
+          <a:off x="0" y="0"/>
+          <a:ext cx="0" cy="0"/>
+          <a:chOff x="0" y="0"/>
+          <a:chExt cx="0" cy="0"/>
+        </a:xfrm>
+      </p:grpSpPr>
+      <p:sp>
+        <p:nvSpPr>
+          <p:cNvPr id="2" name="Slide Image Placeholder 1"/>
+          <p:cNvSpPr>
+            <a:spLocks noGrp="1" noRot="1" noChangeAspect="1"/>
+          </p:cNvSpPr>
+          <p:nvPr>
+            <p:ph type="sldImg"/>
+          </p:nvPr>
+        </p:nvSpPr>
+        <p:spPr/>
+      </p:sp>
+      <p:sp>
+        <p:nvSpPr>
+          <p:cNvPr id="3" name="Notes Placeholder 2"/>
+          <p:cNvSpPr>
+            <a:spLocks noGrp="1"/>
+          </p:cNvSpPr>
+          <p:nvPr>
+            <p:ph type="body" idx="1"/>
+          </p:nvPr>
+        </p:nvSpPr>
+        <p:spPr/>
+        <p:txBody>
+          <a:bodyPr/>
+          <a:lstStyle/>
+          <a:p>
+            <a:r>
+              <a:rPr lang="en-US" dirty="0"/>
+              <a:t>I record this information in the official logbook of the class after the lesson.</a:t>
+            </a:r>
+            <a:endParaRPr lang="en-US" dirty="0"/>
+          </a:p>
+        </p:txBody>
+      </p:sp>
+      <p:sp>
+        <p:nvSpPr>
+          <p:cNvPr id="4" name="Slide Number Placeholder 3"/>
+          <p:cNvSpPr>
+            <a:spLocks noGrp="1"/>
+          </p:cNvSpPr>
+          <p:nvPr>
+            <p:ph type="sldNum" sz="quarter" idx="10"/>
+          </p:nvPr>
+        </p:nvSpPr>
+        <p:spPr/>
+        <p:txBody>
+          <a:bodyPr/>
+          <a:lstStyle/>
+          <a:p>
+            <a:fld id="{F7021451-1387-4CA6-816F-3879F97B5CBC}" type="slidenum">
+              <a:rPr lang="en-US"/>
+              <a:t>54</a:t>
+            </a:fld>
+            <a:endParaRPr lang="en-US"/>
+          </a:p>
+        </p:txBody>
+      </p:sp>
+    </p:spTree>
+    <p:extLst>
+      <p:ext uri="{BB962C8B-B14F-4D97-AF65-F5344CB8AC3E}">
+        <p14:creationId xmlns:p14="http://schemas.microsoft.com/office/powerpoint/2010/main" val="1024086991"/>
+      </p:ext>
+    </p:extLst>
+  </p:cSld>
+  <p:clrMapOvr>
+    <a:masterClrMapping/>
+  </p:clrMapOvr>
+</p:notes>
+</file>
+
+<file path=ppt/notesSlides/notesSlide55.xml><?xml version="1.0" encoding="utf-8"?>
+<p:notes xmlns:a="http://schemas.openxmlformats.org/drawingml/2006/main" xmlns:r="http://schemas.openxmlformats.org/officeDocument/2006/relationships" xmlns:p="http://schemas.openxmlformats.org/presentationml/2006/main">
+  <p:cSld>
+    <p:spTree>
+      <p:nvGrpSpPr>
+        <p:cNvPr id="1" name=""/>
+        <p:cNvGrpSpPr/>
+        <p:nvPr/>
+      </p:nvGrpSpPr>
+      <p:grpSpPr>
+        <a:xfrm>
+          <a:off x="0" y="0"/>
+          <a:ext cx="0" cy="0"/>
+          <a:chOff x="0" y="0"/>
+          <a:chExt cx="0" cy="0"/>
+        </a:xfrm>
+      </p:grpSpPr>
+      <p:sp>
+        <p:nvSpPr>
+          <p:cNvPr id="2" name="Slide Image Placeholder 1"/>
+          <p:cNvSpPr>
+            <a:spLocks noGrp="1" noRot="1" noChangeAspect="1"/>
+          </p:cNvSpPr>
+          <p:nvPr>
+            <p:ph type="sldImg"/>
+          </p:nvPr>
+        </p:nvSpPr>
+        <p:spPr/>
+      </p:sp>
+      <p:sp>
+        <p:nvSpPr>
+          <p:cNvPr id="3" name="Notes Placeholder 2"/>
+          <p:cNvSpPr>
+            <a:spLocks noGrp="1"/>
+          </p:cNvSpPr>
+          <p:nvPr>
+            <p:ph type="body" idx="1"/>
+          </p:nvPr>
+        </p:nvSpPr>
+        <p:spPr/>
+        <p:txBody>
+          <a:bodyPr/>
+          <a:lstStyle/>
+          <a:p>
+            <a:r>
+              <a:rPr lang="en-US" dirty="0"/>
+              <a:t>I complete the second page of the logbook: the matter taught, the evaluation, the homework and the attendance.</a:t>
+            </a:r>
+            <a:endParaRPr lang="en-US" dirty="0"/>
+          </a:p>
+        </p:txBody>
+      </p:sp>
+      <p:sp>
+        <p:nvSpPr>
+          <p:cNvPr id="4" name="Slide Number Placeholder 3"/>
+          <p:cNvSpPr>
+            <a:spLocks noGrp="1"/>
+          </p:cNvSpPr>
+          <p:nvPr>
+            <p:ph type="sldNum" sz="quarter" idx="10"/>
+          </p:nvPr>
+        </p:nvSpPr>
+        <p:spPr/>
+        <p:txBody>
+          <a:bodyPr/>
+          <a:lstStyle/>
+          <a:p>
+            <a:fld id="{F7021451-1387-4CA6-816F-3879F97B5CBC}" type="slidenum">
+              <a:rPr lang="en-US"/>
+              <a:t>55</a:t>
+            </a:fld>
+            <a:endParaRPr lang="en-US"/>
+          </a:p>
+        </p:txBody>
+      </p:sp>
+    </p:spTree>
+    <p:extLst>
+      <p:ext uri="{BB962C8B-B14F-4D97-AF65-F5344CB8AC3E}">
+        <p14:creationId xmlns:p14="http://schemas.microsoft.com/office/powerpoint/2010/main" val="1024086991"/>
+      </p:ext>
+    </p:extLst>
+  </p:cSld>
+  <p:clrMapOvr>
+    <a:masterClrMapping/>
+  </p:clrMapOvr>
+</p:notes>
+</file>
+
+<file path=ppt/notesSlides/notesSlide56.xml><?xml version="1.0" encoding="utf-8"?>
+<p:notes xmlns:a="http://schemas.openxmlformats.org/drawingml/2006/main" xmlns:r="http://schemas.openxmlformats.org/officeDocument/2006/relationships" xmlns:p="http://schemas.openxmlformats.org/presentationml/2006/main">
+  <p:cSld>
+    <p:spTree>
+      <p:nvGrpSpPr>
+        <p:cNvPr id="1" name=""/>
+        <p:cNvGrpSpPr/>
+        <p:nvPr/>
+      </p:nvGrpSpPr>
+      <p:grpSpPr>
+        <a:xfrm>
+          <a:off x="0" y="0"/>
+          <a:ext cx="0" cy="0"/>
+          <a:chOff x="0" y="0"/>
+          <a:chExt cx="0" cy="0"/>
+        </a:xfrm>
+      </p:grpSpPr>
+      <p:sp>
+        <p:nvSpPr>
+          <p:cNvPr id="2" name="Slide Image Placeholder 1"/>
+          <p:cNvSpPr>
+            <a:spLocks noGrp="1" noRot="1" noChangeAspect="1"/>
+          </p:cNvSpPr>
+          <p:nvPr>
+            <p:ph type="sldImg"/>
+          </p:nvPr>
+        </p:nvSpPr>
+        <p:spPr/>
+      </p:sp>
+      <p:sp>
+        <p:nvSpPr>
+          <p:cNvPr id="3" name="Notes Placeholder 2"/>
+          <p:cNvSpPr>
+            <a:spLocks noGrp="1"/>
+          </p:cNvSpPr>
+          <p:nvPr>
+            <p:ph type="body" idx="1"/>
+          </p:nvPr>
+        </p:nvSpPr>
+        <p:spPr/>
+        <p:txBody>
+          <a:bodyPr/>
+          <a:lstStyle/>
+          <a:p>
+            <a:r>
+              <a:rPr lang="en-US" dirty="0"/>
+              <a:t>This slide is for me, the teacher: it gives the timing of the lesson and what to do if the projector is not available.</a:t>
+            </a:r>
+            <a:endParaRPr lang="en-US" dirty="0"/>
+          </a:p>
+        </p:txBody>
+      </p:sp>
+      <p:sp>
+        <p:nvSpPr>
+          <p:cNvPr id="4" name="Slide Number Placeholder 3"/>
+          <p:cNvSpPr>
+            <a:spLocks noGrp="1"/>
+          </p:cNvSpPr>
+          <p:nvPr>
+            <p:ph type="sldNum" sz="quarter" idx="10"/>
+          </p:nvPr>
+        </p:nvSpPr>
+        <p:spPr/>
+        <p:txBody>
+          <a:bodyPr/>
+          <a:lstStyle/>
+          <a:p>
+            <a:fld id="{F7021451-1387-4CA6-816F-3879F97B5CBC}" type="slidenum">
+              <a:rPr lang="en-US"/>
+              <a:t>56</a:t>
+            </a:fld>
+            <a:endParaRPr lang="en-US"/>
+          </a:p>
+        </p:txBody>
+      </p:sp>
+    </p:spTree>
+    <p:extLst>
+      <p:ext uri="{BB962C8B-B14F-4D97-AF65-F5344CB8AC3E}">
+        <p14:creationId xmlns:p14="http://schemas.microsoft.com/office/powerpoint/2010/main" val="1024086991"/>
+      </p:ext>
+    </p:extLst>
+  </p:cSld>
+  <p:clrMapOvr>
+    <a:masterClrMapping/>
+  </p:clrMapOvr>
+</p:notes>
+</file>
+
+<file path=ppt/notesSlides/notesSlide57.xml><?xml version="1.0" encoding="utf-8"?>
+<p:notes xmlns:a="http://schemas.openxmlformats.org/drawingml/2006/main" xmlns:r="http://schemas.openxmlformats.org/officeDocument/2006/relationships" xmlns:p="http://schemas.openxmlformats.org/presentationml/2006/main">
+  <p:cSld>
+    <p:spTree>
+      <p:nvGrpSpPr>
+        <p:cNvPr id="1" name=""/>
+        <p:cNvGrpSpPr/>
+        <p:nvPr/>
+      </p:nvGrpSpPr>
+      <p:grpSpPr>
+        <a:xfrm>
+          <a:off x="0" y="0"/>
+          <a:ext cx="0" cy="0"/>
+          <a:chOff x="0" y="0"/>
+          <a:chExt cx="0" cy="0"/>
+        </a:xfrm>
+      </p:grpSpPr>
+      <p:sp>
+        <p:nvSpPr>
+          <p:cNvPr id="2" name="Slide Image Placeholder 1"/>
+          <p:cNvSpPr>
+            <a:spLocks noGrp="1" noRot="1" noChangeAspect="1"/>
+          </p:cNvSpPr>
+          <p:nvPr>
+            <p:ph type="sldImg"/>
+          </p:nvPr>
+        </p:nvSpPr>
+        <p:spPr/>
+      </p:sp>
+      <p:sp>
+        <p:nvSpPr>
+          <p:cNvPr id="3" name="Notes Placeholder 2"/>
+          <p:cNvSpPr>
+            <a:spLocks noGrp="1"/>
+          </p:cNvSpPr>
+          <p:nvPr>
+            <p:ph type="body" idx="1"/>
+          </p:nvPr>
+        </p:nvSpPr>
+        <p:spPr/>
+        <p:txBody>
+          <a:bodyPr/>
+          <a:lstStyle/>
+          <a:p>
+            <a:r>
+              <a:rPr lang="en-US" dirty="0"/>
+              <a:t>These are the references and picture credits used to prepare this lesson.</a:t>
+            </a:r>
+            <a:endParaRPr lang="en-US" dirty="0"/>
+          </a:p>
+        </p:txBody>
+      </p:sp>
+      <p:sp>
+        <p:nvSpPr>
+          <p:cNvPr id="4" name="Slide Number Placeholder 3"/>
+          <p:cNvSpPr>
+            <a:spLocks noGrp="1"/>
+          </p:cNvSpPr>
+          <p:nvPr>
+            <p:ph type="sldNum" sz="quarter" idx="10"/>
+          </p:nvPr>
+        </p:nvSpPr>
+        <p:spPr/>
+        <p:txBody>
+          <a:bodyPr/>
+          <a:lstStyle/>
+          <a:p>
+            <a:fld id="{F7021451-1387-4CA6-816F-3879F97B5CBC}" type="slidenum">
+              <a:rPr lang="en-US"/>
+              <a:t>57</a:t>
             </a:fld>
             <a:endParaRPr lang="en-US"/>
           </a:p>
@@ -4776,7 +5310,7 @@
           <a:p>
             <a:r>
               <a:rPr lang="en-US" dirty="0"/>
-              <a:t>By the end of this lesson, you should be able to do three things. Number 1: define water scarcity. Number 2: describe the problems of quantity and quality of water. Number 3: propose ways to manage and use water well.</a:t>
+              <a:t>By the end of this lesson, you should be able to do three things. Number 1: define water scarcity. Number 2: describe the problems of quantity and quality of water and its uses. Number 3: propose ways to manage water well.</a:t>
             </a:r>
             <a:endParaRPr lang="en-US" dirty="0"/>
           </a:p>
@@ -4952,7 +5486,7 @@
           <a:p>
             <a:r>
               <a:rPr lang="en-US" dirty="0"/>
-              <a:t>Listen carefully to this situation from real life. In the dry season, the tap in Ali's quarter of Garoua runs only two days a week. His family buys water from sellers and sometimes drinks water from a well that is not clean. Think about it, because I am going to ask you some questions.</a:t>
+              <a:t>Listen carefully to this situation from real life. In the dry season, the tap in Ali's quarter of Garoua runs only two days a week. His family buys water from sellers and sometimes drinks water from a well that is not clean. Ali asks: "Why is there not enough clean water, and what can we do?" Think about it, because I am going to ask you some questions.</a:t>
             </a:r>
             <a:endParaRPr lang="en-US" dirty="0"/>
           </a:p>
@@ -6635,7 +7169,7 @@
                 <a:ea typeface="Times New Roman" pitchFamily="34" charset="-122"/>
                 <a:cs typeface="Times New Roman" pitchFamily="34" charset="-120"/>
               </a:rPr>
-              <a:t>There is not enough clean water.</a:t>
+              <a:t>There is not enough clean water, and Ali does not know what to do.</a:t>
             </a:r>
             <a:endParaRPr lang="en-US" sz="4000" dirty="0"/>
           </a:p>
@@ -8382,7 +8916,7 @@
                 <a:ea typeface="Times New Roman" pitchFamily="34" charset="-122"/>
                 <a:cs typeface="Times New Roman" pitchFamily="34" charset="-120"/>
               </a:rPr>
-              <a:t>What is water scarcity?</a:t>
+              <a:t>Why do these women carry water from far away?</a:t>
             </a:r>
             <a:endParaRPr lang="en-US" sz="4000" dirty="0"/>
           </a:p>
@@ -9196,7 +9730,7 @@
                 <a:ea typeface="Times New Roman" pitchFamily="34" charset="-122"/>
                 <a:cs typeface="Times New Roman" pitchFamily="34" charset="-120"/>
               </a:rPr>
-              <a:t>A lack of enough clean water for people's needs.</a:t>
+              <a:t>There is not enough clean water near their homes: this is water scarcity.</a:t>
             </a:r>
             <a:endParaRPr lang="en-US" sz="4000" dirty="0"/>
           </a:p>
@@ -9848,7 +10382,7 @@
                 <a:ea typeface="Times New Roman" pitchFamily="34" charset="-122"/>
                 <a:cs typeface="Times New Roman" pitchFamily="34" charset="-120"/>
               </a:rPr>
-              <a:t>Only about 2.5 %; most is salty sea water.</a:t>
+              <a:t>Only about 2.5 %; most water is salty sea water.</a:t>
             </a:r>
             <a:endParaRPr lang="en-US" sz="4000" dirty="0"/>
           </a:p>
@@ -10933,7 +11467,7 @@
                 <a:ea typeface="Times New Roman" pitchFamily="34" charset="-122"/>
                 <a:cs typeface="Times New Roman" pitchFamily="34" charset="-120"/>
               </a:rPr>
-              <a:t>Give three uses of water and one way we waste it.</a:t>
+              <a:t>How is water wasted in this picture?</a:t>
             </a:r>
             <a:endParaRPr lang="en-US" sz="4000" dirty="0"/>
           </a:p>
@@ -11152,7 +11686,7 @@
                 <a:ea typeface="Times New Roman" pitchFamily="34" charset="-122"/>
                 <a:cs typeface="Times New Roman" pitchFamily="34" charset="-120"/>
               </a:rPr>
-              <a:t>Drinking, cooking and washing (also farming); leaking taps waste water.</a:t>
+              <a:t>The tap leaks, so clean water is lost.</a:t>
             </a:r>
             <a:endParaRPr lang="en-US" sz="4000" dirty="0"/>
           </a:p>
@@ -11973,7 +12507,7 @@
                           <a:ea typeface="Calibri" pitchFamily="34" charset="-122"/>
                           <a:cs typeface="Calibri" pitchFamily="34" charset="-120"/>
                         </a:rPr>
-                        <a:t>Enquiry on the problem of water scarcity: quantity, quality, management and uses.</a:t>
+                        <a:t>Enquiry on the problem of water scarcity (quantity, quality, management and uses).</a:t>
                       </a:r>
                       <a:endParaRPr lang="en-US" sz="1700" dirty="0">
                         <a:latin typeface="Calibri" charset="0"/>
@@ -12594,7 +13128,7 @@
                 <a:ea typeface="Times New Roman" pitchFamily="34" charset="-122"/>
                 <a:cs typeface="Times New Roman" pitchFamily="34" charset="-120"/>
               </a:rPr>
-              <a:t>Give three ways to manage water well.</a:t>
+              <a:t>How can a family keep water for the dry season?</a:t>
             </a:r>
             <a:endParaRPr lang="en-US" sz="4000" dirty="0"/>
           </a:p>
@@ -12813,7 +13347,7 @@
                 <a:ea typeface="Times New Roman" pitchFamily="34" charset="-122"/>
                 <a:cs typeface="Times New Roman" pitchFamily="34" charset="-120"/>
               </a:rPr>
-              <a:t>Store rainwater, repair leaks and treat drinking water (also build boreholes).</a:t>
+              <a:t>By collecting rainwater from the roof in a tank.</a:t>
             </a:r>
             <a:endParaRPr lang="en-US" sz="4000" dirty="0"/>
           </a:p>
@@ -13207,7 +13741,7 @@
         <p:spPr>
           <a:xfrm>
             <a:off x="0" y="658368"/>
-            <a:ext cx="5120640" cy="5833872"/>
+            <a:ext cx="2468880" cy="5833872"/>
           </a:xfrm>
           <a:prstGeom prst="rect">
             <a:avLst/>
@@ -13222,8 +13756,8 @@
         </p:nvSpPr>
         <p:spPr>
           <a:xfrm>
-            <a:off x="5349240" y="1005840"/>
-            <a:ext cx="6522415" cy="731520"/>
+            <a:off x="2697480" y="1005840"/>
+            <a:ext cx="9174175" cy="731520"/>
           </a:xfrm>
           <a:prstGeom prst="rect">
             <a:avLst/>
@@ -13263,8 +13797,8 @@
         </p:nvSpPr>
         <p:spPr>
           <a:xfrm>
-            <a:off x="5349240" y="1783080"/>
-            <a:ext cx="6522415" cy="4663440"/>
+            <a:off x="2697480" y="1783080"/>
+            <a:ext cx="9174175" cy="4663440"/>
           </a:xfrm>
           <a:prstGeom prst="rect">
             <a:avLst/>
@@ -13329,6 +13863,43 @@
                 <a:cs typeface="Times New Roman" pitchFamily="34" charset="-120"/>
               </a:rPr>
               <a:t>It is a lack of enough clean water to meet people's needs.</a:t>
+            </a:r>
+            <a:endParaRPr lang="en-US" sz="4000" dirty="0"/>
+          </a:p>
+          <a:p>
+            <a:pPr algn="l" indent="0" marL="0">
+              <a:spcAft>
+                <a:spcPts val="800"/>
+              </a:spcAft>
+              <a:buNone/>
+            </a:pPr>
+            <a:r>
+              <a:rPr lang="en-US" sz="4000" b="1" dirty="0">
+                <a:solidFill>
+                  <a:srgbClr val="111111"/>
+                </a:solidFill>
+                <a:latin typeface="Times New Roman" pitchFamily="34" charset="0"/>
+                <a:ea typeface="Times New Roman" pitchFamily="34" charset="-122"/>
+                <a:cs typeface="Times New Roman" pitchFamily="34" charset="-120"/>
+              </a:rPr>
+              <a:t>Water management: </a:t>
+            </a:r>
+            <a:pPr algn="l" indent="0" marL="0">
+              <a:spcAft>
+                <a:spcPts val="800"/>
+              </a:spcAft>
+              <a:buNone/>
+            </a:pPr>
+            <a:r>
+              <a:rPr lang="en-US" sz="4000" dirty="0">
+                <a:solidFill>
+                  <a:srgbClr val="111111"/>
+                </a:solidFill>
+                <a:latin typeface="Times New Roman" pitchFamily="34" charset="0"/>
+                <a:ea typeface="Times New Roman" pitchFamily="34" charset="-122"/>
+                <a:cs typeface="Times New Roman" pitchFamily="34" charset="-120"/>
+              </a:rPr>
+              <a:t>It is the good use, storage and protection of water.</a:t>
             </a:r>
             <a:endParaRPr lang="en-US" sz="4000" dirty="0"/>
           </a:p>
@@ -13446,9 +14017,129 @@
           </a:p>
         </p:txBody>
       </p:sp>
+      <p:sp>
+        <p:nvSpPr>
+          <p:cNvPr id="3" name="Text 1"/>
+          <p:cNvSpPr/>
+          <p:nvPr/>
+        </p:nvSpPr>
+        <p:spPr>
+          <a:xfrm>
+            <a:off x="365760" y="1005840"/>
+            <a:ext cx="11460175" cy="731520"/>
+          </a:xfrm>
+          <a:prstGeom prst="rect">
+            <a:avLst/>
+          </a:prstGeom>
+          <a:noFill/>
+          <a:ln/>
+        </p:spPr>
+        <p:txBody>
+          <a:bodyPr wrap="square" lIns="0" tIns="0" rIns="0" bIns="0" rtlCol="0" anchor="ctr">
+            <a:normAutofit/>
+          </a:bodyPr>
+          <a:lstStyle/>
+          <a:p>
+            <a:pPr algn="ctr" indent="0" marL="0">
+              <a:buNone/>
+            </a:pPr>
+            <a:r>
+              <a:rPr lang="en-US" sz="3600" b="1" dirty="0">
+                <a:solidFill>
+                  <a:srgbClr val="990011"/>
+                </a:solidFill>
+                <a:latin typeface="Times New Roman" pitchFamily="34" charset="0"/>
+                <a:ea typeface="Times New Roman" pitchFamily="34" charset="-122"/>
+                <a:cs typeface="Times New Roman" pitchFamily="34" charset="-120"/>
+              </a:rPr>
+              <a:t>1. Quantity of Water</a:t>
+            </a:r>
+            <a:endParaRPr lang="en-US" sz="3600" dirty="0"/>
+          </a:p>
+        </p:txBody>
+      </p:sp>
+      <p:sp>
+        <p:nvSpPr>
+          <p:cNvPr id="4" name="Text 2"/>
+          <p:cNvSpPr/>
+          <p:nvPr/>
+        </p:nvSpPr>
+        <p:spPr>
+          <a:xfrm>
+            <a:off x="365760" y="1783080"/>
+            <a:ext cx="4846320" cy="4617720"/>
+          </a:xfrm>
+          <a:prstGeom prst="rect">
+            <a:avLst/>
+          </a:prstGeom>
+          <a:noFill/>
+          <a:ln/>
+        </p:spPr>
+        <p:txBody>
+          <a:bodyPr wrap="square" lIns="0" tIns="0" rIns="0" bIns="0" rtlCol="0" anchor="t"/>
+          <a:lstStyle/>
+          <a:p>
+            <a:pPr algn="l" indent="0" marL="0">
+              <a:spcAft>
+                <a:spcPts val="800"/>
+              </a:spcAft>
+              <a:buNone/>
+            </a:pPr>
+            <a:r>
+              <a:rPr lang="en-US" sz="3600" i="1" dirty="0">
+                <a:solidFill>
+                  <a:srgbClr val="111111"/>
+                </a:solidFill>
+                <a:latin typeface="Times New Roman" pitchFamily="34" charset="0"/>
+                <a:ea typeface="Times New Roman" pitchFamily="34" charset="-122"/>
+                <a:cs typeface="Times New Roman" pitchFamily="34" charset="-120"/>
+              </a:rPr>
+              <a:t>The quantity of water is limited for the following reasons:</a:t>
+            </a:r>
+            <a:endParaRPr lang="en-US" sz="3600" dirty="0"/>
+          </a:p>
+          <a:p>
+            <a:pPr algn="l" indent="0" marL="0">
+              <a:spcAft>
+                <a:spcPts val="800"/>
+              </a:spcAft>
+              <a:buNone/>
+            </a:pPr>
+            <a:r>
+              <a:rPr lang="en-US" sz="3600" b="1" dirty="0">
+                <a:solidFill>
+                  <a:srgbClr val="111111"/>
+                </a:solidFill>
+                <a:latin typeface="Times New Roman" pitchFamily="34" charset="0"/>
+                <a:ea typeface="Times New Roman" pitchFamily="34" charset="-122"/>
+                <a:cs typeface="Times New Roman" pitchFamily="34" charset="-120"/>
+              </a:rPr>
+              <a:t>Little fresh water: </a:t>
+            </a:r>
+            <a:pPr algn="l" indent="0" marL="0">
+              <a:spcAft>
+                <a:spcPts val="800"/>
+              </a:spcAft>
+              <a:buNone/>
+            </a:pPr>
+            <a:r>
+              <a:rPr lang="en-US" sz="3600" dirty="0">
+                <a:solidFill>
+                  <a:srgbClr val="111111"/>
+                </a:solidFill>
+                <a:latin typeface="Times New Roman" pitchFamily="34" charset="0"/>
+                <a:ea typeface="Times New Roman" pitchFamily="34" charset="-122"/>
+                <a:cs typeface="Times New Roman" pitchFamily="34" charset="-120"/>
+              </a:rPr>
+              <a:t>Only about 2.5 % of the water on the Earth is fresh.</a:t>
+            </a:r>
+            <a:endParaRPr lang="en-US" sz="3600" dirty="0"/>
+          </a:p>
+        </p:txBody>
+      </p:sp>
       <p:pic>
         <p:nvPicPr>
-          <p:cNvPr id="3" name="Image 0" descr="/home/claude/f4/img/minesec_sheet.png">    </p:cNvPr>
+          <p:cNvPr id="5" name="Image 0" descr="/home/claude/f4/img/v2/world_water_big.png">    </p:cNvPr>
           <p:cNvPicPr>
             <a:picLocks noChangeAspect="1"/>
           </p:cNvPicPr>
@@ -13462,8 +14153,8 @@
         </p:blipFill>
         <p:spPr>
           <a:xfrm>
-            <a:off x="0" y="658368"/>
-            <a:ext cx="2468880" cy="5833872"/>
+            <a:off x="5349240" y="2617506"/>
+            <a:ext cx="6659575" cy="2601397"/>
           </a:xfrm>
           <a:prstGeom prst="rect">
             <a:avLst/>
@@ -13472,14 +14163,14 @@
       </p:pic>
       <p:sp>
         <p:nvSpPr>
-          <p:cNvPr id="4" name="Text 1"/>
+          <p:cNvPr id="6" name="Text 3"/>
           <p:cNvSpPr/>
           <p:nvPr/>
         </p:nvSpPr>
         <p:spPr>
           <a:xfrm>
-            <a:off x="2697480" y="1005840"/>
-            <a:ext cx="9174175" cy="731520"/>
+            <a:off x="5349240" y="6089904"/>
+            <a:ext cx="6659575" cy="347472"/>
           </a:xfrm>
           <a:prstGeom prst="rect">
             <a:avLst/>
@@ -13488,142 +14179,24 @@
           <a:ln/>
         </p:spPr>
         <p:txBody>
-          <a:bodyPr wrap="square" lIns="0" tIns="0" rIns="0" bIns="0" rtlCol="0" anchor="ctr">
-            <a:normAutofit/>
-          </a:bodyPr>
+          <a:bodyPr wrap="square" lIns="0" tIns="0" rIns="0" bIns="0" rtlCol="0" anchor="ctr"/>
           <a:lstStyle/>
           <a:p>
             <a:pPr algn="ctr" indent="0" marL="0">
               <a:buNone/>
             </a:pPr>
             <a:r>
-              <a:rPr lang="en-US" sz="3600" b="1" dirty="0">
-                <a:solidFill>
-                  <a:srgbClr val="990011"/>
+              <a:rPr lang="en-US" sz="1600" i="1" dirty="0">
+                <a:solidFill>
+                  <a:srgbClr val="555555"/>
                 </a:solidFill>
                 <a:latin typeface="Times New Roman" pitchFamily="34" charset="0"/>
                 <a:ea typeface="Times New Roman" pitchFamily="34" charset="-122"/>
                 <a:cs typeface="Times New Roman" pitchFamily="34" charset="-120"/>
               </a:rPr>
-              <a:t>1. Quantity and Quality</a:t>
-            </a:r>
-            <a:endParaRPr lang="en-US" sz="3600" dirty="0"/>
-          </a:p>
-        </p:txBody>
-      </p:sp>
-      <p:sp>
-        <p:nvSpPr>
-          <p:cNvPr id="5" name="Text 2"/>
-          <p:cNvSpPr/>
-          <p:nvPr/>
-        </p:nvSpPr>
-        <p:spPr>
-          <a:xfrm>
-            <a:off x="2697480" y="1783080"/>
-            <a:ext cx="9174175" cy="4663440"/>
-          </a:xfrm>
-          <a:prstGeom prst="rect">
-            <a:avLst/>
-          </a:prstGeom>
-          <a:noFill/>
-          <a:ln/>
-        </p:spPr>
-        <p:txBody>
-          <a:bodyPr wrap="square" lIns="0" tIns="0" rIns="0" bIns="0" rtlCol="0" anchor="t"/>
-          <a:lstStyle/>
-          <a:p>
-            <a:pPr algn="l" indent="0" marL="0">
-              <a:spcAft>
-                <a:spcPts val="800"/>
-              </a:spcAft>
-              <a:buNone/>
-            </a:pPr>
-            <a:r>
-              <a:rPr lang="en-US" sz="4000" i="1" dirty="0">
-                <a:solidFill>
-                  <a:srgbClr val="111111"/>
-                </a:solidFill>
-                <a:latin typeface="Times New Roman" pitchFamily="34" charset="0"/>
-                <a:ea typeface="Times New Roman" pitchFamily="34" charset="-122"/>
-                <a:cs typeface="Times New Roman" pitchFamily="34" charset="-120"/>
-              </a:rPr>
-              <a:t>Water scarcity is a problem of quantity and quality:</a:t>
-            </a:r>
-            <a:endParaRPr lang="en-US" sz="4000" dirty="0"/>
-          </a:p>
-          <a:p>
-            <a:pPr algn="l" indent="0" marL="0">
-              <a:spcAft>
-                <a:spcPts val="800"/>
-              </a:spcAft>
-              <a:buNone/>
-            </a:pPr>
-            <a:r>
-              <a:rPr lang="en-US" sz="4000" b="1" dirty="0">
-                <a:solidFill>
-                  <a:srgbClr val="111111"/>
-                </a:solidFill>
-                <a:latin typeface="Times New Roman" pitchFamily="34" charset="0"/>
-                <a:ea typeface="Times New Roman" pitchFamily="34" charset="-122"/>
-                <a:cs typeface="Times New Roman" pitchFamily="34" charset="-120"/>
-              </a:rPr>
-              <a:t>Quantity: </a:t>
-            </a:r>
-            <a:pPr algn="l" indent="0" marL="0">
-              <a:spcAft>
-                <a:spcPts val="800"/>
-              </a:spcAft>
-              <a:buNone/>
-            </a:pPr>
-            <a:r>
-              <a:rPr lang="en-US" sz="4000" dirty="0">
-                <a:solidFill>
-                  <a:srgbClr val="111111"/>
-                </a:solidFill>
-                <a:latin typeface="Times New Roman" pitchFamily="34" charset="0"/>
-                <a:ea typeface="Times New Roman" pitchFamily="34" charset="-122"/>
-                <a:cs typeface="Times New Roman" pitchFamily="34" charset="-120"/>
-              </a:rPr>
-              <a:t>Long dry seasons, droughts and population growth reduce the water available.</a:t>
-            </a:r>
-            <a:endParaRPr lang="en-US" sz="4000" dirty="0"/>
-          </a:p>
-          <a:p>
-            <a:pPr algn="l" indent="0" marL="0">
-              <a:spcAft>
-                <a:spcPts val="800"/>
-              </a:spcAft>
-              <a:buNone/>
-            </a:pPr>
-            <a:r>
-              <a:rPr lang="en-US" sz="4000" b="1" dirty="0">
-                <a:solidFill>
-                  <a:srgbClr val="111111"/>
-                </a:solidFill>
-                <a:latin typeface="Times New Roman" pitchFamily="34" charset="0"/>
-                <a:ea typeface="Times New Roman" pitchFamily="34" charset="-122"/>
-                <a:cs typeface="Times New Roman" pitchFamily="34" charset="-120"/>
-              </a:rPr>
-              <a:t>Quality: </a:t>
-            </a:r>
-            <a:pPr algn="l" indent="0" marL="0">
-              <a:spcAft>
-                <a:spcPts val="800"/>
-              </a:spcAft>
-              <a:buNone/>
-            </a:pPr>
-            <a:r>
-              <a:rPr lang="en-US" sz="4000" dirty="0">
-                <a:solidFill>
-                  <a:srgbClr val="111111"/>
-                </a:solidFill>
-                <a:latin typeface="Times New Roman" pitchFamily="34" charset="0"/>
-                <a:ea typeface="Times New Roman" pitchFamily="34" charset="-122"/>
-                <a:cs typeface="Times New Roman" pitchFamily="34" charset="-120"/>
-              </a:rPr>
-              <a:t>Dirty water from open wells and rivers causes cholera and typhoid.</a:t>
-            </a:r>
-            <a:endParaRPr lang="en-US" sz="4000" dirty="0"/>
+              <a:t>Illustration: water on the Earth</a:t>
+            </a:r>
+            <a:endParaRPr lang="en-US" sz="1600" dirty="0"/>
           </a:p>
         </p:txBody>
       </p:sp>
@@ -13756,7 +14329,7 @@
         <p:spPr>
           <a:xfrm>
             <a:off x="0" y="658368"/>
-            <a:ext cx="3840480" cy="5833872"/>
+            <a:ext cx="5120640" cy="5833872"/>
           </a:xfrm>
           <a:prstGeom prst="rect">
             <a:avLst/>
@@ -13771,8 +14344,8 @@
         </p:nvSpPr>
         <p:spPr>
           <a:xfrm>
-            <a:off x="4069080" y="1005840"/>
-            <a:ext cx="7802575" cy="731520"/>
+            <a:off x="5349240" y="1005840"/>
+            <a:ext cx="6522415" cy="731520"/>
           </a:xfrm>
           <a:prstGeom prst="rect">
             <a:avLst/>
@@ -13798,7 +14371,7 @@
                 <a:ea typeface="Times New Roman" pitchFamily="34" charset="-122"/>
                 <a:cs typeface="Times New Roman" pitchFamily="34" charset="-120"/>
               </a:rPr>
-              <a:t>2. Uses of Water</a:t>
+              <a:t>1. Quantity of Water</a:t>
             </a:r>
             <a:endParaRPr lang="en-US" sz="3600" dirty="0"/>
           </a:p>
@@ -13812,8 +14385,8 @@
         </p:nvSpPr>
         <p:spPr>
           <a:xfrm>
-            <a:off x="4069080" y="1783080"/>
-            <a:ext cx="7802575" cy="4663440"/>
+            <a:off x="5349240" y="1783080"/>
+            <a:ext cx="6522415" cy="4663440"/>
           </a:xfrm>
           <a:prstGeom prst="rect">
             <a:avLst/>
@@ -13832,7 +14405,7 @@
               <a:buNone/>
             </a:pPr>
             <a:r>
-              <a:rPr lang="en-US" sz="4000" i="1" dirty="0">
+              <a:rPr lang="en-US" sz="4000" b="1" dirty="0">
                 <a:solidFill>
                   <a:srgbClr val="111111"/>
                 </a:solidFill>
@@ -13840,11 +14413,8 @@
                 <a:ea typeface="Times New Roman" pitchFamily="34" charset="-122"/>
                 <a:cs typeface="Times New Roman" pitchFamily="34" charset="-120"/>
               </a:rPr>
-              <a:t>Water has the following uses:</a:t>
-            </a:r>
-            <a:endParaRPr lang="en-US" sz="4000" dirty="0"/>
-          </a:p>
-          <a:p>
+              <a:t>Long dry seasons and droughts: </a:t>
+            </a:r>
             <a:pPr algn="l" indent="0" marL="0">
               <a:spcAft>
                 <a:spcPts val="800"/>
@@ -13852,7 +14422,7 @@
               <a:buNone/>
             </a:pPr>
             <a:r>
-              <a:rPr lang="en-US" sz="4000" b="1" dirty="0">
+              <a:rPr lang="en-US" sz="4000" dirty="0">
                 <a:solidFill>
                   <a:srgbClr val="111111"/>
                 </a:solidFill>
@@ -13860,8 +14430,11 @@
                 <a:ea typeface="Times New Roman" pitchFamily="34" charset="-122"/>
                 <a:cs typeface="Times New Roman" pitchFamily="34" charset="-120"/>
               </a:rPr>
-              <a:t>Domestic uses: </a:t>
-            </a:r>
+              <a:t>Rivers and wells dry up in the north.</a:t>
+            </a:r>
+            <a:endParaRPr lang="en-US" sz="4000" dirty="0"/>
+          </a:p>
+          <a:p>
             <a:pPr algn="l" indent="0" marL="0">
               <a:spcAft>
                 <a:spcPts val="800"/>
@@ -13869,7 +14442,7 @@
               <a:buNone/>
             </a:pPr>
             <a:r>
-              <a:rPr lang="en-US" sz="4000" dirty="0">
+              <a:rPr lang="en-US" sz="4000" b="1" dirty="0">
                 <a:solidFill>
                   <a:srgbClr val="111111"/>
                 </a:solidFill>
@@ -13877,11 +14450,8 @@
                 <a:ea typeface="Times New Roman" pitchFamily="34" charset="-122"/>
                 <a:cs typeface="Times New Roman" pitchFamily="34" charset="-120"/>
               </a:rPr>
-              <a:t>We use water for drinking, cooking and washing.</a:t>
-            </a:r>
-            <a:endParaRPr lang="en-US" sz="4000" dirty="0"/>
-          </a:p>
-          <a:p>
+              <a:t>Population growth: </a:t>
+            </a:r>
             <a:pPr algn="l" indent="0" marL="0">
               <a:spcAft>
                 <a:spcPts val="800"/>
@@ -13889,7 +14459,7 @@
               <a:buNone/>
             </a:pPr>
             <a:r>
-              <a:rPr lang="en-US" sz="4000" b="1" dirty="0">
+              <a:rPr lang="en-US" sz="4000" dirty="0">
                 <a:solidFill>
                   <a:srgbClr val="111111"/>
                 </a:solidFill>
@@ -13897,24 +14467,7 @@
                 <a:ea typeface="Times New Roman" pitchFamily="34" charset="-122"/>
                 <a:cs typeface="Times New Roman" pitchFamily="34" charset="-120"/>
               </a:rPr>
-              <a:t>Economic uses: </a:t>
-            </a:r>
-            <a:pPr algn="l" indent="0" marL="0">
-              <a:spcAft>
-                <a:spcPts val="800"/>
-              </a:spcAft>
-              <a:buNone/>
-            </a:pPr>
-            <a:r>
-              <a:rPr lang="en-US" sz="4000" dirty="0">
-                <a:solidFill>
-                  <a:srgbClr val="111111"/>
-                </a:solidFill>
-                <a:latin typeface="Times New Roman" pitchFamily="34" charset="0"/>
-                <a:ea typeface="Times New Roman" pitchFamily="34" charset="-122"/>
-                <a:cs typeface="Times New Roman" pitchFamily="34" charset="-120"/>
-              </a:rPr>
-              <a:t>Farmers, herders and factories need water.</a:t>
+              <a:t>More people need more water.</a:t>
             </a:r>
             <a:endParaRPr lang="en-US" sz="4000" dirty="0"/>
           </a:p>
@@ -14049,7 +14602,7 @@
         <p:spPr>
           <a:xfrm>
             <a:off x="0" y="658368"/>
-            <a:ext cx="5120640" cy="5833872"/>
+            <a:ext cx="3840480" cy="5833872"/>
           </a:xfrm>
           <a:prstGeom prst="rect">
             <a:avLst/>
@@ -14064,8 +14617,8 @@
         </p:nvSpPr>
         <p:spPr>
           <a:xfrm>
-            <a:off x="5349240" y="1005840"/>
-            <a:ext cx="6522415" cy="731520"/>
+            <a:off x="4069080" y="1005840"/>
+            <a:ext cx="7802575" cy="731520"/>
           </a:xfrm>
           <a:prstGeom prst="rect">
             <a:avLst/>
@@ -14091,7 +14644,7 @@
                 <a:ea typeface="Times New Roman" pitchFamily="34" charset="-122"/>
                 <a:cs typeface="Times New Roman" pitchFamily="34" charset="-120"/>
               </a:rPr>
-              <a:t>3. Management</a:t>
+              <a:t>2. Quality of Water</a:t>
             </a:r>
             <a:endParaRPr lang="en-US" sz="3600" dirty="0"/>
           </a:p>
@@ -14105,8 +14658,8 @@
         </p:nvSpPr>
         <p:spPr>
           <a:xfrm>
-            <a:off x="5349240" y="1783080"/>
-            <a:ext cx="6522415" cy="4663440"/>
+            <a:off x="4069080" y="1783080"/>
+            <a:ext cx="7802575" cy="4663440"/>
           </a:xfrm>
           <a:prstGeom prst="rect">
             <a:avLst/>
@@ -14133,7 +14686,7 @@
                 <a:ea typeface="Times New Roman" pitchFamily="34" charset="-122"/>
                 <a:cs typeface="Times New Roman" pitchFamily="34" charset="-120"/>
               </a:rPr>
-              <a:t>Water can be managed with the following measures:</a:t>
+              <a:t>The quality of water is a problem for the following reasons:</a:t>
             </a:r>
             <a:endParaRPr lang="en-US" sz="4000" dirty="0"/>
           </a:p>
@@ -14153,7 +14706,7 @@
                 <a:ea typeface="Times New Roman" pitchFamily="34" charset="-122"/>
                 <a:cs typeface="Times New Roman" pitchFamily="34" charset="-120"/>
               </a:rPr>
-              <a:t>Saving water: </a:t>
+              <a:t>Open wells and rivers: </a:t>
             </a:r>
             <a:pPr algn="l" indent="0" marL="0">
               <a:spcAft>
@@ -14170,7 +14723,7 @@
                 <a:ea typeface="Times New Roman" pitchFamily="34" charset="-122"/>
                 <a:cs typeface="Times New Roman" pitchFamily="34" charset="-120"/>
               </a:rPr>
-              <a:t>We close taps and repair leaks.</a:t>
+              <a:t>Their water is often dirty and carries germs.</a:t>
             </a:r>
             <a:endParaRPr lang="en-US" sz="4000" dirty="0"/>
           </a:p>
@@ -14190,7 +14743,7 @@
                 <a:ea typeface="Times New Roman" pitchFamily="34" charset="-122"/>
                 <a:cs typeface="Times New Roman" pitchFamily="34" charset="-120"/>
               </a:rPr>
-              <a:t>Storing water: </a:t>
+              <a:t>Diseases: </a:t>
             </a:r>
             <a:pPr algn="l" indent="0" marL="0">
               <a:spcAft>
@@ -14207,7 +14760,7 @@
                 <a:ea typeface="Times New Roman" pitchFamily="34" charset="-122"/>
                 <a:cs typeface="Times New Roman" pitchFamily="34" charset="-120"/>
               </a:rPr>
-              <a:t>We collect rainwater in tanks and build dams.</a:t>
+              <a:t>Dirty water causes cholera, typhoid and diarrhoea.</a:t>
             </a:r>
             <a:endParaRPr lang="en-US" sz="4000" dirty="0"/>
           </a:p>
@@ -14325,9 +14878,109 @@
           </a:p>
         </p:txBody>
       </p:sp>
+      <p:sp>
+        <p:nvSpPr>
+          <p:cNvPr id="3" name="Text 1"/>
+          <p:cNvSpPr/>
+          <p:nvPr/>
+        </p:nvSpPr>
+        <p:spPr>
+          <a:xfrm>
+            <a:off x="365760" y="1005840"/>
+            <a:ext cx="11460175" cy="731520"/>
+          </a:xfrm>
+          <a:prstGeom prst="rect">
+            <a:avLst/>
+          </a:prstGeom>
+          <a:noFill/>
+          <a:ln/>
+        </p:spPr>
+        <p:txBody>
+          <a:bodyPr wrap="square" lIns="0" tIns="0" rIns="0" bIns="0" rtlCol="0" anchor="ctr">
+            <a:normAutofit/>
+          </a:bodyPr>
+          <a:lstStyle/>
+          <a:p>
+            <a:pPr algn="ctr" indent="0" marL="0">
+              <a:buNone/>
+            </a:pPr>
+            <a:r>
+              <a:rPr lang="en-US" sz="3600" b="1" dirty="0">
+                <a:solidFill>
+                  <a:srgbClr val="990011"/>
+                </a:solidFill>
+                <a:latin typeface="Times New Roman" pitchFamily="34" charset="0"/>
+                <a:ea typeface="Times New Roman" pitchFamily="34" charset="-122"/>
+                <a:cs typeface="Times New Roman" pitchFamily="34" charset="-120"/>
+              </a:rPr>
+              <a:t>2. Quality of Water</a:t>
+            </a:r>
+            <a:endParaRPr lang="en-US" sz="3600" dirty="0"/>
+          </a:p>
+        </p:txBody>
+      </p:sp>
+      <p:sp>
+        <p:nvSpPr>
+          <p:cNvPr id="4" name="Text 2"/>
+          <p:cNvSpPr/>
+          <p:nvPr/>
+        </p:nvSpPr>
+        <p:spPr>
+          <a:xfrm>
+            <a:off x="365760" y="1783080"/>
+            <a:ext cx="4846320" cy="4617720"/>
+          </a:xfrm>
+          <a:prstGeom prst="rect">
+            <a:avLst/>
+          </a:prstGeom>
+          <a:noFill/>
+          <a:ln/>
+        </p:spPr>
+        <p:txBody>
+          <a:bodyPr wrap="square" lIns="0" tIns="0" rIns="0" bIns="0" rtlCol="0" anchor="t"/>
+          <a:lstStyle/>
+          <a:p>
+            <a:pPr algn="l" indent="0" marL="0">
+              <a:spcAft>
+                <a:spcPts val="800"/>
+              </a:spcAft>
+              <a:buNone/>
+            </a:pPr>
+            <a:r>
+              <a:rPr lang="en-US" sz="3600" b="1" dirty="0">
+                <a:solidFill>
+                  <a:srgbClr val="111111"/>
+                </a:solidFill>
+                <a:latin typeface="Times New Roman" pitchFamily="34" charset="0"/>
+                <a:ea typeface="Times New Roman" pitchFamily="34" charset="-122"/>
+                <a:cs typeface="Times New Roman" pitchFamily="34" charset="-120"/>
+              </a:rPr>
+              <a:t>Safe sources: </a:t>
+            </a:r>
+            <a:pPr algn="l" indent="0" marL="0">
+              <a:spcAft>
+                <a:spcPts val="800"/>
+              </a:spcAft>
+              <a:buNone/>
+            </a:pPr>
+            <a:r>
+              <a:rPr lang="en-US" sz="3600" dirty="0">
+                <a:solidFill>
+                  <a:srgbClr val="111111"/>
+                </a:solidFill>
+                <a:latin typeface="Times New Roman" pitchFamily="34" charset="0"/>
+                <a:ea typeface="Times New Roman" pitchFamily="34" charset="-122"/>
+                <a:cs typeface="Times New Roman" pitchFamily="34" charset="-120"/>
+              </a:rPr>
+              <a:t>Boreholes and treated tap water are safer.</a:t>
+            </a:r>
+            <a:endParaRPr lang="en-US" sz="3600" dirty="0"/>
+          </a:p>
+        </p:txBody>
+      </p:sp>
       <p:pic>
         <p:nvPicPr>
-          <p:cNvPr id="3" name="Image 0" descr="/home/claude/f4/img/minesec_sheet.png">    </p:cNvPr>
+          <p:cNvPr id="5" name="Image 0" descr="/home/claude/f4/img/v2/f4_borehole.jpg">    </p:cNvPr>
           <p:cNvPicPr>
             <a:picLocks noChangeAspect="1"/>
           </p:cNvPicPr>
@@ -14341,8 +14994,8 @@
         </p:blipFill>
         <p:spPr>
           <a:xfrm>
-            <a:off x="0" y="658368"/>
-            <a:ext cx="5120640" cy="5833872"/>
+            <a:off x="5349240" y="2071212"/>
+            <a:ext cx="6659575" cy="3693983"/>
           </a:xfrm>
           <a:prstGeom prst="rect">
             <a:avLst/>
@@ -14351,14 +15004,14 @@
       </p:pic>
       <p:sp>
         <p:nvSpPr>
-          <p:cNvPr id="4" name="Text 1"/>
+          <p:cNvPr id="6" name="Text 3"/>
           <p:cNvSpPr/>
           <p:nvPr/>
         </p:nvSpPr>
         <p:spPr>
           <a:xfrm>
-            <a:off x="5349240" y="1005840"/>
-            <a:ext cx="6522415" cy="731520"/>
+            <a:off x="5349240" y="6089904"/>
+            <a:ext cx="6659575" cy="347472"/>
           </a:xfrm>
           <a:prstGeom prst="rect">
             <a:avLst/>
@@ -14367,85 +15020,24 @@
           <a:ln/>
         </p:spPr>
         <p:txBody>
-          <a:bodyPr wrap="square" lIns="0" tIns="0" rIns="0" bIns="0" rtlCol="0" anchor="ctr">
-            <a:normAutofit/>
-          </a:bodyPr>
+          <a:bodyPr wrap="square" lIns="0" tIns="0" rIns="0" bIns="0" rtlCol="0" anchor="ctr"/>
           <a:lstStyle/>
           <a:p>
             <a:pPr algn="ctr" indent="0" marL="0">
               <a:buNone/>
             </a:pPr>
             <a:r>
-              <a:rPr lang="en-US" sz="3600" b="1" dirty="0">
-                <a:solidFill>
-                  <a:srgbClr val="990011"/>
+              <a:rPr lang="en-US" sz="1600" i="1" dirty="0">
+                <a:solidFill>
+                  <a:srgbClr val="555555"/>
                 </a:solidFill>
                 <a:latin typeface="Times New Roman" pitchFamily="34" charset="0"/>
                 <a:ea typeface="Times New Roman" pitchFamily="34" charset="-122"/>
                 <a:cs typeface="Times New Roman" pitchFamily="34" charset="-120"/>
               </a:rPr>
-              <a:t>3. Management (continued)</a:t>
-            </a:r>
-            <a:endParaRPr lang="en-US" sz="3600" dirty="0"/>
-          </a:p>
-        </p:txBody>
-      </p:sp>
-      <p:sp>
-        <p:nvSpPr>
-          <p:cNvPr id="5" name="Text 2"/>
-          <p:cNvSpPr/>
-          <p:nvPr/>
-        </p:nvSpPr>
-        <p:spPr>
-          <a:xfrm>
-            <a:off x="5349240" y="1783080"/>
-            <a:ext cx="6522415" cy="4663440"/>
-          </a:xfrm>
-          <a:prstGeom prst="rect">
-            <a:avLst/>
-          </a:prstGeom>
-          <a:noFill/>
-          <a:ln/>
-        </p:spPr>
-        <p:txBody>
-          <a:bodyPr wrap="square" lIns="0" tIns="0" rIns="0" bIns="0" rtlCol="0" anchor="t"/>
-          <a:lstStyle/>
-          <a:p>
-            <a:pPr algn="l" indent="0" marL="0">
-              <a:spcAft>
-                <a:spcPts val="800"/>
-              </a:spcAft>
-              <a:buNone/>
-            </a:pPr>
-            <a:r>
-              <a:rPr lang="en-US" sz="4000" b="1" dirty="0">
-                <a:solidFill>
-                  <a:srgbClr val="111111"/>
-                </a:solidFill>
-                <a:latin typeface="Times New Roman" pitchFamily="34" charset="0"/>
-                <a:ea typeface="Times New Roman" pitchFamily="34" charset="-122"/>
-                <a:cs typeface="Times New Roman" pitchFamily="34" charset="-120"/>
-              </a:rPr>
-              <a:t>Clean water: </a:t>
-            </a:r>
-            <a:pPr algn="l" indent="0" marL="0">
-              <a:spcAft>
-                <a:spcPts val="800"/>
-              </a:spcAft>
-              <a:buNone/>
-            </a:pPr>
-            <a:r>
-              <a:rPr lang="en-US" sz="4000" dirty="0">
-                <a:solidFill>
-                  <a:srgbClr val="111111"/>
-                </a:solidFill>
-                <a:latin typeface="Times New Roman" pitchFamily="34" charset="0"/>
-                <a:ea typeface="Times New Roman" pitchFamily="34" charset="-122"/>
-                <a:cs typeface="Times New Roman" pitchFamily="34" charset="-120"/>
-              </a:rPr>
-              <a:t>We boil or filter water and build boreholes.</a:t>
-            </a:r>
-            <a:endParaRPr lang="en-US" sz="4000" dirty="0"/>
+              <a:t>Illustration: a borehole</a:t>
+            </a:r>
+            <a:endParaRPr lang="en-US" sz="1600" dirty="0"/>
           </a:p>
         </p:txBody>
       </p:sp>
@@ -14561,48 +15153,9 @@
           </a:p>
         </p:txBody>
       </p:sp>
-      <p:sp>
-        <p:nvSpPr>
-          <p:cNvPr id="3" name="Text 1"/>
-          <p:cNvSpPr/>
-          <p:nvPr/>
-        </p:nvSpPr>
-        <p:spPr>
-          <a:xfrm>
-            <a:off x="457200" y="1005840"/>
-            <a:ext cx="11277295" cy="731520"/>
-          </a:xfrm>
-          <a:prstGeom prst="rect">
-            <a:avLst/>
-          </a:prstGeom>
-          <a:noFill/>
-          <a:ln/>
-        </p:spPr>
-        <p:txBody>
-          <a:bodyPr wrap="square" lIns="0" tIns="0" rIns="0" bIns="0" rtlCol="0" anchor="ctr"/>
-          <a:lstStyle/>
-          <a:p>
-            <a:pPr algn="ctr" indent="0" marL="0">
-              <a:buNone/>
-            </a:pPr>
-            <a:r>
-              <a:rPr lang="en-US" sz="3600" b="1" dirty="0">
-                <a:solidFill>
-                  <a:srgbClr val="990011"/>
-                </a:solidFill>
-                <a:latin typeface="Times New Roman" pitchFamily="34" charset="0"/>
-                <a:ea typeface="Times New Roman" pitchFamily="34" charset="-122"/>
-                <a:cs typeface="Times New Roman" pitchFamily="34" charset="-120"/>
-              </a:rPr>
-              <a:t>3. Management</a:t>
-            </a:r>
-            <a:endParaRPr lang="en-US" sz="3600" dirty="0"/>
-          </a:p>
-        </p:txBody>
-      </p:sp>
       <p:pic>
         <p:nvPicPr>
-          <p:cNvPr id="4" name="Image 0" descr="/home/claude/f4/img/v2/rainwater_big.png">    </p:cNvPr>
+          <p:cNvPr id="3" name="Image 0" descr="/home/claude/f4/img/minesec_sheet.png">    </p:cNvPr>
           <p:cNvPicPr>
             <a:picLocks noChangeAspect="1"/>
           </p:cNvPicPr>
@@ -14616,8 +15169,8 @@
         </p:blipFill>
         <p:spPr>
           <a:xfrm>
-            <a:off x="629930" y="1783080"/>
-            <a:ext cx="10931835" cy="4270248"/>
+            <a:off x="0" y="658368"/>
+            <a:ext cx="5120640" cy="5833872"/>
           </a:xfrm>
           <a:prstGeom prst="rect">
             <a:avLst/>
@@ -14626,14 +15179,14 @@
       </p:pic>
       <p:sp>
         <p:nvSpPr>
-          <p:cNvPr id="5" name="Text 2"/>
+          <p:cNvPr id="4" name="Text 1"/>
           <p:cNvSpPr/>
           <p:nvPr/>
         </p:nvSpPr>
         <p:spPr>
           <a:xfrm>
-            <a:off x="457200" y="6089904"/>
-            <a:ext cx="11277295" cy="347472"/>
+            <a:off x="5349240" y="1005840"/>
+            <a:ext cx="6522415" cy="731520"/>
           </a:xfrm>
           <a:prstGeom prst="rect">
             <a:avLst/>
@@ -14642,24 +15195,105 @@
           <a:ln/>
         </p:spPr>
         <p:txBody>
-          <a:bodyPr wrap="square" lIns="0" tIns="0" rIns="0" bIns="0" rtlCol="0" anchor="ctr"/>
+          <a:bodyPr wrap="square" lIns="0" tIns="0" rIns="0" bIns="0" rtlCol="0" anchor="ctr">
+            <a:normAutofit/>
+          </a:bodyPr>
           <a:lstStyle/>
           <a:p>
             <a:pPr algn="ctr" indent="0" marL="0">
               <a:buNone/>
             </a:pPr>
             <a:r>
-              <a:rPr lang="en-US" sz="1800" i="1" dirty="0">
-                <a:solidFill>
-                  <a:srgbClr val="555555"/>
+              <a:rPr lang="en-US" sz="3600" b="1" dirty="0">
+                <a:solidFill>
+                  <a:srgbClr val="990011"/>
                 </a:solidFill>
                 <a:latin typeface="Times New Roman" pitchFamily="34" charset="0"/>
                 <a:ea typeface="Times New Roman" pitchFamily="34" charset="-122"/>
                 <a:cs typeface="Times New Roman" pitchFamily="34" charset="-120"/>
               </a:rPr>
-              <a:t>Illustration: collecting rainwater</a:t>
-            </a:r>
-            <a:endParaRPr lang="en-US" sz="1800" dirty="0"/>
+              <a:t>3. Uses of Water</a:t>
+            </a:r>
+            <a:endParaRPr lang="en-US" sz="3600" dirty="0"/>
+          </a:p>
+        </p:txBody>
+      </p:sp>
+      <p:sp>
+        <p:nvSpPr>
+          <p:cNvPr id="5" name="Text 2"/>
+          <p:cNvSpPr/>
+          <p:nvPr/>
+        </p:nvSpPr>
+        <p:spPr>
+          <a:xfrm>
+            <a:off x="5349240" y="1783080"/>
+            <a:ext cx="6522415" cy="4663440"/>
+          </a:xfrm>
+          <a:prstGeom prst="rect">
+            <a:avLst/>
+          </a:prstGeom>
+          <a:noFill/>
+          <a:ln/>
+        </p:spPr>
+        <p:txBody>
+          <a:bodyPr wrap="square" lIns="0" tIns="0" rIns="0" bIns="0" rtlCol="0" anchor="t"/>
+          <a:lstStyle/>
+          <a:p>
+            <a:pPr algn="l" indent="0" marL="0">
+              <a:spcAft>
+                <a:spcPts val="800"/>
+              </a:spcAft>
+              <a:buNone/>
+            </a:pPr>
+            <a:r>
+              <a:rPr lang="en-US" sz="4000" i="1" dirty="0">
+                <a:solidFill>
+                  <a:srgbClr val="111111"/>
+                </a:solidFill>
+                <a:latin typeface="Times New Roman" pitchFamily="34" charset="0"/>
+                <a:ea typeface="Times New Roman" pitchFamily="34" charset="-122"/>
+                <a:cs typeface="Times New Roman" pitchFamily="34" charset="-120"/>
+              </a:rPr>
+              <a:t>Water has the following uses:</a:t>
+            </a:r>
+            <a:endParaRPr lang="en-US" sz="4000" dirty="0"/>
+          </a:p>
+          <a:p>
+            <a:pPr algn="l" indent="0" marL="0">
+              <a:spcAft>
+                <a:spcPts val="800"/>
+              </a:spcAft>
+              <a:buNone/>
+            </a:pPr>
+            <a:r>
+              <a:rPr lang="en-US" sz="4000" b="1" dirty="0">
+                <a:solidFill>
+                  <a:srgbClr val="111111"/>
+                </a:solidFill>
+                <a:latin typeface="Times New Roman" pitchFamily="34" charset="0"/>
+                <a:ea typeface="Times New Roman" pitchFamily="34" charset="-122"/>
+                <a:cs typeface="Times New Roman" pitchFamily="34" charset="-120"/>
+              </a:rPr>
+              <a:t>Domestic uses: </a:t>
+            </a:r>
+            <a:pPr algn="l" indent="0" marL="0">
+              <a:spcAft>
+                <a:spcPts val="800"/>
+              </a:spcAft>
+              <a:buNone/>
+            </a:pPr>
+            <a:r>
+              <a:rPr lang="en-US" sz="4000" dirty="0">
+                <a:solidFill>
+                  <a:srgbClr val="111111"/>
+                </a:solidFill>
+                <a:latin typeface="Times New Roman" pitchFamily="34" charset="0"/>
+                <a:ea typeface="Times New Roman" pitchFamily="34" charset="-122"/>
+                <a:cs typeface="Times New Roman" pitchFamily="34" charset="-120"/>
+              </a:rPr>
+              <a:t>We use water for drinking, cooking and washing.</a:t>
+            </a:r>
+            <a:endParaRPr lang="en-US" sz="4000" dirty="0"/>
           </a:p>
         </p:txBody>
       </p:sp>
@@ -15008,15 +15642,115 @@
                 <a:ea typeface="Calibri" pitchFamily="34" charset="-122"/>
                 <a:cs typeface="Calibri" pitchFamily="34" charset="-120"/>
               </a:rPr>
-              <a:t>FORMATIVE EVALUATION</a:t>
+              <a:t>BOARD SUMMARY</a:t>
             </a:r>
             <a:endParaRPr lang="en-US" sz="1400" dirty="0"/>
+          </a:p>
+        </p:txBody>
+      </p:sp>
+      <p:sp>
+        <p:nvSpPr>
+          <p:cNvPr id="3" name="Text 1"/>
+          <p:cNvSpPr/>
+          <p:nvPr/>
+        </p:nvSpPr>
+        <p:spPr>
+          <a:xfrm>
+            <a:off x="365760" y="1005840"/>
+            <a:ext cx="11460175" cy="731520"/>
+          </a:xfrm>
+          <a:prstGeom prst="rect">
+            <a:avLst/>
+          </a:prstGeom>
+          <a:noFill/>
+          <a:ln/>
+        </p:spPr>
+        <p:txBody>
+          <a:bodyPr wrap="square" lIns="0" tIns="0" rIns="0" bIns="0" rtlCol="0" anchor="ctr">
+            <a:normAutofit/>
+          </a:bodyPr>
+          <a:lstStyle/>
+          <a:p>
+            <a:pPr algn="ctr" indent="0" marL="0">
+              <a:buNone/>
+            </a:pPr>
+            <a:r>
+              <a:rPr lang="en-US" sz="3600" b="1" dirty="0">
+                <a:solidFill>
+                  <a:srgbClr val="990011"/>
+                </a:solidFill>
+                <a:latin typeface="Times New Roman" pitchFamily="34" charset="0"/>
+                <a:ea typeface="Times New Roman" pitchFamily="34" charset="-122"/>
+                <a:cs typeface="Times New Roman" pitchFamily="34" charset="-120"/>
+              </a:rPr>
+              <a:t>3. Uses of Water</a:t>
+            </a:r>
+            <a:endParaRPr lang="en-US" sz="3600" dirty="0"/>
+          </a:p>
+        </p:txBody>
+      </p:sp>
+      <p:sp>
+        <p:nvSpPr>
+          <p:cNvPr id="4" name="Text 2"/>
+          <p:cNvSpPr/>
+          <p:nvPr/>
+        </p:nvSpPr>
+        <p:spPr>
+          <a:xfrm>
+            <a:off x="365760" y="1783080"/>
+            <a:ext cx="4846320" cy="4617720"/>
+          </a:xfrm>
+          <a:prstGeom prst="rect">
+            <a:avLst/>
+          </a:prstGeom>
+          <a:noFill/>
+          <a:ln/>
+        </p:spPr>
+        <p:txBody>
+          <a:bodyPr wrap="square" lIns="0" tIns="0" rIns="0" bIns="0" rtlCol="0" anchor="t"/>
+          <a:lstStyle/>
+          <a:p>
+            <a:pPr algn="l" indent="0" marL="0">
+              <a:spcAft>
+                <a:spcPts val="800"/>
+              </a:spcAft>
+              <a:buNone/>
+            </a:pPr>
+            <a:r>
+              <a:rPr lang="en-US" sz="3600" b="1" dirty="0">
+                <a:solidFill>
+                  <a:srgbClr val="111111"/>
+                </a:solidFill>
+                <a:latin typeface="Times New Roman" pitchFamily="34" charset="0"/>
+                <a:ea typeface="Times New Roman" pitchFamily="34" charset="-122"/>
+                <a:cs typeface="Times New Roman" pitchFamily="34" charset="-120"/>
+              </a:rPr>
+              <a:t>Farming and livestock: </a:t>
+            </a:r>
+            <a:pPr algn="l" indent="0" marL="0">
+              <a:spcAft>
+                <a:spcPts val="800"/>
+              </a:spcAft>
+              <a:buNone/>
+            </a:pPr>
+            <a:r>
+              <a:rPr lang="en-US" sz="3600" dirty="0">
+                <a:solidFill>
+                  <a:srgbClr val="111111"/>
+                </a:solidFill>
+                <a:latin typeface="Times New Roman" pitchFamily="34" charset="0"/>
+                <a:ea typeface="Times New Roman" pitchFamily="34" charset="-122"/>
+                <a:cs typeface="Times New Roman" pitchFamily="34" charset="-120"/>
+              </a:rPr>
+              <a:t>Farmers irrigate crops and herders water their animals.</a:t>
+            </a:r>
+            <a:endParaRPr lang="en-US" sz="3600" dirty="0"/>
           </a:p>
         </p:txBody>
       </p:sp>
       <p:pic>
         <p:nvPicPr>
-          <p:cNvPr id="3" name="Image 0" descr="/home/claude/f4/img/minesec_sheet.png">    </p:cNvPr>
+          <p:cNvPr id="5" name="Image 0" descr="/home/claude/f4/img/v2/usa_irrigation.jpg">    </p:cNvPr>
           <p:cNvPicPr>
             <a:picLocks noChangeAspect="1"/>
           </p:cNvPicPr>
@@ -15030,8 +15764,8 @@
         </p:blipFill>
         <p:spPr>
           <a:xfrm>
-            <a:off x="0" y="658368"/>
-            <a:ext cx="5120640" cy="5833872"/>
+            <a:off x="5349240" y="2071212"/>
+            <a:ext cx="6659575" cy="3693983"/>
           </a:xfrm>
           <a:prstGeom prst="rect">
             <a:avLst/>
@@ -15040,14 +15774,14 @@
       </p:pic>
       <p:sp>
         <p:nvSpPr>
-          <p:cNvPr id="4" name="Text 1"/>
+          <p:cNvPr id="6" name="Text 3"/>
           <p:cNvSpPr/>
           <p:nvPr/>
         </p:nvSpPr>
         <p:spPr>
           <a:xfrm>
-            <a:off x="5349240" y="1005840"/>
-            <a:ext cx="6522415" cy="731520"/>
+            <a:off x="5349240" y="6089904"/>
+            <a:ext cx="6659575" cy="347472"/>
           </a:xfrm>
           <a:prstGeom prst="rect">
             <a:avLst/>
@@ -15056,68 +15790,24 @@
           <a:ln/>
         </p:spPr>
         <p:txBody>
-          <a:bodyPr wrap="square" lIns="0" tIns="0" rIns="0" bIns="0" rtlCol="0" anchor="ctr">
-            <a:normAutofit/>
-          </a:bodyPr>
+          <a:bodyPr wrap="square" lIns="0" tIns="0" rIns="0" bIns="0" rtlCol="0" anchor="ctr"/>
           <a:lstStyle/>
           <a:p>
             <a:pPr algn="ctr" indent="0" marL="0">
               <a:buNone/>
             </a:pPr>
             <a:r>
-              <a:rPr lang="en-US" sz="3600" b="1" dirty="0">
-                <a:solidFill>
-                  <a:srgbClr val="990011"/>
+              <a:rPr lang="en-US" sz="1600" i="1" dirty="0">
+                <a:solidFill>
+                  <a:srgbClr val="555555"/>
                 </a:solidFill>
                 <a:latin typeface="Times New Roman" pitchFamily="34" charset="0"/>
                 <a:ea typeface="Times New Roman" pitchFamily="34" charset="-122"/>
                 <a:cs typeface="Times New Roman" pitchFamily="34" charset="-120"/>
               </a:rPr>
-              <a:t>Evaluation 1</a:t>
-            </a:r>
-            <a:endParaRPr lang="en-US" sz="3600" dirty="0"/>
-          </a:p>
-        </p:txBody>
-      </p:sp>
-      <p:sp>
-        <p:nvSpPr>
-          <p:cNvPr id="5" name="Text 2"/>
-          <p:cNvSpPr/>
-          <p:nvPr/>
-        </p:nvSpPr>
-        <p:spPr>
-          <a:xfrm>
-            <a:off x="5349240" y="1783080"/>
-            <a:ext cx="6522415" cy="4663440"/>
-          </a:xfrm>
-          <a:prstGeom prst="rect">
-            <a:avLst/>
-          </a:prstGeom>
-          <a:noFill/>
-          <a:ln/>
-        </p:spPr>
-        <p:txBody>
-          <a:bodyPr wrap="square" lIns="0" tIns="0" rIns="0" bIns="0" rtlCol="0" anchor="t"/>
-          <a:lstStyle/>
-          <a:p>
-            <a:pPr algn="l" indent="0" marL="0">
-              <a:spcAft>
-                <a:spcPts val="800"/>
-              </a:spcAft>
-              <a:buNone/>
-            </a:pPr>
-            <a:r>
-              <a:rPr lang="en-US" sz="4000" dirty="0">
-                <a:solidFill>
-                  <a:srgbClr val="111111"/>
-                </a:solidFill>
-                <a:latin typeface="Times New Roman" pitchFamily="34" charset="0"/>
-                <a:ea typeface="Times New Roman" pitchFamily="34" charset="-122"/>
-                <a:cs typeface="Times New Roman" pitchFamily="34" charset="-120"/>
-              </a:rPr>
-              <a:t>What is water scarcity?</a:t>
-            </a:r>
-            <a:endParaRPr lang="en-US" sz="4000" dirty="0"/>
+              <a:t>Illustration: irrigation</a:t>
+            </a:r>
+            <a:endParaRPr lang="en-US" sz="1600" dirty="0"/>
           </a:p>
         </p:txBody>
       </p:sp>
@@ -15227,7 +15917,7 @@
                 <a:ea typeface="Calibri" pitchFamily="34" charset="-122"/>
                 <a:cs typeface="Calibri" pitchFamily="34" charset="-120"/>
               </a:rPr>
-              <a:t>FORMATIVE EVALUATION</a:t>
+              <a:t>BOARD SUMMARY</a:t>
             </a:r>
             <a:endParaRPr lang="en-US" sz="1400" dirty="0"/>
           </a:p>
@@ -15292,7 +15982,7 @@
                 <a:ea typeface="Times New Roman" pitchFamily="34" charset="-122"/>
                 <a:cs typeface="Times New Roman" pitchFamily="34" charset="-120"/>
               </a:rPr>
-              <a:t>Expected Answer</a:t>
+              <a:t>3. Uses of Water</a:t>
             </a:r>
             <a:endParaRPr lang="en-US" sz="3600" dirty="0"/>
           </a:p>
@@ -15326,7 +16016,7 @@
               <a:buNone/>
             </a:pPr>
             <a:r>
-              <a:rPr lang="en-US" sz="4000" dirty="0">
+              <a:rPr lang="en-US" sz="4000" b="1" dirty="0">
                 <a:solidFill>
                   <a:srgbClr val="111111"/>
                 </a:solidFill>
@@ -15334,7 +16024,24 @@
                 <a:ea typeface="Times New Roman" pitchFamily="34" charset="-122"/>
                 <a:cs typeface="Times New Roman" pitchFamily="34" charset="-120"/>
               </a:rPr>
-              <a:t>A lack of enough clean water.</a:t>
+              <a:t>Industry and energy: </a:t>
+            </a:r>
+            <a:pPr algn="l" indent="0" marL="0">
+              <a:spcAft>
+                <a:spcPts val="800"/>
+              </a:spcAft>
+              <a:buNone/>
+            </a:pPr>
+            <a:r>
+              <a:rPr lang="en-US" sz="4000" dirty="0">
+                <a:solidFill>
+                  <a:srgbClr val="111111"/>
+                </a:solidFill>
+                <a:latin typeface="Times New Roman" pitchFamily="34" charset="0"/>
+                <a:ea typeface="Times New Roman" pitchFamily="34" charset="-122"/>
+                <a:cs typeface="Times New Roman" pitchFamily="34" charset="-120"/>
+              </a:rPr>
+              <a:t>Factories use water, and dams produce electricity.</a:t>
             </a:r>
             <a:endParaRPr lang="en-US" sz="4000" dirty="0"/>
           </a:p>
@@ -15446,15 +16153,115 @@
                 <a:ea typeface="Calibri" pitchFamily="34" charset="-122"/>
                 <a:cs typeface="Calibri" pitchFamily="34" charset="-120"/>
               </a:rPr>
-              <a:t>FORMATIVE EVALUATION</a:t>
+              <a:t>BOARD SUMMARY</a:t>
             </a:r>
             <a:endParaRPr lang="en-US" sz="1400" dirty="0"/>
+          </a:p>
+        </p:txBody>
+      </p:sp>
+      <p:sp>
+        <p:nvSpPr>
+          <p:cNvPr id="3" name="Text 1"/>
+          <p:cNvSpPr/>
+          <p:nvPr/>
+        </p:nvSpPr>
+        <p:spPr>
+          <a:xfrm>
+            <a:off x="365760" y="1005840"/>
+            <a:ext cx="11460175" cy="731520"/>
+          </a:xfrm>
+          <a:prstGeom prst="rect">
+            <a:avLst/>
+          </a:prstGeom>
+          <a:noFill/>
+          <a:ln/>
+        </p:spPr>
+        <p:txBody>
+          <a:bodyPr wrap="square" lIns="0" tIns="0" rIns="0" bIns="0" rtlCol="0" anchor="ctr">
+            <a:normAutofit/>
+          </a:bodyPr>
+          <a:lstStyle/>
+          <a:p>
+            <a:pPr algn="ctr" indent="0" marL="0">
+              <a:buNone/>
+            </a:pPr>
+            <a:r>
+              <a:rPr lang="en-US" sz="3600" b="1" dirty="0">
+                <a:solidFill>
+                  <a:srgbClr val="990011"/>
+                </a:solidFill>
+                <a:latin typeface="Times New Roman" pitchFamily="34" charset="0"/>
+                <a:ea typeface="Times New Roman" pitchFamily="34" charset="-122"/>
+                <a:cs typeface="Times New Roman" pitchFamily="34" charset="-120"/>
+              </a:rPr>
+              <a:t>3. Uses of Water</a:t>
+            </a:r>
+            <a:endParaRPr lang="en-US" sz="3600" dirty="0"/>
+          </a:p>
+        </p:txBody>
+      </p:sp>
+      <p:sp>
+        <p:nvSpPr>
+          <p:cNvPr id="4" name="Text 2"/>
+          <p:cNvSpPr/>
+          <p:nvPr/>
+        </p:nvSpPr>
+        <p:spPr>
+          <a:xfrm>
+            <a:off x="365760" y="1783080"/>
+            <a:ext cx="4846320" cy="4617720"/>
+          </a:xfrm>
+          <a:prstGeom prst="rect">
+            <a:avLst/>
+          </a:prstGeom>
+          <a:noFill/>
+          <a:ln/>
+        </p:spPr>
+        <p:txBody>
+          <a:bodyPr wrap="square" lIns="0" tIns="0" rIns="0" bIns="0" rtlCol="0" anchor="t"/>
+          <a:lstStyle/>
+          <a:p>
+            <a:pPr algn="l" indent="0" marL="0">
+              <a:spcAft>
+                <a:spcPts val="800"/>
+              </a:spcAft>
+              <a:buNone/>
+            </a:pPr>
+            <a:r>
+              <a:rPr lang="en-US" sz="3600" b="1" dirty="0">
+                <a:solidFill>
+                  <a:srgbClr val="111111"/>
+                </a:solidFill>
+                <a:latin typeface="Times New Roman" pitchFamily="34" charset="0"/>
+                <a:ea typeface="Times New Roman" pitchFamily="34" charset="-122"/>
+                <a:cs typeface="Times New Roman" pitchFamily="34" charset="-120"/>
+              </a:rPr>
+              <a:t>Waste: </a:t>
+            </a:r>
+            <a:pPr algn="l" indent="0" marL="0">
+              <a:spcAft>
+                <a:spcPts val="800"/>
+              </a:spcAft>
+              <a:buNone/>
+            </a:pPr>
+            <a:r>
+              <a:rPr lang="en-US" sz="3600" dirty="0">
+                <a:solidFill>
+                  <a:srgbClr val="111111"/>
+                </a:solidFill>
+                <a:latin typeface="Times New Roman" pitchFamily="34" charset="0"/>
+                <a:ea typeface="Times New Roman" pitchFamily="34" charset="-122"/>
+                <a:cs typeface="Times New Roman" pitchFamily="34" charset="-120"/>
+              </a:rPr>
+              <a:t>Leaking taps and careless use waste water.</a:t>
+            </a:r>
+            <a:endParaRPr lang="en-US" sz="3600" dirty="0"/>
           </a:p>
         </p:txBody>
       </p:sp>
       <p:pic>
         <p:nvPicPr>
-          <p:cNvPr id="3" name="Image 0" descr="/home/claude/f4/img/minesec_sheet.png">    </p:cNvPr>
+          <p:cNvPr id="5" name="Image 0" descr="/home/claude/f4/img/v2/f4_leakingtap.jpg">    </p:cNvPr>
           <p:cNvPicPr>
             <a:picLocks noChangeAspect="1"/>
           </p:cNvPicPr>
@@ -15468,8 +16275,8 @@
         </p:blipFill>
         <p:spPr>
           <a:xfrm>
-            <a:off x="0" y="658368"/>
-            <a:ext cx="5120640" cy="5833872"/>
+            <a:off x="5349240" y="2071212"/>
+            <a:ext cx="6659575" cy="3693983"/>
           </a:xfrm>
           <a:prstGeom prst="rect">
             <a:avLst/>
@@ -15478,14 +16285,14 @@
       </p:pic>
       <p:sp>
         <p:nvSpPr>
-          <p:cNvPr id="4" name="Text 1"/>
+          <p:cNvPr id="6" name="Text 3"/>
           <p:cNvSpPr/>
           <p:nvPr/>
         </p:nvSpPr>
         <p:spPr>
           <a:xfrm>
-            <a:off x="5349240" y="1005840"/>
-            <a:ext cx="6522415" cy="731520"/>
+            <a:off x="5349240" y="6089904"/>
+            <a:ext cx="6659575" cy="347472"/>
           </a:xfrm>
           <a:prstGeom prst="rect">
             <a:avLst/>
@@ -15494,68 +16301,24 @@
           <a:ln/>
         </p:spPr>
         <p:txBody>
-          <a:bodyPr wrap="square" lIns="0" tIns="0" rIns="0" bIns="0" rtlCol="0" anchor="ctr">
-            <a:normAutofit/>
-          </a:bodyPr>
+          <a:bodyPr wrap="square" lIns="0" tIns="0" rIns="0" bIns="0" rtlCol="0" anchor="ctr"/>
           <a:lstStyle/>
           <a:p>
             <a:pPr algn="ctr" indent="0" marL="0">
               <a:buNone/>
             </a:pPr>
             <a:r>
-              <a:rPr lang="en-US" sz="3600" b="1" dirty="0">
-                <a:solidFill>
-                  <a:srgbClr val="990011"/>
+              <a:rPr lang="en-US" sz="1600" i="1" dirty="0">
+                <a:solidFill>
+                  <a:srgbClr val="555555"/>
                 </a:solidFill>
                 <a:latin typeface="Times New Roman" pitchFamily="34" charset="0"/>
                 <a:ea typeface="Times New Roman" pitchFamily="34" charset="-122"/>
                 <a:cs typeface="Times New Roman" pitchFamily="34" charset="-120"/>
               </a:rPr>
-              <a:t>Evaluation 2</a:t>
-            </a:r>
-            <a:endParaRPr lang="en-US" sz="3600" dirty="0"/>
-          </a:p>
-        </p:txBody>
-      </p:sp>
-      <p:sp>
-        <p:nvSpPr>
-          <p:cNvPr id="5" name="Text 2"/>
-          <p:cNvSpPr/>
-          <p:nvPr/>
-        </p:nvSpPr>
-        <p:spPr>
-          <a:xfrm>
-            <a:off x="5349240" y="1783080"/>
-            <a:ext cx="6522415" cy="4663440"/>
-          </a:xfrm>
-          <a:prstGeom prst="rect">
-            <a:avLst/>
-          </a:prstGeom>
-          <a:noFill/>
-          <a:ln/>
-        </p:spPr>
-        <p:txBody>
-          <a:bodyPr wrap="square" lIns="0" tIns="0" rIns="0" bIns="0" rtlCol="0" anchor="t"/>
-          <a:lstStyle/>
-          <a:p>
-            <a:pPr algn="l" indent="0" marL="0">
-              <a:spcAft>
-                <a:spcPts val="800"/>
-              </a:spcAft>
-              <a:buNone/>
-            </a:pPr>
-            <a:r>
-              <a:rPr lang="en-US" sz="4000" dirty="0">
-                <a:solidFill>
-                  <a:srgbClr val="111111"/>
-                </a:solidFill>
-                <a:latin typeface="Times New Roman" pitchFamily="34" charset="0"/>
-                <a:ea typeface="Times New Roman" pitchFamily="34" charset="-122"/>
-                <a:cs typeface="Times New Roman" pitchFamily="34" charset="-120"/>
-              </a:rPr>
-              <a:t>Give two ways to manage water.</a:t>
-            </a:r>
-            <a:endParaRPr lang="en-US" sz="4000" dirty="0"/>
+              <a:t>Illustration: a leaking tap</a:t>
+            </a:r>
+            <a:endParaRPr lang="en-US" sz="1600" dirty="0"/>
           </a:p>
         </p:txBody>
       </p:sp>
@@ -15665,7 +16428,7 @@
                 <a:ea typeface="Calibri" pitchFamily="34" charset="-122"/>
                 <a:cs typeface="Calibri" pitchFamily="34" charset="-120"/>
               </a:rPr>
-              <a:t>FORMATIVE EVALUATION</a:t>
+              <a:t>BOARD SUMMARY</a:t>
             </a:r>
             <a:endParaRPr lang="en-US" sz="1400" dirty="0"/>
           </a:p>
@@ -15730,7 +16493,7 @@
                 <a:ea typeface="Times New Roman" pitchFamily="34" charset="-122"/>
                 <a:cs typeface="Times New Roman" pitchFamily="34" charset="-120"/>
               </a:rPr>
-              <a:t>Expected Answer</a:t>
+              <a:t>4. Management of Water</a:t>
             </a:r>
             <a:endParaRPr lang="en-US" sz="3600" dirty="0"/>
           </a:p>
@@ -15764,7 +16527,7 @@
               <a:buNone/>
             </a:pPr>
             <a:r>
-              <a:rPr lang="en-US" sz="4000" dirty="0">
+              <a:rPr lang="en-US" sz="4000" i="1" dirty="0">
                 <a:solidFill>
                   <a:srgbClr val="111111"/>
                 </a:solidFill>
@@ -15772,7 +16535,44 @@
                 <a:ea typeface="Times New Roman" pitchFamily="34" charset="-122"/>
                 <a:cs typeface="Times New Roman" pitchFamily="34" charset="-120"/>
               </a:rPr>
-              <a:t>Store rainwater and repair leaks.</a:t>
+              <a:t>Water can be managed with the following measures:</a:t>
+            </a:r>
+            <a:endParaRPr lang="en-US" sz="4000" dirty="0"/>
+          </a:p>
+          <a:p>
+            <a:pPr algn="l" indent="0" marL="0">
+              <a:spcAft>
+                <a:spcPts val="800"/>
+              </a:spcAft>
+              <a:buNone/>
+            </a:pPr>
+            <a:r>
+              <a:rPr lang="en-US" sz="4000" b="1" dirty="0">
+                <a:solidFill>
+                  <a:srgbClr val="111111"/>
+                </a:solidFill>
+                <a:latin typeface="Times New Roman" pitchFamily="34" charset="0"/>
+                <a:ea typeface="Times New Roman" pitchFamily="34" charset="-122"/>
+                <a:cs typeface="Times New Roman" pitchFamily="34" charset="-120"/>
+              </a:rPr>
+              <a:t>Saving water: </a:t>
+            </a:r>
+            <a:pPr algn="l" indent="0" marL="0">
+              <a:spcAft>
+                <a:spcPts val="800"/>
+              </a:spcAft>
+              <a:buNone/>
+            </a:pPr>
+            <a:r>
+              <a:rPr lang="en-US" sz="4000" dirty="0">
+                <a:solidFill>
+                  <a:srgbClr val="111111"/>
+                </a:solidFill>
+                <a:latin typeface="Times New Roman" pitchFamily="34" charset="0"/>
+                <a:ea typeface="Times New Roman" pitchFamily="34" charset="-122"/>
+                <a:cs typeface="Times New Roman" pitchFamily="34" charset="-120"/>
+              </a:rPr>
+              <a:t>We close taps and repair leaks.</a:t>
             </a:r>
             <a:endParaRPr lang="en-US" sz="4000" dirty="0"/>
           </a:p>
@@ -15884,15 +16684,115 @@
                 <a:ea typeface="Calibri" pitchFamily="34" charset="-122"/>
                 <a:cs typeface="Calibri" pitchFamily="34" charset="-120"/>
               </a:rPr>
-              <a:t>REMEDIATION</a:t>
+              <a:t>BOARD SUMMARY</a:t>
             </a:r>
             <a:endParaRPr lang="en-US" sz="1400" dirty="0"/>
+          </a:p>
+        </p:txBody>
+      </p:sp>
+      <p:sp>
+        <p:nvSpPr>
+          <p:cNvPr id="3" name="Text 1"/>
+          <p:cNvSpPr/>
+          <p:nvPr/>
+        </p:nvSpPr>
+        <p:spPr>
+          <a:xfrm>
+            <a:off x="365760" y="1005840"/>
+            <a:ext cx="11460175" cy="731520"/>
+          </a:xfrm>
+          <a:prstGeom prst="rect">
+            <a:avLst/>
+          </a:prstGeom>
+          <a:noFill/>
+          <a:ln/>
+        </p:spPr>
+        <p:txBody>
+          <a:bodyPr wrap="square" lIns="0" tIns="0" rIns="0" bIns="0" rtlCol="0" anchor="ctr">
+            <a:normAutofit/>
+          </a:bodyPr>
+          <a:lstStyle/>
+          <a:p>
+            <a:pPr algn="ctr" indent="0" marL="0">
+              <a:buNone/>
+            </a:pPr>
+            <a:r>
+              <a:rPr lang="en-US" sz="3600" b="1" dirty="0">
+                <a:solidFill>
+                  <a:srgbClr val="990011"/>
+                </a:solidFill>
+                <a:latin typeface="Times New Roman" pitchFamily="34" charset="0"/>
+                <a:ea typeface="Times New Roman" pitchFamily="34" charset="-122"/>
+                <a:cs typeface="Times New Roman" pitchFamily="34" charset="-120"/>
+              </a:rPr>
+              <a:t>4. Management of Water</a:t>
+            </a:r>
+            <a:endParaRPr lang="en-US" sz="3600" dirty="0"/>
+          </a:p>
+        </p:txBody>
+      </p:sp>
+      <p:sp>
+        <p:nvSpPr>
+          <p:cNvPr id="4" name="Text 2"/>
+          <p:cNvSpPr/>
+          <p:nvPr/>
+        </p:nvSpPr>
+        <p:spPr>
+          <a:xfrm>
+            <a:off x="365760" y="1783080"/>
+            <a:ext cx="4846320" cy="4617720"/>
+          </a:xfrm>
+          <a:prstGeom prst="rect">
+            <a:avLst/>
+          </a:prstGeom>
+          <a:noFill/>
+          <a:ln/>
+        </p:spPr>
+        <p:txBody>
+          <a:bodyPr wrap="square" lIns="0" tIns="0" rIns="0" bIns="0" rtlCol="0" anchor="t"/>
+          <a:lstStyle/>
+          <a:p>
+            <a:pPr algn="l" indent="0" marL="0">
+              <a:spcAft>
+                <a:spcPts val="800"/>
+              </a:spcAft>
+              <a:buNone/>
+            </a:pPr>
+            <a:r>
+              <a:rPr lang="en-US" sz="3600" b="1" dirty="0">
+                <a:solidFill>
+                  <a:srgbClr val="111111"/>
+                </a:solidFill>
+                <a:latin typeface="Times New Roman" pitchFamily="34" charset="0"/>
+                <a:ea typeface="Times New Roman" pitchFamily="34" charset="-122"/>
+                <a:cs typeface="Times New Roman" pitchFamily="34" charset="-120"/>
+              </a:rPr>
+              <a:t>Storing water: </a:t>
+            </a:r>
+            <a:pPr algn="l" indent="0" marL="0">
+              <a:spcAft>
+                <a:spcPts val="800"/>
+              </a:spcAft>
+              <a:buNone/>
+            </a:pPr>
+            <a:r>
+              <a:rPr lang="en-US" sz="3600" dirty="0">
+                <a:solidFill>
+                  <a:srgbClr val="111111"/>
+                </a:solidFill>
+                <a:latin typeface="Times New Roman" pitchFamily="34" charset="0"/>
+                <a:ea typeface="Times New Roman" pitchFamily="34" charset="-122"/>
+                <a:cs typeface="Times New Roman" pitchFamily="34" charset="-120"/>
+              </a:rPr>
+              <a:t>We collect rainwater in tanks and build dams.</a:t>
+            </a:r>
+            <a:endParaRPr lang="en-US" sz="3600" dirty="0"/>
           </a:p>
         </p:txBody>
       </p:sp>
       <p:pic>
         <p:nvPicPr>
-          <p:cNvPr id="3" name="Image 0" descr="/home/claude/f4/img/minesec_sheet.png">    </p:cNvPr>
+          <p:cNvPr id="5" name="Image 0" descr="/home/claude/f4/img/v2/rainwater_big.png">    </p:cNvPr>
           <p:cNvPicPr>
             <a:picLocks noChangeAspect="1"/>
           </p:cNvPicPr>
@@ -15906,8 +16806,8 @@
         </p:blipFill>
         <p:spPr>
           <a:xfrm>
-            <a:off x="0" y="658368"/>
-            <a:ext cx="5120640" cy="5833872"/>
+            <a:off x="5349240" y="2617506"/>
+            <a:ext cx="6659575" cy="2601397"/>
           </a:xfrm>
           <a:prstGeom prst="rect">
             <a:avLst/>
@@ -15916,14 +16816,14 @@
       </p:pic>
       <p:sp>
         <p:nvSpPr>
-          <p:cNvPr id="4" name="Text 1"/>
+          <p:cNvPr id="6" name="Text 3"/>
           <p:cNvSpPr/>
           <p:nvPr/>
         </p:nvSpPr>
         <p:spPr>
           <a:xfrm>
-            <a:off x="5349240" y="1005840"/>
-            <a:ext cx="6522415" cy="731520"/>
+            <a:off x="5349240" y="6089904"/>
+            <a:ext cx="6659575" cy="347472"/>
           </a:xfrm>
           <a:prstGeom prst="rect">
             <a:avLst/>
@@ -15932,134 +16832,24 @@
           <a:ln/>
         </p:spPr>
         <p:txBody>
-          <a:bodyPr wrap="square" lIns="0" tIns="0" rIns="0" bIns="0" rtlCol="0" anchor="ctr">
-            <a:normAutofit/>
-          </a:bodyPr>
+          <a:bodyPr wrap="square" lIns="0" tIns="0" rIns="0" bIns="0" rtlCol="0" anchor="ctr"/>
           <a:lstStyle/>
           <a:p>
             <a:pPr algn="ctr" indent="0" marL="0">
               <a:buNone/>
             </a:pPr>
             <a:r>
-              <a:rPr lang="en-US" sz="3600" b="1" dirty="0">
-                <a:solidFill>
-                  <a:srgbClr val="990011"/>
+              <a:rPr lang="en-US" sz="1600" i="1" dirty="0">
+                <a:solidFill>
+                  <a:srgbClr val="555555"/>
                 </a:solidFill>
                 <a:latin typeface="Times New Roman" pitchFamily="34" charset="0"/>
                 <a:ea typeface="Times New Roman" pitchFamily="34" charset="-122"/>
                 <a:cs typeface="Times New Roman" pitchFamily="34" charset="-120"/>
               </a:rPr>
-              <a:t>Remediation</a:t>
-            </a:r>
-            <a:endParaRPr lang="en-US" sz="3600" dirty="0"/>
-          </a:p>
-        </p:txBody>
-      </p:sp>
-      <p:sp>
-        <p:nvSpPr>
-          <p:cNvPr id="5" name="Text 2"/>
-          <p:cNvSpPr/>
-          <p:nvPr/>
-        </p:nvSpPr>
-        <p:spPr>
-          <a:xfrm>
-            <a:off x="5349240" y="1783080"/>
-            <a:ext cx="6522415" cy="4663440"/>
-          </a:xfrm>
-          <a:prstGeom prst="rect">
-            <a:avLst/>
-          </a:prstGeom>
-          <a:noFill/>
-          <a:ln/>
-        </p:spPr>
-        <p:txBody>
-          <a:bodyPr wrap="square" lIns="0" tIns="0" rIns="0" bIns="0" rtlCol="0" anchor="t"/>
-          <a:lstStyle/>
-          <a:p>
-            <a:pPr algn="l" indent="0" marL="0">
-              <a:spcAft>
-                <a:spcPts val="800"/>
-              </a:spcAft>
-              <a:buNone/>
-            </a:pPr>
-            <a:r>
-              <a:rPr lang="en-US" sz="4000" b="1" dirty="0">
-                <a:solidFill>
-                  <a:srgbClr val="111111"/>
-                </a:solidFill>
-                <a:latin typeface="Times New Roman" pitchFamily="34" charset="0"/>
-                <a:ea typeface="Times New Roman" pitchFamily="34" charset="-122"/>
-                <a:cs typeface="Times New Roman" pitchFamily="34" charset="-120"/>
-              </a:rPr>
-              <a:t>Fill in the blanks:</a:t>
-            </a:r>
-            <a:endParaRPr lang="en-US" sz="4000" dirty="0"/>
-          </a:p>
-          <a:p>
-            <a:pPr algn="l" marL="342900" indent="-342900">
-              <a:spcAft>
-                <a:spcPts val="800"/>
-              </a:spcAft>
-              <a:buSzPct val="100000"/>
-              <a:buFont typeface="+mj-lt"/>
-              <a:buAutoNum type="arabicPeriod" startAt="1"/>
-            </a:pPr>
-            <a:r>
-              <a:rPr lang="en-US" sz="4000" dirty="0">
-                <a:solidFill>
-                  <a:srgbClr val="111111"/>
-                </a:solidFill>
-                <a:latin typeface="Times New Roman" pitchFamily="34" charset="0"/>
-                <a:ea typeface="Times New Roman" pitchFamily="34" charset="-122"/>
-                <a:cs typeface="Times New Roman" pitchFamily="34" charset="-120"/>
-              </a:rPr>
-              <a:t>Only about ______ % of the Earth's water is fresh.</a:t>
-            </a:r>
-            <a:endParaRPr lang="en-US" sz="4000" dirty="0"/>
-          </a:p>
-          <a:p>
-            <a:pPr algn="l" marL="342900" indent="-342900">
-              <a:spcAft>
-                <a:spcPts val="800"/>
-              </a:spcAft>
-              <a:buSzPct val="100000"/>
-              <a:buFont typeface="+mj-lt"/>
-              <a:buAutoNum type="arabicPeriod" startAt="1"/>
-            </a:pPr>
-            <a:r>
-              <a:rPr lang="en-US" sz="4000" dirty="0">
-                <a:solidFill>
-                  <a:srgbClr val="111111"/>
-                </a:solidFill>
-                <a:latin typeface="Times New Roman" pitchFamily="34" charset="0"/>
-                <a:ea typeface="Times New Roman" pitchFamily="34" charset="-122"/>
-                <a:cs typeface="Times New Roman" pitchFamily="34" charset="-120"/>
-              </a:rPr>
-              <a:t>A deep well dug with machines is a ______.</a:t>
-            </a:r>
-            <a:endParaRPr lang="en-US" sz="4000" dirty="0"/>
-          </a:p>
-          <a:p>
-            <a:pPr algn="l" marL="342900" indent="-342900">
-              <a:spcAft>
-                <a:spcPts val="800"/>
-              </a:spcAft>
-              <a:buSzPct val="100000"/>
-              <a:buFont typeface="+mj-lt"/>
-              <a:buAutoNum type="arabicPeriod" startAt="1"/>
-            </a:pPr>
-            <a:r>
-              <a:rPr lang="en-US" sz="4000" dirty="0">
-                <a:solidFill>
-                  <a:srgbClr val="111111"/>
-                </a:solidFill>
-                <a:latin typeface="Times New Roman" pitchFamily="34" charset="0"/>
-                <a:ea typeface="Times New Roman" pitchFamily="34" charset="-122"/>
-                <a:cs typeface="Times New Roman" pitchFamily="34" charset="-120"/>
-              </a:rPr>
-              <a:t>Dirty water causes ______.</a:t>
-            </a:r>
-            <a:endParaRPr lang="en-US" sz="4000" dirty="0"/>
+              <a:t>Illustration: collecting rainwater</a:t>
+            </a:r>
+            <a:endParaRPr lang="en-US" sz="1600" dirty="0"/>
           </a:p>
         </p:txBody>
       </p:sp>
@@ -16169,7 +16959,7 @@
                 <a:ea typeface="Calibri" pitchFamily="34" charset="-122"/>
                 <a:cs typeface="Calibri" pitchFamily="34" charset="-120"/>
               </a:rPr>
-              <a:t>HOMEWORK</a:t>
+              <a:t>BOARD SUMMARY</a:t>
             </a:r>
             <a:endParaRPr lang="en-US" sz="1400" dirty="0"/>
           </a:p>
@@ -16234,7 +17024,7 @@
                 <a:ea typeface="Times New Roman" pitchFamily="34" charset="-122"/>
                 <a:cs typeface="Times New Roman" pitchFamily="34" charset="-120"/>
               </a:rPr>
-              <a:t>Homework</a:t>
+              <a:t>4. Management of Water</a:t>
             </a:r>
             <a:endParaRPr lang="en-US" sz="3600" dirty="0"/>
           </a:p>
@@ -16268,7 +17058,7 @@
               <a:buNone/>
             </a:pPr>
             <a:r>
-              <a:rPr lang="en-US" sz="4000" dirty="0">
+              <a:rPr lang="en-US" sz="4000" b="1" dirty="0">
                 <a:solidFill>
                   <a:srgbClr val="111111"/>
                 </a:solidFill>
@@ -16276,7 +17066,61 @@
                 <a:ea typeface="Times New Roman" pitchFamily="34" charset="-122"/>
                 <a:cs typeface="Times New Roman" pitchFamily="34" charset="-120"/>
               </a:rPr>
-              <a:t>Carry out a small enquiry: ask three families where they get water and what problems they have.</a:t>
+              <a:t>Clean water: </a:t>
+            </a:r>
+            <a:pPr algn="l" indent="0" marL="0">
+              <a:spcAft>
+                <a:spcPts val="800"/>
+              </a:spcAft>
+              <a:buNone/>
+            </a:pPr>
+            <a:r>
+              <a:rPr lang="en-US" sz="4000" dirty="0">
+                <a:solidFill>
+                  <a:srgbClr val="111111"/>
+                </a:solidFill>
+                <a:latin typeface="Times New Roman" pitchFamily="34" charset="0"/>
+                <a:ea typeface="Times New Roman" pitchFamily="34" charset="-122"/>
+                <a:cs typeface="Times New Roman" pitchFamily="34" charset="-120"/>
+              </a:rPr>
+              <a:t>We boil or filter water and build boreholes.</a:t>
+            </a:r>
+            <a:endParaRPr lang="en-US" sz="4000" dirty="0"/>
+          </a:p>
+          <a:p>
+            <a:pPr algn="l" indent="0" marL="0">
+              <a:spcAft>
+                <a:spcPts val="800"/>
+              </a:spcAft>
+              <a:buNone/>
+            </a:pPr>
+            <a:r>
+              <a:rPr lang="en-US" sz="4000" b="1" dirty="0">
+                <a:solidFill>
+                  <a:srgbClr val="111111"/>
+                </a:solidFill>
+                <a:latin typeface="Times New Roman" pitchFamily="34" charset="0"/>
+                <a:ea typeface="Times New Roman" pitchFamily="34" charset="-122"/>
+                <a:cs typeface="Times New Roman" pitchFamily="34" charset="-120"/>
+              </a:rPr>
+              <a:t>Protecting sources: </a:t>
+            </a:r>
+            <a:pPr algn="l" indent="0" marL="0">
+              <a:spcAft>
+                <a:spcPts val="800"/>
+              </a:spcAft>
+              <a:buNone/>
+            </a:pPr>
+            <a:r>
+              <a:rPr lang="en-US" sz="4000" dirty="0">
+                <a:solidFill>
+                  <a:srgbClr val="111111"/>
+                </a:solidFill>
+                <a:latin typeface="Times New Roman" pitchFamily="34" charset="0"/>
+                <a:ea typeface="Times New Roman" pitchFamily="34" charset="-122"/>
+                <a:cs typeface="Times New Roman" pitchFamily="34" charset="-120"/>
+              </a:rPr>
+              <a:t>We keep wells covered and do not throw rubbish in rivers.</a:t>
             </a:r>
             <a:endParaRPr lang="en-US" sz="4000" dirty="0"/>
           </a:p>
@@ -16388,7 +17232,7 @@
                 <a:ea typeface="Calibri" pitchFamily="34" charset="-122"/>
                 <a:cs typeface="Calibri" pitchFamily="34" charset="-120"/>
               </a:rPr>
-              <a:t>NEXT LESSON</a:t>
+              <a:t>FORMATIVE EVALUATION</a:t>
             </a:r>
             <a:endParaRPr lang="en-US" sz="1400" dirty="0"/>
           </a:p>
@@ -16453,7 +17297,7 @@
                 <a:ea typeface="Times New Roman" pitchFamily="34" charset="-122"/>
                 <a:cs typeface="Times New Roman" pitchFamily="34" charset="-120"/>
               </a:rPr>
-              <a:t>Next Lesson</a:t>
+              <a:t>Evaluation 1</a:t>
             </a:r>
             <a:endParaRPr lang="en-US" sz="3600" dirty="0"/>
           </a:p>
@@ -16477,17 +17321,17 @@
           <a:ln/>
         </p:spPr>
         <p:txBody>
-          <a:bodyPr wrap="square" lIns="0" tIns="0" rIns="0" bIns="0" rtlCol="0" anchor="ctr"/>
-          <a:lstStyle/>
-          <a:p>
-            <a:pPr algn="ctr" indent="0" marL="0">
+          <a:bodyPr wrap="square" lIns="0" tIns="0" rIns="0" bIns="0" rtlCol="0" anchor="t"/>
+          <a:lstStyle/>
+          <a:p>
+            <a:pPr algn="l" indent="0" marL="0">
               <a:spcAft>
                 <a:spcPts val="800"/>
               </a:spcAft>
               <a:buNone/>
             </a:pPr>
             <a:r>
-              <a:rPr lang="en-US" sz="4000" b="1" dirty="0">
+              <a:rPr lang="en-US" sz="4000" dirty="0">
                 <a:solidFill>
                   <a:srgbClr val="111111"/>
                 </a:solidFill>
@@ -16495,27 +17339,7 @@
                 <a:ea typeface="Times New Roman" pitchFamily="34" charset="-122"/>
                 <a:cs typeface="Times New Roman" pitchFamily="34" charset="-120"/>
               </a:rPr>
-              <a:t>Our next lesson will be on:</a:t>
-            </a:r>
-            <a:endParaRPr lang="en-US" sz="4000" dirty="0"/>
-          </a:p>
-          <a:p>
-            <a:pPr algn="ctr" indent="0" marL="0">
-              <a:spcAft>
-                <a:spcPts val="800"/>
-              </a:spcAft>
-              <a:buNone/>
-            </a:pPr>
-            <a:r>
-              <a:rPr lang="en-US" sz="4000" b="1" dirty="0">
-                <a:solidFill>
-                  <a:srgbClr val="990011"/>
-                </a:solidFill>
-                <a:latin typeface="Times New Roman" pitchFamily="34" charset="0"/>
-                <a:ea typeface="Times New Roman" pitchFamily="34" charset="-122"/>
-                <a:cs typeface="Times New Roman" pitchFamily="34" charset="-120"/>
-              </a:rPr>
-              <a:t>Lesson 6: Country Sides in Africa</a:t>
+              <a:t>What is water scarcity?</a:t>
             </a:r>
             <a:endParaRPr lang="en-US" sz="4000" dirty="0"/>
           </a:p>
@@ -16627,6 +17451,1625 @@
                 <a:ea typeface="Calibri" pitchFamily="34" charset="-122"/>
                 <a:cs typeface="Calibri" pitchFamily="34" charset="-120"/>
               </a:rPr>
+              <a:t>FORMATIVE EVALUATION</a:t>
+            </a:r>
+            <a:endParaRPr lang="en-US" sz="1400" dirty="0"/>
+          </a:p>
+        </p:txBody>
+      </p:sp>
+      <p:pic>
+        <p:nvPicPr>
+          <p:cNvPr id="3" name="Image 0" descr="/home/claude/f4/img/minesec_sheet.png">    </p:cNvPr>
+          <p:cNvPicPr>
+            <a:picLocks noChangeAspect="1"/>
+          </p:cNvPicPr>
+          <p:nvPr/>
+        </p:nvPicPr>
+        <p:blipFill>
+          <a:blip r:embed="rId1"/>
+          <a:stretch>
+            <a:fillRect/>
+          </a:stretch>
+        </p:blipFill>
+        <p:spPr>
+          <a:xfrm>
+            <a:off x="0" y="658368"/>
+            <a:ext cx="5120640" cy="5833872"/>
+          </a:xfrm>
+          <a:prstGeom prst="rect">
+            <a:avLst/>
+          </a:prstGeom>
+        </p:spPr>
+      </p:pic>
+      <p:sp>
+        <p:nvSpPr>
+          <p:cNvPr id="4" name="Text 1"/>
+          <p:cNvSpPr/>
+          <p:nvPr/>
+        </p:nvSpPr>
+        <p:spPr>
+          <a:xfrm>
+            <a:off x="5349240" y="1005840"/>
+            <a:ext cx="6522415" cy="731520"/>
+          </a:xfrm>
+          <a:prstGeom prst="rect">
+            <a:avLst/>
+          </a:prstGeom>
+          <a:noFill/>
+          <a:ln/>
+        </p:spPr>
+        <p:txBody>
+          <a:bodyPr wrap="square" lIns="0" tIns="0" rIns="0" bIns="0" rtlCol="0" anchor="ctr">
+            <a:normAutofit/>
+          </a:bodyPr>
+          <a:lstStyle/>
+          <a:p>
+            <a:pPr algn="ctr" indent="0" marL="0">
+              <a:buNone/>
+            </a:pPr>
+            <a:r>
+              <a:rPr lang="en-US" sz="3600" b="1" dirty="0">
+                <a:solidFill>
+                  <a:srgbClr val="990011"/>
+                </a:solidFill>
+                <a:latin typeface="Times New Roman" pitchFamily="34" charset="0"/>
+                <a:ea typeface="Times New Roman" pitchFamily="34" charset="-122"/>
+                <a:cs typeface="Times New Roman" pitchFamily="34" charset="-120"/>
+              </a:rPr>
+              <a:t>Expected Answer</a:t>
+            </a:r>
+            <a:endParaRPr lang="en-US" sz="3600" dirty="0"/>
+          </a:p>
+        </p:txBody>
+      </p:sp>
+      <p:sp>
+        <p:nvSpPr>
+          <p:cNvPr id="5" name="Text 2"/>
+          <p:cNvSpPr/>
+          <p:nvPr/>
+        </p:nvSpPr>
+        <p:spPr>
+          <a:xfrm>
+            <a:off x="5349240" y="1783080"/>
+            <a:ext cx="6522415" cy="4663440"/>
+          </a:xfrm>
+          <a:prstGeom prst="rect">
+            <a:avLst/>
+          </a:prstGeom>
+          <a:noFill/>
+          <a:ln/>
+        </p:spPr>
+        <p:txBody>
+          <a:bodyPr wrap="square" lIns="0" tIns="0" rIns="0" bIns="0" rtlCol="0" anchor="t"/>
+          <a:lstStyle/>
+          <a:p>
+            <a:pPr algn="l" indent="0" marL="0">
+              <a:spcAft>
+                <a:spcPts val="800"/>
+              </a:spcAft>
+              <a:buNone/>
+            </a:pPr>
+            <a:r>
+              <a:rPr lang="en-US" sz="4000" dirty="0">
+                <a:solidFill>
+                  <a:srgbClr val="111111"/>
+                </a:solidFill>
+                <a:latin typeface="Times New Roman" pitchFamily="34" charset="0"/>
+                <a:ea typeface="Times New Roman" pitchFamily="34" charset="-122"/>
+                <a:cs typeface="Times New Roman" pitchFamily="34" charset="-120"/>
+              </a:rPr>
+              <a:t>A lack of enough clean water.</a:t>
+            </a:r>
+            <a:endParaRPr lang="en-US" sz="4000" dirty="0"/>
+          </a:p>
+        </p:txBody>
+      </p:sp>
+      <p:sp>
+        <p:nvSpPr>
+          <p:cNvPr id="25" name="Slide Number Placeholder 0"/>
+          <p:cNvSpPr>
+            <a:spLocks noGrp="1"/>
+          </p:cNvSpPr>
+          <p:nvPr>
+            <p:ph type="sldNum" sz="quarter" idx="4294967295"/>
+          </p:nvPr>
+        </p:nvSpPr>
+        <p:spPr>
+          <a:xfrm>
+            <a:off x="27432" y="91440"/>
+            <a:ext cx="585216" cy="475488"/>
+          </a:xfrm>
+          <a:prstGeom prst="rect">
+            <a:avLst/>
+          </a:prstGeom>
+          <a:extLst>
+            <a:ext uri="{C572A759-6A51-4108-AA02-DFA0A04FC94B}">
+              <ma14:wrappingTextBoxFlag xmlns:ma14="http://schemas.microsoft.com/office/mac/drawingml/2011/main" val="0"/>
+            </a:ext>
+          </a:extLst>
+        </p:spPr>
+        <p:txBody>
+          <a:bodyPr/>
+          <a:lstStyle>
+            <a:lvl1pPr>
+              <a:defRPr sz="2000">
+                <a:solidFill>
+                  <a:srgbClr val="FFFFFF"/>
+                </a:solidFill>
+                <a:latin typeface="Calibri"/>
+                <a:ea typeface="Calibri"/>
+                <a:cs typeface="Calibri"/>
+              </a:defRPr>
+            </a:lvl1pPr>
+          </a:lstStyle>
+          <a:p>
+            <a:pPr algn="ctr"/>
+            <a:fld id="{F7021451-1387-4CA6-816F-3879F97B5CBC}" type="slidenum">
+              <a:rPr b="1" lang="en-US"/>
+              <a:t>47</a:t>
+            </a:fld>
+            <a:endParaRPr lang="en-US"/>
+          </a:p>
+        </p:txBody>
+      </p:sp>
+    </p:spTree>
+  </p:cSld>
+  <p:clrMapOvr>
+    <a:masterClrMapping/>
+  </p:clrMapOvr>
+</p:sld>
+</file>
+
+<file path=ppt/slides/slide48.xml><?xml version="1.0" encoding="utf-8"?>
+<p:sld xmlns:a="http://schemas.openxmlformats.org/drawingml/2006/main" xmlns:r="http://schemas.openxmlformats.org/officeDocument/2006/relationships" xmlns:p="http://schemas.openxmlformats.org/presentationml/2006/main">
+  <p:cSld name="Slide 48">
+    <p:spTree>
+      <p:nvGrpSpPr>
+        <p:cNvPr id="1" name=""/>
+        <p:cNvGrpSpPr/>
+        <p:nvPr/>
+      </p:nvGrpSpPr>
+      <p:grpSpPr>
+        <a:xfrm>
+          <a:off x="0" y="0"/>
+          <a:ext cx="0" cy="0"/>
+          <a:chOff x="0" y="0"/>
+          <a:chExt cx="0" cy="0"/>
+        </a:xfrm>
+      </p:grpSpPr>
+      <p:sp>
+        <p:nvSpPr>
+          <p:cNvPr id="2" name="Text 0"/>
+          <p:cNvSpPr/>
+          <p:nvPr/>
+        </p:nvSpPr>
+        <p:spPr>
+          <a:xfrm>
+            <a:off x="457200" y="713232"/>
+            <a:ext cx="11368735" cy="274320"/>
+          </a:xfrm>
+          <a:prstGeom prst="rect">
+            <a:avLst/>
+          </a:prstGeom>
+          <a:noFill/>
+          <a:ln/>
+        </p:spPr>
+        <p:txBody>
+          <a:bodyPr wrap="square" lIns="0" tIns="0" rIns="0" bIns="0" rtlCol="0" anchor="ctr"/>
+          <a:lstStyle/>
+          <a:p>
+            <a:pPr algn="r" indent="0" marL="0">
+              <a:buNone/>
+            </a:pPr>
+            <a:r>
+              <a:rPr lang="en-US" sz="1400" b="1" dirty="0">
+                <a:solidFill>
+                  <a:srgbClr val="1C3F6E"/>
+                </a:solidFill>
+                <a:latin typeface="Calibri" pitchFamily="34" charset="0"/>
+                <a:ea typeface="Calibri" pitchFamily="34" charset="-122"/>
+                <a:cs typeface="Calibri" pitchFamily="34" charset="-120"/>
+              </a:rPr>
+              <a:t>FORMATIVE EVALUATION</a:t>
+            </a:r>
+            <a:endParaRPr lang="en-US" sz="1400" dirty="0"/>
+          </a:p>
+        </p:txBody>
+      </p:sp>
+      <p:pic>
+        <p:nvPicPr>
+          <p:cNvPr id="3" name="Image 0" descr="/home/claude/f4/img/minesec_sheet.png">    </p:cNvPr>
+          <p:cNvPicPr>
+            <a:picLocks noChangeAspect="1"/>
+          </p:cNvPicPr>
+          <p:nvPr/>
+        </p:nvPicPr>
+        <p:blipFill>
+          <a:blip r:embed="rId1"/>
+          <a:stretch>
+            <a:fillRect/>
+          </a:stretch>
+        </p:blipFill>
+        <p:spPr>
+          <a:xfrm>
+            <a:off x="0" y="658368"/>
+            <a:ext cx="5120640" cy="5833872"/>
+          </a:xfrm>
+          <a:prstGeom prst="rect">
+            <a:avLst/>
+          </a:prstGeom>
+        </p:spPr>
+      </p:pic>
+      <p:sp>
+        <p:nvSpPr>
+          <p:cNvPr id="4" name="Text 1"/>
+          <p:cNvSpPr/>
+          <p:nvPr/>
+        </p:nvSpPr>
+        <p:spPr>
+          <a:xfrm>
+            <a:off x="5349240" y="1005840"/>
+            <a:ext cx="6522415" cy="731520"/>
+          </a:xfrm>
+          <a:prstGeom prst="rect">
+            <a:avLst/>
+          </a:prstGeom>
+          <a:noFill/>
+          <a:ln/>
+        </p:spPr>
+        <p:txBody>
+          <a:bodyPr wrap="square" lIns="0" tIns="0" rIns="0" bIns="0" rtlCol="0" anchor="ctr">
+            <a:normAutofit/>
+          </a:bodyPr>
+          <a:lstStyle/>
+          <a:p>
+            <a:pPr algn="ctr" indent="0" marL="0">
+              <a:buNone/>
+            </a:pPr>
+            <a:r>
+              <a:rPr lang="en-US" sz="3600" b="1" dirty="0">
+                <a:solidFill>
+                  <a:srgbClr val="990011"/>
+                </a:solidFill>
+                <a:latin typeface="Times New Roman" pitchFamily="34" charset="0"/>
+                <a:ea typeface="Times New Roman" pitchFamily="34" charset="-122"/>
+                <a:cs typeface="Times New Roman" pitchFamily="34" charset="-120"/>
+              </a:rPr>
+              <a:t>Evaluation 2</a:t>
+            </a:r>
+            <a:endParaRPr lang="en-US" sz="3600" dirty="0"/>
+          </a:p>
+        </p:txBody>
+      </p:sp>
+      <p:sp>
+        <p:nvSpPr>
+          <p:cNvPr id="5" name="Text 2"/>
+          <p:cNvSpPr/>
+          <p:nvPr/>
+        </p:nvSpPr>
+        <p:spPr>
+          <a:xfrm>
+            <a:off x="5349240" y="1783080"/>
+            <a:ext cx="6522415" cy="4663440"/>
+          </a:xfrm>
+          <a:prstGeom prst="rect">
+            <a:avLst/>
+          </a:prstGeom>
+          <a:noFill/>
+          <a:ln/>
+        </p:spPr>
+        <p:txBody>
+          <a:bodyPr wrap="square" lIns="0" tIns="0" rIns="0" bIns="0" rtlCol="0" anchor="t"/>
+          <a:lstStyle/>
+          <a:p>
+            <a:pPr algn="l" indent="0" marL="0">
+              <a:spcAft>
+                <a:spcPts val="800"/>
+              </a:spcAft>
+              <a:buNone/>
+            </a:pPr>
+            <a:r>
+              <a:rPr lang="en-US" sz="4000" dirty="0">
+                <a:solidFill>
+                  <a:srgbClr val="111111"/>
+                </a:solidFill>
+                <a:latin typeface="Times New Roman" pitchFamily="34" charset="0"/>
+                <a:ea typeface="Times New Roman" pitchFamily="34" charset="-122"/>
+                <a:cs typeface="Times New Roman" pitchFamily="34" charset="-120"/>
+              </a:rPr>
+              <a:t>Give two ways to manage water.</a:t>
+            </a:r>
+            <a:endParaRPr lang="en-US" sz="4000" dirty="0"/>
+          </a:p>
+        </p:txBody>
+      </p:sp>
+      <p:sp>
+        <p:nvSpPr>
+          <p:cNvPr id="25" name="Slide Number Placeholder 0"/>
+          <p:cNvSpPr>
+            <a:spLocks noGrp="1"/>
+          </p:cNvSpPr>
+          <p:nvPr>
+            <p:ph type="sldNum" sz="quarter" idx="4294967295"/>
+          </p:nvPr>
+        </p:nvSpPr>
+        <p:spPr>
+          <a:xfrm>
+            <a:off x="27432" y="91440"/>
+            <a:ext cx="585216" cy="475488"/>
+          </a:xfrm>
+          <a:prstGeom prst="rect">
+            <a:avLst/>
+          </a:prstGeom>
+          <a:extLst>
+            <a:ext uri="{C572A759-6A51-4108-AA02-DFA0A04FC94B}">
+              <ma14:wrappingTextBoxFlag xmlns:ma14="http://schemas.microsoft.com/office/mac/drawingml/2011/main" val="0"/>
+            </a:ext>
+          </a:extLst>
+        </p:spPr>
+        <p:txBody>
+          <a:bodyPr/>
+          <a:lstStyle>
+            <a:lvl1pPr>
+              <a:defRPr sz="2000">
+                <a:solidFill>
+                  <a:srgbClr val="FFFFFF"/>
+                </a:solidFill>
+                <a:latin typeface="Calibri"/>
+                <a:ea typeface="Calibri"/>
+                <a:cs typeface="Calibri"/>
+              </a:defRPr>
+            </a:lvl1pPr>
+          </a:lstStyle>
+          <a:p>
+            <a:pPr algn="ctr"/>
+            <a:fld id="{F7021451-1387-4CA6-816F-3879F97B5CBC}" type="slidenum">
+              <a:rPr b="1" lang="en-US"/>
+              <a:t>48</a:t>
+            </a:fld>
+            <a:endParaRPr lang="en-US"/>
+          </a:p>
+        </p:txBody>
+      </p:sp>
+    </p:spTree>
+  </p:cSld>
+  <p:clrMapOvr>
+    <a:masterClrMapping/>
+  </p:clrMapOvr>
+</p:sld>
+</file>
+
+<file path=ppt/slides/slide49.xml><?xml version="1.0" encoding="utf-8"?>
+<p:sld xmlns:a="http://schemas.openxmlformats.org/drawingml/2006/main" xmlns:r="http://schemas.openxmlformats.org/officeDocument/2006/relationships" xmlns:p="http://schemas.openxmlformats.org/presentationml/2006/main">
+  <p:cSld name="Slide 49">
+    <p:spTree>
+      <p:nvGrpSpPr>
+        <p:cNvPr id="1" name=""/>
+        <p:cNvGrpSpPr/>
+        <p:nvPr/>
+      </p:nvGrpSpPr>
+      <p:grpSpPr>
+        <a:xfrm>
+          <a:off x="0" y="0"/>
+          <a:ext cx="0" cy="0"/>
+          <a:chOff x="0" y="0"/>
+          <a:chExt cx="0" cy="0"/>
+        </a:xfrm>
+      </p:grpSpPr>
+      <p:sp>
+        <p:nvSpPr>
+          <p:cNvPr id="2" name="Text 0"/>
+          <p:cNvSpPr/>
+          <p:nvPr/>
+        </p:nvSpPr>
+        <p:spPr>
+          <a:xfrm>
+            <a:off x="457200" y="713232"/>
+            <a:ext cx="11368735" cy="274320"/>
+          </a:xfrm>
+          <a:prstGeom prst="rect">
+            <a:avLst/>
+          </a:prstGeom>
+          <a:noFill/>
+          <a:ln/>
+        </p:spPr>
+        <p:txBody>
+          <a:bodyPr wrap="square" lIns="0" tIns="0" rIns="0" bIns="0" rtlCol="0" anchor="ctr"/>
+          <a:lstStyle/>
+          <a:p>
+            <a:pPr algn="r" indent="0" marL="0">
+              <a:buNone/>
+            </a:pPr>
+            <a:r>
+              <a:rPr lang="en-US" sz="1400" b="1" dirty="0">
+                <a:solidFill>
+                  <a:srgbClr val="1C3F6E"/>
+                </a:solidFill>
+                <a:latin typeface="Calibri" pitchFamily="34" charset="0"/>
+                <a:ea typeface="Calibri" pitchFamily="34" charset="-122"/>
+                <a:cs typeface="Calibri" pitchFamily="34" charset="-120"/>
+              </a:rPr>
+              <a:t>FORMATIVE EVALUATION</a:t>
+            </a:r>
+            <a:endParaRPr lang="en-US" sz="1400" dirty="0"/>
+          </a:p>
+        </p:txBody>
+      </p:sp>
+      <p:pic>
+        <p:nvPicPr>
+          <p:cNvPr id="3" name="Image 0" descr="/home/claude/f4/img/minesec_sheet.png">    </p:cNvPr>
+          <p:cNvPicPr>
+            <a:picLocks noChangeAspect="1"/>
+          </p:cNvPicPr>
+          <p:nvPr/>
+        </p:nvPicPr>
+        <p:blipFill>
+          <a:blip r:embed="rId1"/>
+          <a:stretch>
+            <a:fillRect/>
+          </a:stretch>
+        </p:blipFill>
+        <p:spPr>
+          <a:xfrm>
+            <a:off x="0" y="658368"/>
+            <a:ext cx="5120640" cy="5833872"/>
+          </a:xfrm>
+          <a:prstGeom prst="rect">
+            <a:avLst/>
+          </a:prstGeom>
+        </p:spPr>
+      </p:pic>
+      <p:sp>
+        <p:nvSpPr>
+          <p:cNvPr id="4" name="Text 1"/>
+          <p:cNvSpPr/>
+          <p:nvPr/>
+        </p:nvSpPr>
+        <p:spPr>
+          <a:xfrm>
+            <a:off x="5349240" y="1005840"/>
+            <a:ext cx="6522415" cy="731520"/>
+          </a:xfrm>
+          <a:prstGeom prst="rect">
+            <a:avLst/>
+          </a:prstGeom>
+          <a:noFill/>
+          <a:ln/>
+        </p:spPr>
+        <p:txBody>
+          <a:bodyPr wrap="square" lIns="0" tIns="0" rIns="0" bIns="0" rtlCol="0" anchor="ctr">
+            <a:normAutofit/>
+          </a:bodyPr>
+          <a:lstStyle/>
+          <a:p>
+            <a:pPr algn="ctr" indent="0" marL="0">
+              <a:buNone/>
+            </a:pPr>
+            <a:r>
+              <a:rPr lang="en-US" sz="3600" b="1" dirty="0">
+                <a:solidFill>
+                  <a:srgbClr val="990011"/>
+                </a:solidFill>
+                <a:latin typeface="Times New Roman" pitchFamily="34" charset="0"/>
+                <a:ea typeface="Times New Roman" pitchFamily="34" charset="-122"/>
+                <a:cs typeface="Times New Roman" pitchFamily="34" charset="-120"/>
+              </a:rPr>
+              <a:t>Expected Answer</a:t>
+            </a:r>
+            <a:endParaRPr lang="en-US" sz="3600" dirty="0"/>
+          </a:p>
+        </p:txBody>
+      </p:sp>
+      <p:sp>
+        <p:nvSpPr>
+          <p:cNvPr id="5" name="Text 2"/>
+          <p:cNvSpPr/>
+          <p:nvPr/>
+        </p:nvSpPr>
+        <p:spPr>
+          <a:xfrm>
+            <a:off x="5349240" y="1783080"/>
+            <a:ext cx="6522415" cy="4663440"/>
+          </a:xfrm>
+          <a:prstGeom prst="rect">
+            <a:avLst/>
+          </a:prstGeom>
+          <a:noFill/>
+          <a:ln/>
+        </p:spPr>
+        <p:txBody>
+          <a:bodyPr wrap="square" lIns="0" tIns="0" rIns="0" bIns="0" rtlCol="0" anchor="t"/>
+          <a:lstStyle/>
+          <a:p>
+            <a:pPr algn="l" indent="0" marL="0">
+              <a:spcAft>
+                <a:spcPts val="800"/>
+              </a:spcAft>
+              <a:buNone/>
+            </a:pPr>
+            <a:r>
+              <a:rPr lang="en-US" sz="4000" dirty="0">
+                <a:solidFill>
+                  <a:srgbClr val="111111"/>
+                </a:solidFill>
+                <a:latin typeface="Times New Roman" pitchFamily="34" charset="0"/>
+                <a:ea typeface="Times New Roman" pitchFamily="34" charset="-122"/>
+                <a:cs typeface="Times New Roman" pitchFamily="34" charset="-120"/>
+              </a:rPr>
+              <a:t>Store rainwater and repair leaks.</a:t>
+            </a:r>
+            <a:endParaRPr lang="en-US" sz="4000" dirty="0"/>
+          </a:p>
+        </p:txBody>
+      </p:sp>
+      <p:sp>
+        <p:nvSpPr>
+          <p:cNvPr id="25" name="Slide Number Placeholder 0"/>
+          <p:cNvSpPr>
+            <a:spLocks noGrp="1"/>
+          </p:cNvSpPr>
+          <p:nvPr>
+            <p:ph type="sldNum" sz="quarter" idx="4294967295"/>
+          </p:nvPr>
+        </p:nvSpPr>
+        <p:spPr>
+          <a:xfrm>
+            <a:off x="27432" y="91440"/>
+            <a:ext cx="585216" cy="475488"/>
+          </a:xfrm>
+          <a:prstGeom prst="rect">
+            <a:avLst/>
+          </a:prstGeom>
+          <a:extLst>
+            <a:ext uri="{C572A759-6A51-4108-AA02-DFA0A04FC94B}">
+              <ma14:wrappingTextBoxFlag xmlns:ma14="http://schemas.microsoft.com/office/mac/drawingml/2011/main" val="0"/>
+            </a:ext>
+          </a:extLst>
+        </p:spPr>
+        <p:txBody>
+          <a:bodyPr/>
+          <a:lstStyle>
+            <a:lvl1pPr>
+              <a:defRPr sz="2000">
+                <a:solidFill>
+                  <a:srgbClr val="FFFFFF"/>
+                </a:solidFill>
+                <a:latin typeface="Calibri"/>
+                <a:ea typeface="Calibri"/>
+                <a:cs typeface="Calibri"/>
+              </a:defRPr>
+            </a:lvl1pPr>
+          </a:lstStyle>
+          <a:p>
+            <a:pPr algn="ctr"/>
+            <a:fld id="{F7021451-1387-4CA6-816F-3879F97B5CBC}" type="slidenum">
+              <a:rPr b="1" lang="en-US"/>
+              <a:t>49</a:t>
+            </a:fld>
+            <a:endParaRPr lang="en-US"/>
+          </a:p>
+        </p:txBody>
+      </p:sp>
+    </p:spTree>
+  </p:cSld>
+  <p:clrMapOvr>
+    <a:masterClrMapping/>
+  </p:clrMapOvr>
+</p:sld>
+</file>
+
+<file path=ppt/slides/slide5.xml><?xml version="1.0" encoding="utf-8"?>
+<p:sld xmlns:a="http://schemas.openxmlformats.org/drawingml/2006/main" xmlns:r="http://schemas.openxmlformats.org/officeDocument/2006/relationships" xmlns:p="http://schemas.openxmlformats.org/presentationml/2006/main">
+  <p:cSld name="Slide 5">
+    <p:spTree>
+      <p:nvGrpSpPr>
+        <p:cNvPr id="1" name=""/>
+        <p:cNvGrpSpPr/>
+        <p:nvPr/>
+      </p:nvGrpSpPr>
+      <p:grpSpPr>
+        <a:xfrm>
+          <a:off x="0" y="0"/>
+          <a:ext cx="0" cy="0"/>
+          <a:chOff x="0" y="0"/>
+          <a:chExt cx="0" cy="0"/>
+        </a:xfrm>
+      </p:grpSpPr>
+      <p:sp>
+        <p:nvSpPr>
+          <p:cNvPr id="2" name="Text 0"/>
+          <p:cNvSpPr/>
+          <p:nvPr/>
+        </p:nvSpPr>
+        <p:spPr>
+          <a:xfrm>
+            <a:off x="457200" y="713232"/>
+            <a:ext cx="11368735" cy="274320"/>
+          </a:xfrm>
+          <a:prstGeom prst="rect">
+            <a:avLst/>
+          </a:prstGeom>
+          <a:noFill/>
+          <a:ln/>
+        </p:spPr>
+        <p:txBody>
+          <a:bodyPr wrap="square" lIns="0" tIns="0" rIns="0" bIns="0" rtlCol="0" anchor="ctr"/>
+          <a:lstStyle/>
+          <a:p>
+            <a:pPr algn="r" indent="0" marL="0">
+              <a:buNone/>
+            </a:pPr>
+            <a:r>
+              <a:rPr lang="en-US" sz="1400" b="1" dirty="0">
+                <a:solidFill>
+                  <a:srgbClr val="1C3F6E"/>
+                </a:solidFill>
+                <a:latin typeface="Calibri" pitchFamily="34" charset="0"/>
+                <a:ea typeface="Calibri" pitchFamily="34" charset="-122"/>
+                <a:cs typeface="Calibri" pitchFamily="34" charset="-120"/>
+              </a:rPr>
+              <a:t>HOMEWORK CORRECTION</a:t>
+            </a:r>
+            <a:endParaRPr lang="en-US" sz="1400" dirty="0"/>
+          </a:p>
+        </p:txBody>
+      </p:sp>
+      <p:pic>
+        <p:nvPicPr>
+          <p:cNvPr id="3" name="Image 0" descr="/home/claude/f4/img/minesec_sheet.png">    </p:cNvPr>
+          <p:cNvPicPr>
+            <a:picLocks noChangeAspect="1"/>
+          </p:cNvPicPr>
+          <p:nvPr/>
+        </p:nvPicPr>
+        <p:blipFill>
+          <a:blip r:embed="rId1"/>
+          <a:stretch>
+            <a:fillRect/>
+          </a:stretch>
+        </p:blipFill>
+        <p:spPr>
+          <a:xfrm>
+            <a:off x="0" y="658368"/>
+            <a:ext cx="5120640" cy="5833872"/>
+          </a:xfrm>
+          <a:prstGeom prst="rect">
+            <a:avLst/>
+          </a:prstGeom>
+        </p:spPr>
+      </p:pic>
+      <p:sp>
+        <p:nvSpPr>
+          <p:cNvPr id="4" name="Text 1"/>
+          <p:cNvSpPr/>
+          <p:nvPr/>
+        </p:nvSpPr>
+        <p:spPr>
+          <a:xfrm>
+            <a:off x="5349240" y="1005840"/>
+            <a:ext cx="6522415" cy="731520"/>
+          </a:xfrm>
+          <a:prstGeom prst="rect">
+            <a:avLst/>
+          </a:prstGeom>
+          <a:noFill/>
+          <a:ln/>
+        </p:spPr>
+        <p:txBody>
+          <a:bodyPr wrap="square" lIns="0" tIns="0" rIns="0" bIns="0" rtlCol="0" anchor="ctr">
+            <a:normAutofit/>
+          </a:bodyPr>
+          <a:lstStyle/>
+          <a:p>
+            <a:pPr algn="ctr" indent="0" marL="0">
+              <a:buNone/>
+            </a:pPr>
+            <a:r>
+              <a:rPr lang="en-US" sz="3600" b="1" dirty="0">
+                <a:solidFill>
+                  <a:srgbClr val="990011"/>
+                </a:solidFill>
+                <a:latin typeface="Times New Roman" pitchFamily="34" charset="0"/>
+                <a:ea typeface="Times New Roman" pitchFamily="34" charset="-122"/>
+                <a:cs typeface="Times New Roman" pitchFamily="34" charset="-120"/>
+              </a:rPr>
+              <a:t>Correction: Possible Answer</a:t>
+            </a:r>
+            <a:endParaRPr lang="en-US" sz="3600" dirty="0"/>
+          </a:p>
+        </p:txBody>
+      </p:sp>
+      <p:sp>
+        <p:nvSpPr>
+          <p:cNvPr id="5" name="Text 2"/>
+          <p:cNvSpPr/>
+          <p:nvPr/>
+        </p:nvSpPr>
+        <p:spPr>
+          <a:xfrm>
+            <a:off x="5349240" y="1783080"/>
+            <a:ext cx="6522415" cy="4663440"/>
+          </a:xfrm>
+          <a:prstGeom prst="rect">
+            <a:avLst/>
+          </a:prstGeom>
+          <a:noFill/>
+          <a:ln/>
+        </p:spPr>
+        <p:txBody>
+          <a:bodyPr wrap="square" lIns="0" tIns="0" rIns="0" bIns="0" rtlCol="0" anchor="t"/>
+          <a:lstStyle/>
+          <a:p>
+            <a:pPr algn="l" indent="0" marL="0">
+              <a:spcAft>
+                <a:spcPts val="800"/>
+              </a:spcAft>
+              <a:buNone/>
+            </a:pPr>
+            <a:r>
+              <a:rPr lang="en-US" sz="4000" dirty="0">
+                <a:solidFill>
+                  <a:srgbClr val="111111"/>
+                </a:solidFill>
+                <a:latin typeface="Times New Roman" pitchFamily="34" charset="0"/>
+                <a:ea typeface="Times New Roman" pitchFamily="34" charset="-122"/>
+                <a:cs typeface="Times New Roman" pitchFamily="34" charset="-120"/>
+              </a:rPr>
+              <a:t>They store rainwater in jars, dig wells and use water carefully for cooking, washing and animals.</a:t>
+            </a:r>
+            <a:endParaRPr lang="en-US" sz="4000" dirty="0"/>
+          </a:p>
+        </p:txBody>
+      </p:sp>
+      <p:sp>
+        <p:nvSpPr>
+          <p:cNvPr id="25" name="Slide Number Placeholder 0"/>
+          <p:cNvSpPr>
+            <a:spLocks noGrp="1"/>
+          </p:cNvSpPr>
+          <p:nvPr>
+            <p:ph type="sldNum" sz="quarter" idx="4294967295"/>
+          </p:nvPr>
+        </p:nvSpPr>
+        <p:spPr>
+          <a:xfrm>
+            <a:off x="27432" y="91440"/>
+            <a:ext cx="585216" cy="475488"/>
+          </a:xfrm>
+          <a:prstGeom prst="rect">
+            <a:avLst/>
+          </a:prstGeom>
+          <a:extLst>
+            <a:ext uri="{C572A759-6A51-4108-AA02-DFA0A04FC94B}">
+              <ma14:wrappingTextBoxFlag xmlns:ma14="http://schemas.microsoft.com/office/mac/drawingml/2011/main" val="0"/>
+            </a:ext>
+          </a:extLst>
+        </p:spPr>
+        <p:txBody>
+          <a:bodyPr/>
+          <a:lstStyle>
+            <a:lvl1pPr>
+              <a:defRPr sz="2000">
+                <a:solidFill>
+                  <a:srgbClr val="FFFFFF"/>
+                </a:solidFill>
+                <a:latin typeface="Calibri"/>
+                <a:ea typeface="Calibri"/>
+                <a:cs typeface="Calibri"/>
+              </a:defRPr>
+            </a:lvl1pPr>
+          </a:lstStyle>
+          <a:p>
+            <a:pPr algn="ctr"/>
+            <a:fld id="{F7021451-1387-4CA6-816F-3879F97B5CBC}" type="slidenum">
+              <a:rPr b="1" lang="en-US"/>
+              <a:t>5</a:t>
+            </a:fld>
+            <a:endParaRPr lang="en-US"/>
+          </a:p>
+        </p:txBody>
+      </p:sp>
+    </p:spTree>
+  </p:cSld>
+  <p:clrMapOvr>
+    <a:masterClrMapping/>
+  </p:clrMapOvr>
+</p:sld>
+</file>
+
+<file path=ppt/slides/slide50.xml><?xml version="1.0" encoding="utf-8"?>
+<p:sld xmlns:a="http://schemas.openxmlformats.org/drawingml/2006/main" xmlns:r="http://schemas.openxmlformats.org/officeDocument/2006/relationships" xmlns:p="http://schemas.openxmlformats.org/presentationml/2006/main">
+  <p:cSld name="Slide 50">
+    <p:spTree>
+      <p:nvGrpSpPr>
+        <p:cNvPr id="1" name=""/>
+        <p:cNvGrpSpPr/>
+        <p:nvPr/>
+      </p:nvGrpSpPr>
+      <p:grpSpPr>
+        <a:xfrm>
+          <a:off x="0" y="0"/>
+          <a:ext cx="0" cy="0"/>
+          <a:chOff x="0" y="0"/>
+          <a:chExt cx="0" cy="0"/>
+        </a:xfrm>
+      </p:grpSpPr>
+      <p:sp>
+        <p:nvSpPr>
+          <p:cNvPr id="2" name="Text 0"/>
+          <p:cNvSpPr/>
+          <p:nvPr/>
+        </p:nvSpPr>
+        <p:spPr>
+          <a:xfrm>
+            <a:off x="457200" y="713232"/>
+            <a:ext cx="11368735" cy="274320"/>
+          </a:xfrm>
+          <a:prstGeom prst="rect">
+            <a:avLst/>
+          </a:prstGeom>
+          <a:noFill/>
+          <a:ln/>
+        </p:spPr>
+        <p:txBody>
+          <a:bodyPr wrap="square" lIns="0" tIns="0" rIns="0" bIns="0" rtlCol="0" anchor="ctr"/>
+          <a:lstStyle/>
+          <a:p>
+            <a:pPr algn="r" indent="0" marL="0">
+              <a:buNone/>
+            </a:pPr>
+            <a:r>
+              <a:rPr lang="en-US" sz="1400" b="1" dirty="0">
+                <a:solidFill>
+                  <a:srgbClr val="1C3F6E"/>
+                </a:solidFill>
+                <a:latin typeface="Calibri" pitchFamily="34" charset="0"/>
+                <a:ea typeface="Calibri" pitchFamily="34" charset="-122"/>
+                <a:cs typeface="Calibri" pitchFamily="34" charset="-120"/>
+              </a:rPr>
+              <a:t>REMEDIATION</a:t>
+            </a:r>
+            <a:endParaRPr lang="en-US" sz="1400" dirty="0"/>
+          </a:p>
+        </p:txBody>
+      </p:sp>
+      <p:pic>
+        <p:nvPicPr>
+          <p:cNvPr id="3" name="Image 0" descr="/home/claude/f4/img/minesec_sheet.png">    </p:cNvPr>
+          <p:cNvPicPr>
+            <a:picLocks noChangeAspect="1"/>
+          </p:cNvPicPr>
+          <p:nvPr/>
+        </p:nvPicPr>
+        <p:blipFill>
+          <a:blip r:embed="rId1"/>
+          <a:stretch>
+            <a:fillRect/>
+          </a:stretch>
+        </p:blipFill>
+        <p:spPr>
+          <a:xfrm>
+            <a:off x="0" y="658368"/>
+            <a:ext cx="5120640" cy="5833872"/>
+          </a:xfrm>
+          <a:prstGeom prst="rect">
+            <a:avLst/>
+          </a:prstGeom>
+        </p:spPr>
+      </p:pic>
+      <p:sp>
+        <p:nvSpPr>
+          <p:cNvPr id="4" name="Text 1"/>
+          <p:cNvSpPr/>
+          <p:nvPr/>
+        </p:nvSpPr>
+        <p:spPr>
+          <a:xfrm>
+            <a:off x="5349240" y="1005840"/>
+            <a:ext cx="6522415" cy="731520"/>
+          </a:xfrm>
+          <a:prstGeom prst="rect">
+            <a:avLst/>
+          </a:prstGeom>
+          <a:noFill/>
+          <a:ln/>
+        </p:spPr>
+        <p:txBody>
+          <a:bodyPr wrap="square" lIns="0" tIns="0" rIns="0" bIns="0" rtlCol="0" anchor="ctr">
+            <a:normAutofit/>
+          </a:bodyPr>
+          <a:lstStyle/>
+          <a:p>
+            <a:pPr algn="ctr" indent="0" marL="0">
+              <a:buNone/>
+            </a:pPr>
+            <a:r>
+              <a:rPr lang="en-US" sz="3600" b="1" dirty="0">
+                <a:solidFill>
+                  <a:srgbClr val="990011"/>
+                </a:solidFill>
+                <a:latin typeface="Times New Roman" pitchFamily="34" charset="0"/>
+                <a:ea typeface="Times New Roman" pitchFamily="34" charset="-122"/>
+                <a:cs typeface="Times New Roman" pitchFamily="34" charset="-120"/>
+              </a:rPr>
+              <a:t>Remediation</a:t>
+            </a:r>
+            <a:endParaRPr lang="en-US" sz="3600" dirty="0"/>
+          </a:p>
+        </p:txBody>
+      </p:sp>
+      <p:sp>
+        <p:nvSpPr>
+          <p:cNvPr id="5" name="Text 2"/>
+          <p:cNvSpPr/>
+          <p:nvPr/>
+        </p:nvSpPr>
+        <p:spPr>
+          <a:xfrm>
+            <a:off x="5349240" y="1783080"/>
+            <a:ext cx="6522415" cy="4663440"/>
+          </a:xfrm>
+          <a:prstGeom prst="rect">
+            <a:avLst/>
+          </a:prstGeom>
+          <a:noFill/>
+          <a:ln/>
+        </p:spPr>
+        <p:txBody>
+          <a:bodyPr wrap="square" lIns="0" tIns="0" rIns="0" bIns="0" rtlCol="0" anchor="t"/>
+          <a:lstStyle/>
+          <a:p>
+            <a:pPr algn="l" indent="0" marL="0">
+              <a:spcAft>
+                <a:spcPts val="800"/>
+              </a:spcAft>
+              <a:buNone/>
+            </a:pPr>
+            <a:r>
+              <a:rPr lang="en-US" sz="4000" b="1" dirty="0">
+                <a:solidFill>
+                  <a:srgbClr val="111111"/>
+                </a:solidFill>
+                <a:latin typeface="Times New Roman" pitchFamily="34" charset="0"/>
+                <a:ea typeface="Times New Roman" pitchFamily="34" charset="-122"/>
+                <a:cs typeface="Times New Roman" pitchFamily="34" charset="-120"/>
+              </a:rPr>
+              <a:t>Fill in the blanks:</a:t>
+            </a:r>
+            <a:endParaRPr lang="en-US" sz="4000" dirty="0"/>
+          </a:p>
+          <a:p>
+            <a:pPr algn="l" marL="342900" indent="-342900">
+              <a:spcAft>
+                <a:spcPts val="800"/>
+              </a:spcAft>
+              <a:buSzPct val="100000"/>
+              <a:buFont typeface="+mj-lt"/>
+              <a:buAutoNum type="arabicPeriod" startAt="1"/>
+            </a:pPr>
+            <a:r>
+              <a:rPr lang="en-US" sz="4000" dirty="0">
+                <a:solidFill>
+                  <a:srgbClr val="111111"/>
+                </a:solidFill>
+                <a:latin typeface="Times New Roman" pitchFamily="34" charset="0"/>
+                <a:ea typeface="Times New Roman" pitchFamily="34" charset="-122"/>
+                <a:cs typeface="Times New Roman" pitchFamily="34" charset="-120"/>
+              </a:rPr>
+              <a:t>Only about ______ % of the Earth's water is fresh.</a:t>
+            </a:r>
+            <a:endParaRPr lang="en-US" sz="4000" dirty="0"/>
+          </a:p>
+          <a:p>
+            <a:pPr algn="l" marL="342900" indent="-342900">
+              <a:spcAft>
+                <a:spcPts val="800"/>
+              </a:spcAft>
+              <a:buSzPct val="100000"/>
+              <a:buFont typeface="+mj-lt"/>
+              <a:buAutoNum type="arabicPeriod" startAt="1"/>
+            </a:pPr>
+            <a:r>
+              <a:rPr lang="en-US" sz="4000" dirty="0">
+                <a:solidFill>
+                  <a:srgbClr val="111111"/>
+                </a:solidFill>
+                <a:latin typeface="Times New Roman" pitchFamily="34" charset="0"/>
+                <a:ea typeface="Times New Roman" pitchFamily="34" charset="-122"/>
+                <a:cs typeface="Times New Roman" pitchFamily="34" charset="-120"/>
+              </a:rPr>
+              <a:t>A deep well dug with machines is a ______.</a:t>
+            </a:r>
+            <a:endParaRPr lang="en-US" sz="4000" dirty="0"/>
+          </a:p>
+          <a:p>
+            <a:pPr algn="l" marL="342900" indent="-342900">
+              <a:spcAft>
+                <a:spcPts val="800"/>
+              </a:spcAft>
+              <a:buSzPct val="100000"/>
+              <a:buFont typeface="+mj-lt"/>
+              <a:buAutoNum type="arabicPeriod" startAt="1"/>
+            </a:pPr>
+            <a:r>
+              <a:rPr lang="en-US" sz="4000" dirty="0">
+                <a:solidFill>
+                  <a:srgbClr val="111111"/>
+                </a:solidFill>
+                <a:latin typeface="Times New Roman" pitchFamily="34" charset="0"/>
+                <a:ea typeface="Times New Roman" pitchFamily="34" charset="-122"/>
+                <a:cs typeface="Times New Roman" pitchFamily="34" charset="-120"/>
+              </a:rPr>
+              <a:t>Dirty water causes ______.</a:t>
+            </a:r>
+            <a:endParaRPr lang="en-US" sz="4000" dirty="0"/>
+          </a:p>
+        </p:txBody>
+      </p:sp>
+      <p:sp>
+        <p:nvSpPr>
+          <p:cNvPr id="25" name="Slide Number Placeholder 0"/>
+          <p:cNvSpPr>
+            <a:spLocks noGrp="1"/>
+          </p:cNvSpPr>
+          <p:nvPr>
+            <p:ph type="sldNum" sz="quarter" idx="4294967295"/>
+          </p:nvPr>
+        </p:nvSpPr>
+        <p:spPr>
+          <a:xfrm>
+            <a:off x="27432" y="91440"/>
+            <a:ext cx="585216" cy="475488"/>
+          </a:xfrm>
+          <a:prstGeom prst="rect">
+            <a:avLst/>
+          </a:prstGeom>
+          <a:extLst>
+            <a:ext uri="{C572A759-6A51-4108-AA02-DFA0A04FC94B}">
+              <ma14:wrappingTextBoxFlag xmlns:ma14="http://schemas.microsoft.com/office/mac/drawingml/2011/main" val="0"/>
+            </a:ext>
+          </a:extLst>
+        </p:spPr>
+        <p:txBody>
+          <a:bodyPr/>
+          <a:lstStyle>
+            <a:lvl1pPr>
+              <a:defRPr sz="2000">
+                <a:solidFill>
+                  <a:srgbClr val="FFFFFF"/>
+                </a:solidFill>
+                <a:latin typeface="Calibri"/>
+                <a:ea typeface="Calibri"/>
+                <a:cs typeface="Calibri"/>
+              </a:defRPr>
+            </a:lvl1pPr>
+          </a:lstStyle>
+          <a:p>
+            <a:pPr algn="ctr"/>
+            <a:fld id="{F7021451-1387-4CA6-816F-3879F97B5CBC}" type="slidenum">
+              <a:rPr b="1" lang="en-US"/>
+              <a:t>50</a:t>
+            </a:fld>
+            <a:endParaRPr lang="en-US"/>
+          </a:p>
+        </p:txBody>
+      </p:sp>
+    </p:spTree>
+  </p:cSld>
+  <p:clrMapOvr>
+    <a:masterClrMapping/>
+  </p:clrMapOvr>
+</p:sld>
+</file>
+
+<file path=ppt/slides/slide51.xml><?xml version="1.0" encoding="utf-8"?>
+<p:sld xmlns:a="http://schemas.openxmlformats.org/drawingml/2006/main" xmlns:r="http://schemas.openxmlformats.org/officeDocument/2006/relationships" xmlns:p="http://schemas.openxmlformats.org/presentationml/2006/main">
+  <p:cSld name="Slide 51">
+    <p:spTree>
+      <p:nvGrpSpPr>
+        <p:cNvPr id="1" name=""/>
+        <p:cNvGrpSpPr/>
+        <p:nvPr/>
+      </p:nvGrpSpPr>
+      <p:grpSpPr>
+        <a:xfrm>
+          <a:off x="0" y="0"/>
+          <a:ext cx="0" cy="0"/>
+          <a:chOff x="0" y="0"/>
+          <a:chExt cx="0" cy="0"/>
+        </a:xfrm>
+      </p:grpSpPr>
+      <p:sp>
+        <p:nvSpPr>
+          <p:cNvPr id="2" name="Text 0"/>
+          <p:cNvSpPr/>
+          <p:nvPr/>
+        </p:nvSpPr>
+        <p:spPr>
+          <a:xfrm>
+            <a:off x="457200" y="713232"/>
+            <a:ext cx="11368735" cy="274320"/>
+          </a:xfrm>
+          <a:prstGeom prst="rect">
+            <a:avLst/>
+          </a:prstGeom>
+          <a:noFill/>
+          <a:ln/>
+        </p:spPr>
+        <p:txBody>
+          <a:bodyPr wrap="square" lIns="0" tIns="0" rIns="0" bIns="0" rtlCol="0" anchor="ctr"/>
+          <a:lstStyle/>
+          <a:p>
+            <a:pPr algn="r" indent="0" marL="0">
+              <a:buNone/>
+            </a:pPr>
+            <a:r>
+              <a:rPr lang="en-US" sz="1400" b="1" dirty="0">
+                <a:solidFill>
+                  <a:srgbClr val="1C3F6E"/>
+                </a:solidFill>
+                <a:latin typeface="Calibri" pitchFamily="34" charset="0"/>
+                <a:ea typeface="Calibri" pitchFamily="34" charset="-122"/>
+                <a:cs typeface="Calibri" pitchFamily="34" charset="-120"/>
+              </a:rPr>
+              <a:t>HOMEWORK</a:t>
+            </a:r>
+            <a:endParaRPr lang="en-US" sz="1400" dirty="0"/>
+          </a:p>
+        </p:txBody>
+      </p:sp>
+      <p:pic>
+        <p:nvPicPr>
+          <p:cNvPr id="3" name="Image 0" descr="/home/claude/f4/img/minesec_sheet.png">    </p:cNvPr>
+          <p:cNvPicPr>
+            <a:picLocks noChangeAspect="1"/>
+          </p:cNvPicPr>
+          <p:nvPr/>
+        </p:nvPicPr>
+        <p:blipFill>
+          <a:blip r:embed="rId1"/>
+          <a:stretch>
+            <a:fillRect/>
+          </a:stretch>
+        </p:blipFill>
+        <p:spPr>
+          <a:xfrm>
+            <a:off x="0" y="658368"/>
+            <a:ext cx="5120640" cy="5833872"/>
+          </a:xfrm>
+          <a:prstGeom prst="rect">
+            <a:avLst/>
+          </a:prstGeom>
+        </p:spPr>
+      </p:pic>
+      <p:sp>
+        <p:nvSpPr>
+          <p:cNvPr id="4" name="Text 1"/>
+          <p:cNvSpPr/>
+          <p:nvPr/>
+        </p:nvSpPr>
+        <p:spPr>
+          <a:xfrm>
+            <a:off x="5349240" y="1005840"/>
+            <a:ext cx="6522415" cy="731520"/>
+          </a:xfrm>
+          <a:prstGeom prst="rect">
+            <a:avLst/>
+          </a:prstGeom>
+          <a:noFill/>
+          <a:ln/>
+        </p:spPr>
+        <p:txBody>
+          <a:bodyPr wrap="square" lIns="0" tIns="0" rIns="0" bIns="0" rtlCol="0" anchor="ctr">
+            <a:normAutofit/>
+          </a:bodyPr>
+          <a:lstStyle/>
+          <a:p>
+            <a:pPr algn="ctr" indent="0" marL="0">
+              <a:buNone/>
+            </a:pPr>
+            <a:r>
+              <a:rPr lang="en-US" sz="3600" b="1" dirty="0">
+                <a:solidFill>
+                  <a:srgbClr val="990011"/>
+                </a:solidFill>
+                <a:latin typeface="Times New Roman" pitchFamily="34" charset="0"/>
+                <a:ea typeface="Times New Roman" pitchFamily="34" charset="-122"/>
+                <a:cs typeface="Times New Roman" pitchFamily="34" charset="-120"/>
+              </a:rPr>
+              <a:t>Homework</a:t>
+            </a:r>
+            <a:endParaRPr lang="en-US" sz="3600" dirty="0"/>
+          </a:p>
+        </p:txBody>
+      </p:sp>
+      <p:sp>
+        <p:nvSpPr>
+          <p:cNvPr id="5" name="Text 2"/>
+          <p:cNvSpPr/>
+          <p:nvPr/>
+        </p:nvSpPr>
+        <p:spPr>
+          <a:xfrm>
+            <a:off x="5349240" y="1783080"/>
+            <a:ext cx="6522415" cy="4663440"/>
+          </a:xfrm>
+          <a:prstGeom prst="rect">
+            <a:avLst/>
+          </a:prstGeom>
+          <a:noFill/>
+          <a:ln/>
+        </p:spPr>
+        <p:txBody>
+          <a:bodyPr wrap="square" lIns="0" tIns="0" rIns="0" bIns="0" rtlCol="0" anchor="t"/>
+          <a:lstStyle/>
+          <a:p>
+            <a:pPr algn="l" indent="0" marL="0">
+              <a:spcAft>
+                <a:spcPts val="800"/>
+              </a:spcAft>
+              <a:buNone/>
+            </a:pPr>
+            <a:r>
+              <a:rPr lang="en-US" sz="4000" dirty="0">
+                <a:solidFill>
+                  <a:srgbClr val="111111"/>
+                </a:solidFill>
+                <a:latin typeface="Times New Roman" pitchFamily="34" charset="0"/>
+                <a:ea typeface="Times New Roman" pitchFamily="34" charset="-122"/>
+                <a:cs typeface="Times New Roman" pitchFamily="34" charset="-120"/>
+              </a:rPr>
+              <a:t>Carry out a small enquiry: ask three families where they get water and what problems they have.</a:t>
+            </a:r>
+            <a:endParaRPr lang="en-US" sz="4000" dirty="0"/>
+          </a:p>
+        </p:txBody>
+      </p:sp>
+      <p:sp>
+        <p:nvSpPr>
+          <p:cNvPr id="25" name="Slide Number Placeholder 0"/>
+          <p:cNvSpPr>
+            <a:spLocks noGrp="1"/>
+          </p:cNvSpPr>
+          <p:nvPr>
+            <p:ph type="sldNum" sz="quarter" idx="4294967295"/>
+          </p:nvPr>
+        </p:nvSpPr>
+        <p:spPr>
+          <a:xfrm>
+            <a:off x="27432" y="91440"/>
+            <a:ext cx="585216" cy="475488"/>
+          </a:xfrm>
+          <a:prstGeom prst="rect">
+            <a:avLst/>
+          </a:prstGeom>
+          <a:extLst>
+            <a:ext uri="{C572A759-6A51-4108-AA02-DFA0A04FC94B}">
+              <ma14:wrappingTextBoxFlag xmlns:ma14="http://schemas.microsoft.com/office/mac/drawingml/2011/main" val="0"/>
+            </a:ext>
+          </a:extLst>
+        </p:spPr>
+        <p:txBody>
+          <a:bodyPr/>
+          <a:lstStyle>
+            <a:lvl1pPr>
+              <a:defRPr sz="2000">
+                <a:solidFill>
+                  <a:srgbClr val="FFFFFF"/>
+                </a:solidFill>
+                <a:latin typeface="Calibri"/>
+                <a:ea typeface="Calibri"/>
+                <a:cs typeface="Calibri"/>
+              </a:defRPr>
+            </a:lvl1pPr>
+          </a:lstStyle>
+          <a:p>
+            <a:pPr algn="ctr"/>
+            <a:fld id="{F7021451-1387-4CA6-816F-3879F97B5CBC}" type="slidenum">
+              <a:rPr b="1" lang="en-US"/>
+              <a:t>51</a:t>
+            </a:fld>
+            <a:endParaRPr lang="en-US"/>
+          </a:p>
+        </p:txBody>
+      </p:sp>
+    </p:spTree>
+  </p:cSld>
+  <p:clrMapOvr>
+    <a:masterClrMapping/>
+  </p:clrMapOvr>
+</p:sld>
+</file>
+
+<file path=ppt/slides/slide52.xml><?xml version="1.0" encoding="utf-8"?>
+<p:sld xmlns:a="http://schemas.openxmlformats.org/drawingml/2006/main" xmlns:r="http://schemas.openxmlformats.org/officeDocument/2006/relationships" xmlns:p="http://schemas.openxmlformats.org/presentationml/2006/main">
+  <p:cSld name="Slide 52">
+    <p:spTree>
+      <p:nvGrpSpPr>
+        <p:cNvPr id="1" name=""/>
+        <p:cNvGrpSpPr/>
+        <p:nvPr/>
+      </p:nvGrpSpPr>
+      <p:grpSpPr>
+        <a:xfrm>
+          <a:off x="0" y="0"/>
+          <a:ext cx="0" cy="0"/>
+          <a:chOff x="0" y="0"/>
+          <a:chExt cx="0" cy="0"/>
+        </a:xfrm>
+      </p:grpSpPr>
+      <p:sp>
+        <p:nvSpPr>
+          <p:cNvPr id="2" name="Text 0"/>
+          <p:cNvSpPr/>
+          <p:nvPr/>
+        </p:nvSpPr>
+        <p:spPr>
+          <a:xfrm>
+            <a:off x="457200" y="713232"/>
+            <a:ext cx="11368735" cy="274320"/>
+          </a:xfrm>
+          <a:prstGeom prst="rect">
+            <a:avLst/>
+          </a:prstGeom>
+          <a:noFill/>
+          <a:ln/>
+        </p:spPr>
+        <p:txBody>
+          <a:bodyPr wrap="square" lIns="0" tIns="0" rIns="0" bIns="0" rtlCol="0" anchor="ctr"/>
+          <a:lstStyle/>
+          <a:p>
+            <a:pPr algn="r" indent="0" marL="0">
+              <a:buNone/>
+            </a:pPr>
+            <a:r>
+              <a:rPr lang="en-US" sz="1400" b="1" dirty="0">
+                <a:solidFill>
+                  <a:srgbClr val="1C3F6E"/>
+                </a:solidFill>
+                <a:latin typeface="Calibri" pitchFamily="34" charset="0"/>
+                <a:ea typeface="Calibri" pitchFamily="34" charset="-122"/>
+                <a:cs typeface="Calibri" pitchFamily="34" charset="-120"/>
+              </a:rPr>
+              <a:t>NEXT LESSON</a:t>
+            </a:r>
+            <a:endParaRPr lang="en-US" sz="1400" dirty="0"/>
+          </a:p>
+        </p:txBody>
+      </p:sp>
+      <p:pic>
+        <p:nvPicPr>
+          <p:cNvPr id="3" name="Image 0" descr="/home/claude/f4/img/minesec_sheet.png">    </p:cNvPr>
+          <p:cNvPicPr>
+            <a:picLocks noChangeAspect="1"/>
+          </p:cNvPicPr>
+          <p:nvPr/>
+        </p:nvPicPr>
+        <p:blipFill>
+          <a:blip r:embed="rId1"/>
+          <a:stretch>
+            <a:fillRect/>
+          </a:stretch>
+        </p:blipFill>
+        <p:spPr>
+          <a:xfrm>
+            <a:off x="0" y="658368"/>
+            <a:ext cx="5120640" cy="5833872"/>
+          </a:xfrm>
+          <a:prstGeom prst="rect">
+            <a:avLst/>
+          </a:prstGeom>
+        </p:spPr>
+      </p:pic>
+      <p:sp>
+        <p:nvSpPr>
+          <p:cNvPr id="4" name="Text 1"/>
+          <p:cNvSpPr/>
+          <p:nvPr/>
+        </p:nvSpPr>
+        <p:spPr>
+          <a:xfrm>
+            <a:off x="5349240" y="1005840"/>
+            <a:ext cx="6522415" cy="731520"/>
+          </a:xfrm>
+          <a:prstGeom prst="rect">
+            <a:avLst/>
+          </a:prstGeom>
+          <a:noFill/>
+          <a:ln/>
+        </p:spPr>
+        <p:txBody>
+          <a:bodyPr wrap="square" lIns="0" tIns="0" rIns="0" bIns="0" rtlCol="0" anchor="ctr">
+            <a:normAutofit/>
+          </a:bodyPr>
+          <a:lstStyle/>
+          <a:p>
+            <a:pPr algn="ctr" indent="0" marL="0">
+              <a:buNone/>
+            </a:pPr>
+            <a:r>
+              <a:rPr lang="en-US" sz="3600" b="1" dirty="0">
+                <a:solidFill>
+                  <a:srgbClr val="990011"/>
+                </a:solidFill>
+                <a:latin typeface="Times New Roman" pitchFamily="34" charset="0"/>
+                <a:ea typeface="Times New Roman" pitchFamily="34" charset="-122"/>
+                <a:cs typeface="Times New Roman" pitchFamily="34" charset="-120"/>
+              </a:rPr>
+              <a:t>Next Lesson</a:t>
+            </a:r>
+            <a:endParaRPr lang="en-US" sz="3600" dirty="0"/>
+          </a:p>
+        </p:txBody>
+      </p:sp>
+      <p:sp>
+        <p:nvSpPr>
+          <p:cNvPr id="5" name="Text 2"/>
+          <p:cNvSpPr/>
+          <p:nvPr/>
+        </p:nvSpPr>
+        <p:spPr>
+          <a:xfrm>
+            <a:off x="5349240" y="1783080"/>
+            <a:ext cx="6522415" cy="4663440"/>
+          </a:xfrm>
+          <a:prstGeom prst="rect">
+            <a:avLst/>
+          </a:prstGeom>
+          <a:noFill/>
+          <a:ln/>
+        </p:spPr>
+        <p:txBody>
+          <a:bodyPr wrap="square" lIns="0" tIns="0" rIns="0" bIns="0" rtlCol="0" anchor="ctr"/>
+          <a:lstStyle/>
+          <a:p>
+            <a:pPr algn="ctr" indent="0" marL="0">
+              <a:spcAft>
+                <a:spcPts val="800"/>
+              </a:spcAft>
+              <a:buNone/>
+            </a:pPr>
+            <a:r>
+              <a:rPr lang="en-US" sz="4000" b="1" dirty="0">
+                <a:solidFill>
+                  <a:srgbClr val="111111"/>
+                </a:solidFill>
+                <a:latin typeface="Times New Roman" pitchFamily="34" charset="0"/>
+                <a:ea typeface="Times New Roman" pitchFamily="34" charset="-122"/>
+                <a:cs typeface="Times New Roman" pitchFamily="34" charset="-120"/>
+              </a:rPr>
+              <a:t>Our next lesson will be on:</a:t>
+            </a:r>
+            <a:endParaRPr lang="en-US" sz="4000" dirty="0"/>
+          </a:p>
+          <a:p>
+            <a:pPr algn="ctr" indent="0" marL="0">
+              <a:spcAft>
+                <a:spcPts val="800"/>
+              </a:spcAft>
+              <a:buNone/>
+            </a:pPr>
+            <a:r>
+              <a:rPr lang="en-US" sz="4000" b="1" dirty="0">
+                <a:solidFill>
+                  <a:srgbClr val="990011"/>
+                </a:solidFill>
+                <a:latin typeface="Times New Roman" pitchFamily="34" charset="0"/>
+                <a:ea typeface="Times New Roman" pitchFamily="34" charset="-122"/>
+                <a:cs typeface="Times New Roman" pitchFamily="34" charset="-120"/>
+              </a:rPr>
+              <a:t>Lesson 6: Country Sides in Africa</a:t>
+            </a:r>
+            <a:endParaRPr lang="en-US" sz="4000" dirty="0"/>
+          </a:p>
+        </p:txBody>
+      </p:sp>
+      <p:sp>
+        <p:nvSpPr>
+          <p:cNvPr id="25" name="Slide Number Placeholder 0"/>
+          <p:cNvSpPr>
+            <a:spLocks noGrp="1"/>
+          </p:cNvSpPr>
+          <p:nvPr>
+            <p:ph type="sldNum" sz="quarter" idx="4294967295"/>
+          </p:nvPr>
+        </p:nvSpPr>
+        <p:spPr>
+          <a:xfrm>
+            <a:off x="27432" y="91440"/>
+            <a:ext cx="585216" cy="475488"/>
+          </a:xfrm>
+          <a:prstGeom prst="rect">
+            <a:avLst/>
+          </a:prstGeom>
+          <a:extLst>
+            <a:ext uri="{C572A759-6A51-4108-AA02-DFA0A04FC94B}">
+              <ma14:wrappingTextBoxFlag xmlns:ma14="http://schemas.microsoft.com/office/mac/drawingml/2011/main" val="0"/>
+            </a:ext>
+          </a:extLst>
+        </p:spPr>
+        <p:txBody>
+          <a:bodyPr/>
+          <a:lstStyle>
+            <a:lvl1pPr>
+              <a:defRPr sz="2000">
+                <a:solidFill>
+                  <a:srgbClr val="FFFFFF"/>
+                </a:solidFill>
+                <a:latin typeface="Calibri"/>
+                <a:ea typeface="Calibri"/>
+                <a:cs typeface="Calibri"/>
+              </a:defRPr>
+            </a:lvl1pPr>
+          </a:lstStyle>
+          <a:p>
+            <a:pPr algn="ctr"/>
+            <a:fld id="{F7021451-1387-4CA6-816F-3879F97B5CBC}" type="slidenum">
+              <a:rPr b="1" lang="en-US"/>
+              <a:t>52</a:t>
+            </a:fld>
+            <a:endParaRPr lang="en-US"/>
+          </a:p>
+        </p:txBody>
+      </p:sp>
+    </p:spTree>
+  </p:cSld>
+  <p:clrMapOvr>
+    <a:masterClrMapping/>
+  </p:clrMapOvr>
+</p:sld>
+</file>
+
+<file path=ppt/slides/slide53.xml><?xml version="1.0" encoding="utf-8"?>
+<p:sld xmlns:a="http://schemas.openxmlformats.org/drawingml/2006/main" xmlns:r="http://schemas.openxmlformats.org/officeDocument/2006/relationships" xmlns:p="http://schemas.openxmlformats.org/presentationml/2006/main">
+  <p:cSld name="Slide 53">
+    <p:spTree>
+      <p:nvGrpSpPr>
+        <p:cNvPr id="1" name=""/>
+        <p:cNvGrpSpPr/>
+        <p:nvPr/>
+      </p:nvGrpSpPr>
+      <p:grpSpPr>
+        <a:xfrm>
+          <a:off x="0" y="0"/>
+          <a:ext cx="0" cy="0"/>
+          <a:chOff x="0" y="0"/>
+          <a:chExt cx="0" cy="0"/>
+        </a:xfrm>
+      </p:grpSpPr>
+      <p:sp>
+        <p:nvSpPr>
+          <p:cNvPr id="2" name="Text 0"/>
+          <p:cNvSpPr/>
+          <p:nvPr/>
+        </p:nvSpPr>
+        <p:spPr>
+          <a:xfrm>
+            <a:off x="457200" y="713232"/>
+            <a:ext cx="11368735" cy="274320"/>
+          </a:xfrm>
+          <a:prstGeom prst="rect">
+            <a:avLst/>
+          </a:prstGeom>
+          <a:noFill/>
+          <a:ln/>
+        </p:spPr>
+        <p:txBody>
+          <a:bodyPr wrap="square" lIns="0" tIns="0" rIns="0" bIns="0" rtlCol="0" anchor="ctr"/>
+          <a:lstStyle/>
+          <a:p>
+            <a:pPr algn="r" indent="0" marL="0">
+              <a:buNone/>
+            </a:pPr>
+            <a:r>
+              <a:rPr lang="en-US" sz="1400" b="1" dirty="0">
+                <a:solidFill>
+                  <a:srgbClr val="1C3F6E"/>
+                </a:solidFill>
+                <a:latin typeface="Calibri" pitchFamily="34" charset="0"/>
+                <a:ea typeface="Calibri" pitchFamily="34" charset="-122"/>
+                <a:cs typeface="Calibri" pitchFamily="34" charset="-120"/>
+              </a:rPr>
               <a:t>BILINGUAL GAME</a:t>
             </a:r>
             <a:endParaRPr lang="en-US" sz="1400" dirty="0"/>
@@ -16674,7 +19117,7 @@
       </p:sp>
       <p:graphicFrame>
         <p:nvGraphicFramePr>
-          <p:cNvPr id="48" name="Table 0"/>
+          <p:cNvPr id="54" name="Table 0"/>
           <p:cNvGraphicFramePr>
             <a:graphicFrameLocks noGrp="1"/>
           </p:cNvGraphicFramePr>
@@ -17710,7 +20153,7 @@
             <a:pPr algn="ctr"/>
             <a:fld id="{F7021451-1387-4CA6-816F-3879F97B5CBC}" type="slidenum">
               <a:rPr b="1" lang="en-US"/>
-              <a:t>47</a:t>
+              <a:t>53</a:t>
             </a:fld>
             <a:endParaRPr lang="en-US"/>
           </a:p>
@@ -17724,9 +20167,9 @@
 </p:sld>
 </file>
 
-<file path=ppt/slides/slide48.xml><?xml version="1.0" encoding="utf-8"?>
+<file path=ppt/slides/slide54.xml><?xml version="1.0" encoding="utf-8"?>
 <p:sld xmlns:a="http://schemas.openxmlformats.org/drawingml/2006/main" xmlns:r="http://schemas.openxmlformats.org/officeDocument/2006/relationships" xmlns:p="http://schemas.openxmlformats.org/presentationml/2006/main">
-  <p:cSld name="Slide 48">
+  <p:cSld name="Slide 54">
     <p:spTree>
       <p:nvGrpSpPr>
         <p:cNvPr id="1" name=""/>
@@ -17821,7 +20264,7 @@
       </p:sp>
       <p:graphicFrame>
         <p:nvGraphicFramePr>
-          <p:cNvPr id="49" name="Table 0"/>
+          <p:cNvPr id="55" name="Table 0"/>
           <p:cNvGraphicFramePr>
             <a:graphicFrameLocks noGrp="1"/>
           </p:cNvGraphicFramePr>
@@ -18207,7 +20650,7 @@
                           <a:ea typeface="Calibri" pitchFamily="34" charset="-122"/>
                           <a:cs typeface="Calibri" pitchFamily="34" charset="-120"/>
                         </a:rPr>
-                        <a:t>Define water scarcity. Describe the problems of quantity and quality of water. Propose ways to manage and use water well.</a:t>
+                        <a:t>Define water scarcity. Describe the problems of quantity and quality of water and its uses. Propose ways to manage water well.</a:t>
                       </a:r>
                       <a:endParaRPr lang="en-US" sz="1600" dirty="0">
                         <a:latin typeface="Calibri" charset="0"/>
@@ -18443,7 +20886,7 @@
             <a:pPr algn="ctr"/>
             <a:fld id="{F7021451-1387-4CA6-816F-3879F97B5CBC}" type="slidenum">
               <a:rPr b="1" lang="en-US"/>
-              <a:t>48</a:t>
+              <a:t>54</a:t>
             </a:fld>
             <a:endParaRPr lang="en-US"/>
           </a:p>
@@ -18457,9 +20900,9 @@
 </p:sld>
 </file>
 
-<file path=ppt/slides/slide49.xml><?xml version="1.0" encoding="utf-8"?>
+<file path=ppt/slides/slide55.xml><?xml version="1.0" encoding="utf-8"?>
 <p:sld xmlns:a="http://schemas.openxmlformats.org/drawingml/2006/main" xmlns:r="http://schemas.openxmlformats.org/officeDocument/2006/relationships" xmlns:p="http://schemas.openxmlformats.org/presentationml/2006/main">
-  <p:cSld name="Slide 49">
+  <p:cSld name="Slide 55">
     <p:spTree>
       <p:nvGrpSpPr>
         <p:cNvPr id="1" name=""/>
@@ -18554,7 +20997,7 @@
       </p:sp>
       <p:graphicFrame>
         <p:nvGraphicFramePr>
-          <p:cNvPr id="50" name="Table 0"/>
+          <p:cNvPr id="56" name="Table 0"/>
           <p:cNvGraphicFramePr>
             <a:graphicFrameLocks noGrp="1"/>
           </p:cNvGraphicFramePr>
@@ -18664,7 +21107,7 @@
                           <a:ea typeface="Calibri" pitchFamily="34" charset="-122"/>
                           <a:cs typeface="Calibri" pitchFamily="34" charset="-120"/>
                         </a:rPr>
-                        <a:t>DEFINITIONS; Quantity and Quality; Uses of Water; Management.</a:t>
+                        <a:t>DEFINITIONS; Quantity of Water; Quality of Water; Uses of Water; Management of Water.</a:t>
                       </a:r>
                       <a:endParaRPr lang="en-US" sz="1600" dirty="0">
                         <a:latin typeface="Calibri" charset="0"/>
@@ -19314,7 +21757,7 @@
             <a:pPr algn="ctr"/>
             <a:fld id="{F7021451-1387-4CA6-816F-3879F97B5CBC}" type="slidenum">
               <a:rPr b="1" lang="en-US"/>
-              <a:t>49</a:t>
+              <a:t>55</a:t>
             </a:fld>
             <a:endParaRPr lang="en-US"/>
           </a:p>
@@ -19328,9 +21771,9 @@
 </p:sld>
 </file>
 
-<file path=ppt/slides/slide5.xml><?xml version="1.0" encoding="utf-8"?>
+<file path=ppt/slides/slide56.xml><?xml version="1.0" encoding="utf-8"?>
 <p:sld xmlns:a="http://schemas.openxmlformats.org/drawingml/2006/main" xmlns:r="http://schemas.openxmlformats.org/officeDocument/2006/relationships" xmlns:p="http://schemas.openxmlformats.org/presentationml/2006/main">
-  <p:cSld name="Slide 5">
+  <p:cSld name="Slide 56">
     <p:spTree>
       <p:nvGrpSpPr>
         <p:cNvPr id="1" name=""/>
@@ -19378,7 +21821,7 @@
                 <a:ea typeface="Calibri" pitchFamily="34" charset="-122"/>
                 <a:cs typeface="Calibri" pitchFamily="34" charset="-120"/>
               </a:rPr>
-              <a:t>HOMEWORK CORRECTION</a:t>
+              <a:t>TEACHER'S NOTE</a:t>
             </a:r>
             <a:endParaRPr lang="en-US" sz="1400" dirty="0"/>
           </a:p>
@@ -19401,7 +21844,7 @@
         <p:spPr>
           <a:xfrm>
             <a:off x="0" y="658368"/>
-            <a:ext cx="5120640" cy="5833872"/>
+            <a:ext cx="3840480" cy="5833872"/>
           </a:xfrm>
           <a:prstGeom prst="rect">
             <a:avLst/>
@@ -19416,8 +21859,8 @@
         </p:nvSpPr>
         <p:spPr>
           <a:xfrm>
-            <a:off x="5349240" y="1005840"/>
-            <a:ext cx="6522415" cy="731520"/>
+            <a:off x="4069080" y="1005840"/>
+            <a:ext cx="7802575" cy="731520"/>
           </a:xfrm>
           <a:prstGeom prst="rect">
             <a:avLst/>
@@ -19443,7 +21886,7 @@
                 <a:ea typeface="Times New Roman" pitchFamily="34" charset="-122"/>
                 <a:cs typeface="Times New Roman" pitchFamily="34" charset="-120"/>
               </a:rPr>
-              <a:t>Correction: Possible Answer</a:t>
+              <a:t>Teacher's Note</a:t>
             </a:r>
             <a:endParaRPr lang="en-US" sz="3600" dirty="0"/>
           </a:p>
@@ -19457,8 +21900,8 @@
         </p:nvSpPr>
         <p:spPr>
           <a:xfrm>
-            <a:off x="5349240" y="1783080"/>
-            <a:ext cx="6522415" cy="4663440"/>
+            <a:off x="4069080" y="1783080"/>
+            <a:ext cx="7802575" cy="4663440"/>
           </a:xfrm>
           <a:prstGeom prst="rect">
             <a:avLst/>
@@ -19470,24 +21913,130 @@
           <a:bodyPr wrap="square" lIns="0" tIns="0" rIns="0" bIns="0" rtlCol="0" anchor="t"/>
           <a:lstStyle/>
           <a:p>
-            <a:pPr algn="l" indent="0" marL="0">
+            <a:pPr algn="l" marL="342900" indent="-342900">
               <a:spcAft>
                 <a:spcPts val="800"/>
               </a:spcAft>
-              <a:buNone/>
+              <a:buSzPct val="100000"/>
+              <a:buChar char="•"/>
             </a:pPr>
             <a:r>
-              <a:rPr lang="en-US" sz="4000" dirty="0">
+              <a:rPr lang="en-US" sz="2000" dirty="0">
                 <a:solidFill>
                   <a:srgbClr val="111111"/>
                 </a:solidFill>
-                <a:latin typeface="Times New Roman" pitchFamily="34" charset="0"/>
-                <a:ea typeface="Times New Roman" pitchFamily="34" charset="-122"/>
-                <a:cs typeface="Times New Roman" pitchFamily="34" charset="-120"/>
+                <a:latin typeface="Calibri" pitchFamily="34" charset="0"/>
+                <a:ea typeface="Calibri" pitchFamily="34" charset="-122"/>
+                <a:cs typeface="Calibri" pitchFamily="34" charset="-120"/>
               </a:rPr>
-              <a:t>They store rainwater in jars, dig wells and use water carefully for cooking, washing and animals.</a:t>
-            </a:r>
-            <a:endParaRPr lang="en-US" sz="4000" dirty="0"/>
+              <a:t>Timing: Homework correction, plan, objectives 8 min | Recall, situation, action 10 min | 5 activities 30 min | Board summary (copying) 30 min | Evaluation, remediation 10 min | Homework, next lesson 5 min | Logbook 7 min</a:t>
+            </a:r>
+            <a:endParaRPr lang="en-US" sz="2000" dirty="0"/>
+          </a:p>
+          <a:p>
+            <a:pPr algn="l" marL="342900" indent="-342900">
+              <a:spcAft>
+                <a:spcPts val="800"/>
+              </a:spcAft>
+              <a:buSzPct val="100000"/>
+              <a:buChar char="•"/>
+            </a:pPr>
+            <a:r>
+              <a:rPr lang="en-US" sz="2000" dirty="0">
+                <a:solidFill>
+                  <a:srgbClr val="111111"/>
+                </a:solidFill>
+                <a:latin typeface="Calibri" pitchFamily="34" charset="0"/>
+                <a:ea typeface="Calibri" pitchFamily="34" charset="-122"/>
+                <a:cs typeface="Calibri" pitchFamily="34" charset="-120"/>
+              </a:rPr>
+              <a:t>Without the projector (Activity 1): ask where families get water.</a:t>
+            </a:r>
+            <a:endParaRPr lang="en-US" sz="2000" dirty="0"/>
+          </a:p>
+          <a:p>
+            <a:pPr algn="l" marL="342900" indent="-342900">
+              <a:spcAft>
+                <a:spcPts val="800"/>
+              </a:spcAft>
+              <a:buSzPct val="100000"/>
+              <a:buChar char="•"/>
+            </a:pPr>
+            <a:r>
+              <a:rPr lang="en-US" sz="2000" dirty="0">
+                <a:solidFill>
+                  <a:srgbClr val="111111"/>
+                </a:solidFill>
+                <a:latin typeface="Calibri" pitchFamily="34" charset="0"/>
+                <a:ea typeface="Calibri" pitchFamily="34" charset="-122"/>
+                <a:cs typeface="Calibri" pitchFamily="34" charset="-120"/>
+              </a:rPr>
+              <a:t>Without the projector (Activity 2): draw a bar of 100 %.</a:t>
+            </a:r>
+            <a:endParaRPr lang="en-US" sz="2000" dirty="0"/>
+          </a:p>
+          <a:p>
+            <a:pPr algn="l" marL="342900" indent="-342900">
+              <a:spcAft>
+                <a:spcPts val="800"/>
+              </a:spcAft>
+              <a:buSzPct val="100000"/>
+              <a:buChar char="•"/>
+            </a:pPr>
+            <a:r>
+              <a:rPr lang="en-US" sz="2000" dirty="0">
+                <a:solidFill>
+                  <a:srgbClr val="111111"/>
+                </a:solidFill>
+                <a:latin typeface="Calibri" pitchFamily="34" charset="0"/>
+                <a:ea typeface="Calibri" pitchFamily="34" charset="-122"/>
+                <a:cs typeface="Calibri" pitchFamily="34" charset="-120"/>
+              </a:rPr>
+              <a:t>Without the projector (Activity 3): describe water sources of the quarter.</a:t>
+            </a:r>
+            <a:endParaRPr lang="en-US" sz="2000" dirty="0"/>
+          </a:p>
+          <a:p>
+            <a:pPr algn="l" marL="342900" indent="-342900">
+              <a:spcAft>
+                <a:spcPts val="800"/>
+              </a:spcAft>
+              <a:buSzPct val="100000"/>
+              <a:buChar char="•"/>
+            </a:pPr>
+            <a:r>
+              <a:rPr lang="en-US" sz="2000" dirty="0">
+                <a:solidFill>
+                  <a:srgbClr val="111111"/>
+                </a:solidFill>
+                <a:latin typeface="Calibri" pitchFamily="34" charset="0"/>
+                <a:ea typeface="Calibri" pitchFamily="34" charset="-122"/>
+                <a:cs typeface="Calibri" pitchFamily="34" charset="-120"/>
+              </a:rPr>
+              <a:t>Without the projector (Activity 4): list uses at home.</a:t>
+            </a:r>
+            <a:endParaRPr lang="en-US" sz="2000" dirty="0"/>
+          </a:p>
+          <a:p>
+            <a:pPr algn="l" marL="342900" indent="-342900">
+              <a:spcAft>
+                <a:spcPts val="800"/>
+              </a:spcAft>
+              <a:buSzPct val="100000"/>
+              <a:buChar char="•"/>
+            </a:pPr>
+            <a:r>
+              <a:rPr lang="en-US" sz="2000" dirty="0">
+                <a:solidFill>
+                  <a:srgbClr val="111111"/>
+                </a:solidFill>
+                <a:latin typeface="Calibri" pitchFamily="34" charset="0"/>
+                <a:ea typeface="Calibri" pitchFamily="34" charset="-122"/>
+                <a:cs typeface="Calibri" pitchFamily="34" charset="-120"/>
+              </a:rPr>
+              <a:t>Without the projector (Activity 5): design a water plan for the school.</a:t>
+            </a:r>
+            <a:endParaRPr lang="en-US" sz="2000" dirty="0"/>
           </a:p>
         </p:txBody>
       </p:sp>
@@ -19533,7 +22082,7 @@
             <a:pPr algn="ctr"/>
             <a:fld id="{F7021451-1387-4CA6-816F-3879F97B5CBC}" type="slidenum">
               <a:rPr b="1" lang="en-US"/>
-              <a:t>5</a:t>
+              <a:t>56</a:t>
             </a:fld>
             <a:endParaRPr lang="en-US"/>
           </a:p>
@@ -19547,9 +22096,9 @@
 </p:sld>
 </file>
 
-<file path=ppt/slides/slide50.xml><?xml version="1.0" encoding="utf-8"?>
+<file path=ppt/slides/slide57.xml><?xml version="1.0" encoding="utf-8"?>
 <p:sld xmlns:a="http://schemas.openxmlformats.org/drawingml/2006/main" xmlns:r="http://schemas.openxmlformats.org/officeDocument/2006/relationships" xmlns:p="http://schemas.openxmlformats.org/presentationml/2006/main">
-  <p:cSld name="Slide 50">
+  <p:cSld name="Slide 57">
     <p:spTree>
       <p:nvGrpSpPr>
         <p:cNvPr id="1" name=""/>
@@ -19597,7 +22146,7 @@
                 <a:ea typeface="Calibri" pitchFamily="34" charset="-122"/>
                 <a:cs typeface="Calibri" pitchFamily="34" charset="-120"/>
               </a:rPr>
-              <a:t>TEACHER'S NOTE</a:t>
+              <a:t>REFERENCES</a:t>
             </a:r>
             <a:endParaRPr lang="en-US" sz="1400" dirty="0"/>
           </a:p>
@@ -19662,7 +22211,7 @@
                 <a:ea typeface="Times New Roman" pitchFamily="34" charset="-122"/>
                 <a:cs typeface="Times New Roman" pitchFamily="34" charset="-120"/>
               </a:rPr>
-              <a:t>Teacher's Note</a:t>
+              <a:t>References</a:t>
             </a:r>
             <a:endParaRPr lang="en-US" sz="3600" dirty="0"/>
           </a:p>
@@ -19697,7 +22246,7 @@
               <a:buChar char="•"/>
             </a:pPr>
             <a:r>
-              <a:rPr lang="en-US" sz="2000" dirty="0">
+              <a:rPr lang="en-US" sz="1800" dirty="0">
                 <a:solidFill>
                   <a:srgbClr val="111111"/>
                 </a:solidFill>
@@ -19705,9 +22254,9 @@
                 <a:ea typeface="Calibri" pitchFamily="34" charset="-122"/>
                 <a:cs typeface="Calibri" pitchFamily="34" charset="-120"/>
               </a:rPr>
-              <a:t>Timing: Homework correction, plan, objectives 8 min | Recall, situation, action 10 min | 5 activities 30 min | Board summary (copying) 30 min | Evaluation, remediation 10 min | Homework, next lesson 5 min | Logbook 7 min</a:t>
-            </a:r>
-            <a:endParaRPr lang="en-US" sz="2000" dirty="0"/>
+              <a:t>Geography Syllabus, Forms I–V, MINESEC (2023) — Form 2, Module 1: Man in his Environment.</a:t>
+            </a:r>
+            <a:endParaRPr lang="en-US" sz="1800" dirty="0"/>
           </a:p>
           <a:p>
             <a:pPr algn="l" marL="342900" indent="-342900">
@@ -19718,7 +22267,7 @@
               <a:buChar char="•"/>
             </a:pPr>
             <a:r>
-              <a:rPr lang="en-US" sz="2000" dirty="0">
+              <a:rPr lang="en-US" sz="1800" dirty="0">
                 <a:solidFill>
                   <a:srgbClr val="111111"/>
                 </a:solidFill>
@@ -19726,9 +22275,9 @@
                 <a:ea typeface="Calibri" pitchFamily="34" charset="-122"/>
                 <a:cs typeface="Calibri" pitchFamily="34" charset="-120"/>
               </a:rPr>
-              <a:t>Without the projector (Activity 1): ask where families get water.</a:t>
-            </a:r>
-            <a:endParaRPr lang="en-US" sz="2000" dirty="0"/>
+              <a:t>Photo, Activity 1: “Women fetch water in Kilte-Awlaelo woreda, Tigray” by UNICEF Ethiopia, CC BY-NC-ND 2.0, via Flickr (https://www.flickr.com/photos/86783452@N02/14056445728)</a:t>
+            </a:r>
+            <a:endParaRPr lang="en-US" sz="1800" dirty="0"/>
           </a:p>
           <a:p>
             <a:pPr algn="l" marL="342900" indent="-342900">
@@ -19739,7 +22288,7 @@
               <a:buChar char="•"/>
             </a:pPr>
             <a:r>
-              <a:rPr lang="en-US" sz="2000" dirty="0">
+              <a:rPr lang="en-US" sz="1800" dirty="0">
                 <a:solidFill>
                   <a:srgbClr val="111111"/>
                 </a:solidFill>
@@ -19747,9 +22296,9 @@
                 <a:ea typeface="Calibri" pitchFamily="34" charset="-122"/>
                 <a:cs typeface="Calibri" pitchFamily="34" charset="-120"/>
               </a:rPr>
-              <a:t>Without the projector (Activity 2): draw a bar of 100 %.</a:t>
-            </a:r>
-            <a:endParaRPr lang="en-US" sz="2000" dirty="0"/>
+              <a:t>Photo, Activity 3: “i'll fight you for it...” by the apostrophe, CC BY-NC-SA 2.0, via Flickr (https://www.flickr.com/photos/66441426@N00/4019192363)</a:t>
+            </a:r>
+            <a:endParaRPr lang="en-US" sz="1800" dirty="0"/>
           </a:p>
           <a:p>
             <a:pPr algn="l" marL="342900" indent="-342900">
@@ -19760,7 +22309,7 @@
               <a:buChar char="•"/>
             </a:pPr>
             <a:r>
-              <a:rPr lang="en-US" sz="2000" dirty="0">
+              <a:rPr lang="en-US" sz="1800" dirty="0">
                 <a:solidFill>
                   <a:srgbClr val="111111"/>
                 </a:solidFill>
@@ -19768,9 +22317,9 @@
                 <a:ea typeface="Calibri" pitchFamily="34" charset="-122"/>
                 <a:cs typeface="Calibri" pitchFamily="34" charset="-120"/>
               </a:rPr>
-              <a:t>Without the projector (Activity 3): describe water sources of the quarter.</a:t>
-            </a:r>
-            <a:endParaRPr lang="en-US" sz="2000" dirty="0"/>
+              <a:t>Photo, Activity 4: “Drip” by jronaldlee, CC BY 2.0, via Flickr (https://www.flickr.com/photos/37176760@N06/5996590138)</a:t>
+            </a:r>
+            <a:endParaRPr lang="en-US" sz="1800" dirty="0"/>
           </a:p>
           <a:p>
             <a:pPr algn="l" marL="342900" indent="-342900">
@@ -19781,7 +22330,7 @@
               <a:buChar char="•"/>
             </a:pPr>
             <a:r>
-              <a:rPr lang="en-US" sz="2000" dirty="0">
+              <a:rPr lang="en-US" sz="1800" dirty="0">
                 <a:solidFill>
                   <a:srgbClr val="111111"/>
                 </a:solidFill>
@@ -19789,9 +22338,9 @@
                 <a:ea typeface="Calibri" pitchFamily="34" charset="-122"/>
                 <a:cs typeface="Calibri" pitchFamily="34" charset="-120"/>
               </a:rPr>
-              <a:t>Without the projector (Activity 4): list uses at home.</a:t>
-            </a:r>
-            <a:endParaRPr lang="en-US" sz="2000" dirty="0"/>
+              <a:t>Photo, board summary (Farming and livestock): “Irrigation Canals in Farah Province Afgahnistan” by USAID_IMAGES, CC BY-NC-ND 2.0, via Flickr (https://www.flickr.com/photos/46658241@N06/14784748647)</a:t>
+            </a:r>
+            <a:endParaRPr lang="en-US" sz="1800" dirty="0"/>
           </a:p>
           <a:p>
             <a:pPr algn="l" marL="342900" indent="-342900">
@@ -19802,7 +22351,7 @@
               <a:buChar char="•"/>
             </a:pPr>
             <a:r>
-              <a:rPr lang="en-US" sz="2000" dirty="0">
+              <a:rPr lang="en-US" sz="1800" dirty="0">
                 <a:solidFill>
                   <a:srgbClr val="111111"/>
                 </a:solidFill>
@@ -19810,9 +22359,9 @@
                 <a:ea typeface="Calibri" pitchFamily="34" charset="-122"/>
                 <a:cs typeface="Calibri" pitchFamily="34" charset="-120"/>
               </a:rPr>
-              <a:t>Without the projector (Activity 5): design a water plan for the school.</a:t>
-            </a:r>
-            <a:endParaRPr lang="en-US" sz="2000" dirty="0"/>
+              <a:t>Diagrams and animations: drawn for this lesson (Geography Department).</a:t>
+            </a:r>
+            <a:endParaRPr lang="en-US" sz="1800" dirty="0"/>
           </a:p>
         </p:txBody>
       </p:sp>
@@ -19858,311 +22407,7 @@
             <a:pPr algn="ctr"/>
             <a:fld id="{F7021451-1387-4CA6-816F-3879F97B5CBC}" type="slidenum">
               <a:rPr b="1" lang="en-US"/>
-              <a:t>50</a:t>
-            </a:fld>
-            <a:endParaRPr lang="en-US"/>
-          </a:p>
-        </p:txBody>
-      </p:sp>
-    </p:spTree>
-  </p:cSld>
-  <p:clrMapOvr>
-    <a:masterClrMapping/>
-  </p:clrMapOvr>
-</p:sld>
-</file>
-
-<file path=ppt/slides/slide51.xml><?xml version="1.0" encoding="utf-8"?>
-<p:sld xmlns:a="http://schemas.openxmlformats.org/drawingml/2006/main" xmlns:r="http://schemas.openxmlformats.org/officeDocument/2006/relationships" xmlns:p="http://schemas.openxmlformats.org/presentationml/2006/main">
-  <p:cSld name="Slide 51">
-    <p:spTree>
-      <p:nvGrpSpPr>
-        <p:cNvPr id="1" name=""/>
-        <p:cNvGrpSpPr/>
-        <p:nvPr/>
-      </p:nvGrpSpPr>
-      <p:grpSpPr>
-        <a:xfrm>
-          <a:off x="0" y="0"/>
-          <a:ext cx="0" cy="0"/>
-          <a:chOff x="0" y="0"/>
-          <a:chExt cx="0" cy="0"/>
-        </a:xfrm>
-      </p:grpSpPr>
-      <p:sp>
-        <p:nvSpPr>
-          <p:cNvPr id="2" name="Text 0"/>
-          <p:cNvSpPr/>
-          <p:nvPr/>
-        </p:nvSpPr>
-        <p:spPr>
-          <a:xfrm>
-            <a:off x="457200" y="713232"/>
-            <a:ext cx="11368735" cy="274320"/>
-          </a:xfrm>
-          <a:prstGeom prst="rect">
-            <a:avLst/>
-          </a:prstGeom>
-          <a:noFill/>
-          <a:ln/>
-        </p:spPr>
-        <p:txBody>
-          <a:bodyPr wrap="square" lIns="0" tIns="0" rIns="0" bIns="0" rtlCol="0" anchor="ctr"/>
-          <a:lstStyle/>
-          <a:p>
-            <a:pPr algn="r" indent="0" marL="0">
-              <a:buNone/>
-            </a:pPr>
-            <a:r>
-              <a:rPr lang="en-US" sz="1400" b="1" dirty="0">
-                <a:solidFill>
-                  <a:srgbClr val="1C3F6E"/>
-                </a:solidFill>
-                <a:latin typeface="Calibri" pitchFamily="34" charset="0"/>
-                <a:ea typeface="Calibri" pitchFamily="34" charset="-122"/>
-                <a:cs typeface="Calibri" pitchFamily="34" charset="-120"/>
-              </a:rPr>
-              <a:t>REFERENCES</a:t>
-            </a:r>
-            <a:endParaRPr lang="en-US" sz="1400" dirty="0"/>
-          </a:p>
-        </p:txBody>
-      </p:sp>
-      <p:pic>
-        <p:nvPicPr>
-          <p:cNvPr id="3" name="Image 0" descr="/home/claude/f4/img/minesec_sheet.png">    </p:cNvPr>
-          <p:cNvPicPr>
-            <a:picLocks noChangeAspect="1"/>
-          </p:cNvPicPr>
-          <p:nvPr/>
-        </p:nvPicPr>
-        <p:blipFill>
-          <a:blip r:embed="rId1"/>
-          <a:stretch>
-            <a:fillRect/>
-          </a:stretch>
-        </p:blipFill>
-        <p:spPr>
-          <a:xfrm>
-            <a:off x="0" y="658368"/>
-            <a:ext cx="5120640" cy="5833872"/>
-          </a:xfrm>
-          <a:prstGeom prst="rect">
-            <a:avLst/>
-          </a:prstGeom>
-        </p:spPr>
-      </p:pic>
-      <p:sp>
-        <p:nvSpPr>
-          <p:cNvPr id="4" name="Text 1"/>
-          <p:cNvSpPr/>
-          <p:nvPr/>
-        </p:nvSpPr>
-        <p:spPr>
-          <a:xfrm>
-            <a:off x="5349240" y="1005840"/>
-            <a:ext cx="6522415" cy="731520"/>
-          </a:xfrm>
-          <a:prstGeom prst="rect">
-            <a:avLst/>
-          </a:prstGeom>
-          <a:noFill/>
-          <a:ln/>
-        </p:spPr>
-        <p:txBody>
-          <a:bodyPr wrap="square" lIns="0" tIns="0" rIns="0" bIns="0" rtlCol="0" anchor="ctr">
-            <a:normAutofit/>
-          </a:bodyPr>
-          <a:lstStyle/>
-          <a:p>
-            <a:pPr algn="ctr" indent="0" marL="0">
-              <a:buNone/>
-            </a:pPr>
-            <a:r>
-              <a:rPr lang="en-US" sz="3600" b="1" dirty="0">
-                <a:solidFill>
-                  <a:srgbClr val="990011"/>
-                </a:solidFill>
-                <a:latin typeface="Times New Roman" pitchFamily="34" charset="0"/>
-                <a:ea typeface="Times New Roman" pitchFamily="34" charset="-122"/>
-                <a:cs typeface="Times New Roman" pitchFamily="34" charset="-120"/>
-              </a:rPr>
-              <a:t>References</a:t>
-            </a:r>
-            <a:endParaRPr lang="en-US" sz="3600" dirty="0"/>
-          </a:p>
-        </p:txBody>
-      </p:sp>
-      <p:sp>
-        <p:nvSpPr>
-          <p:cNvPr id="5" name="Text 2"/>
-          <p:cNvSpPr/>
-          <p:nvPr/>
-        </p:nvSpPr>
-        <p:spPr>
-          <a:xfrm>
-            <a:off x="5349240" y="1783080"/>
-            <a:ext cx="6522415" cy="4663440"/>
-          </a:xfrm>
-          <a:prstGeom prst="rect">
-            <a:avLst/>
-          </a:prstGeom>
-          <a:noFill/>
-          <a:ln/>
-        </p:spPr>
-        <p:txBody>
-          <a:bodyPr wrap="square" lIns="0" tIns="0" rIns="0" bIns="0" rtlCol="0" anchor="t"/>
-          <a:lstStyle/>
-          <a:p>
-            <a:pPr algn="l" marL="342900" indent="-342900">
-              <a:spcAft>
-                <a:spcPts val="800"/>
-              </a:spcAft>
-              <a:buSzPct val="100000"/>
-              <a:buChar char="•"/>
-            </a:pPr>
-            <a:r>
-              <a:rPr lang="en-US" sz="1800" dirty="0">
-                <a:solidFill>
-                  <a:srgbClr val="111111"/>
-                </a:solidFill>
-                <a:latin typeface="Calibri" pitchFamily="34" charset="0"/>
-                <a:ea typeface="Calibri" pitchFamily="34" charset="-122"/>
-                <a:cs typeface="Calibri" pitchFamily="34" charset="-120"/>
-              </a:rPr>
-              <a:t>Geography Syllabus, Forms I–V, MINESEC (2023) — Form 2, Module 1: Man in his Environment.</a:t>
-            </a:r>
-            <a:endParaRPr lang="en-US" sz="1800" dirty="0"/>
-          </a:p>
-          <a:p>
-            <a:pPr algn="l" marL="342900" indent="-342900">
-              <a:spcAft>
-                <a:spcPts val="800"/>
-              </a:spcAft>
-              <a:buSzPct val="100000"/>
-              <a:buChar char="•"/>
-            </a:pPr>
-            <a:r>
-              <a:rPr lang="en-US" sz="1800" dirty="0">
-                <a:solidFill>
-                  <a:srgbClr val="111111"/>
-                </a:solidFill>
-                <a:latin typeface="Calibri" pitchFamily="34" charset="0"/>
-                <a:ea typeface="Calibri" pitchFamily="34" charset="-122"/>
-                <a:cs typeface="Calibri" pitchFamily="34" charset="-120"/>
-              </a:rPr>
-              <a:t>Photo, Activity 1: “Women fetch water in Kilte-Awlaelo woreda, Tigray” by UNICEF Ethiopia, CC BY-NC-ND 2.0, via Flickr (https://www.flickr.com/photos/86783452@N02/14056445728)</a:t>
-            </a:r>
-            <a:endParaRPr lang="en-US" sz="1800" dirty="0"/>
-          </a:p>
-          <a:p>
-            <a:pPr algn="l" marL="342900" indent="-342900">
-              <a:spcAft>
-                <a:spcPts val="800"/>
-              </a:spcAft>
-              <a:buSzPct val="100000"/>
-              <a:buChar char="•"/>
-            </a:pPr>
-            <a:r>
-              <a:rPr lang="en-US" sz="1800" dirty="0">
-                <a:solidFill>
-                  <a:srgbClr val="111111"/>
-                </a:solidFill>
-                <a:latin typeface="Calibri" pitchFamily="34" charset="0"/>
-                <a:ea typeface="Calibri" pitchFamily="34" charset="-122"/>
-                <a:cs typeface="Calibri" pitchFamily="34" charset="-120"/>
-              </a:rPr>
-              <a:t>Photo, Activity 3: “i'll fight you for it...” by the apostrophe, CC BY-NC-SA 2.0, via Flickr (https://www.flickr.com/photos/66441426@N00/4019192363)</a:t>
-            </a:r>
-            <a:endParaRPr lang="en-US" sz="1800" dirty="0"/>
-          </a:p>
-          <a:p>
-            <a:pPr algn="l" marL="342900" indent="-342900">
-              <a:spcAft>
-                <a:spcPts val="800"/>
-              </a:spcAft>
-              <a:buSzPct val="100000"/>
-              <a:buChar char="•"/>
-            </a:pPr>
-            <a:r>
-              <a:rPr lang="en-US" sz="1800" dirty="0">
-                <a:solidFill>
-                  <a:srgbClr val="111111"/>
-                </a:solidFill>
-                <a:latin typeface="Calibri" pitchFamily="34" charset="0"/>
-                <a:ea typeface="Calibri" pitchFamily="34" charset="-122"/>
-                <a:cs typeface="Calibri" pitchFamily="34" charset="-120"/>
-              </a:rPr>
-              <a:t>Photo, Activity 4: “Drip” by jronaldlee, CC BY 2.0, via Flickr (https://www.flickr.com/photos/37176760@N06/5996590138)</a:t>
-            </a:r>
-            <a:endParaRPr lang="en-US" sz="1800" dirty="0"/>
-          </a:p>
-          <a:p>
-            <a:pPr algn="l" marL="342900" indent="-342900">
-              <a:spcAft>
-                <a:spcPts val="800"/>
-              </a:spcAft>
-              <a:buSzPct val="100000"/>
-              <a:buChar char="•"/>
-            </a:pPr>
-            <a:r>
-              <a:rPr lang="en-US" sz="1800" dirty="0">
-                <a:solidFill>
-                  <a:srgbClr val="111111"/>
-                </a:solidFill>
-                <a:latin typeface="Calibri" pitchFamily="34" charset="0"/>
-                <a:ea typeface="Calibri" pitchFamily="34" charset="-122"/>
-                <a:cs typeface="Calibri" pitchFamily="34" charset="-120"/>
-              </a:rPr>
-              <a:t>Diagrams and animations: drawn for this lesson (Geography Department).</a:t>
-            </a:r>
-            <a:endParaRPr lang="en-US" sz="1800" dirty="0"/>
-          </a:p>
-        </p:txBody>
-      </p:sp>
-      <p:sp>
-        <p:nvSpPr>
-          <p:cNvPr id="25" name="Slide Number Placeholder 0"/>
-          <p:cNvSpPr>
-            <a:spLocks noGrp="1"/>
-          </p:cNvSpPr>
-          <p:nvPr>
-            <p:ph type="sldNum" sz="quarter" idx="4294967295"/>
-          </p:nvPr>
-        </p:nvSpPr>
-        <p:spPr>
-          <a:xfrm>
-            <a:off x="27432" y="91440"/>
-            <a:ext cx="585216" cy="475488"/>
-          </a:xfrm>
-          <a:prstGeom prst="rect">
-            <a:avLst/>
-          </a:prstGeom>
-          <a:extLst>
-            <a:ext uri="{C572A759-6A51-4108-AA02-DFA0A04FC94B}">
-              <ma14:wrappingTextBoxFlag xmlns:ma14="http://schemas.microsoft.com/office/mac/drawingml/2011/main" val="0"/>
-            </a:ext>
-          </a:extLst>
-        </p:spPr>
-        <p:txBody>
-          <a:bodyPr/>
-          <a:lstStyle>
-            <a:lvl1pPr>
-              <a:defRPr sz="2000">
-                <a:solidFill>
-                  <a:srgbClr val="FFFFFF"/>
-                </a:solidFill>
-                <a:latin typeface="Calibri"/>
-                <a:ea typeface="Calibri"/>
-                <a:cs typeface="Calibri"/>
-              </a:defRPr>
-            </a:lvl1pPr>
-          </a:lstStyle>
-          <a:p>
-            <a:pPr algn="ctr"/>
-            <a:fld id="{F7021451-1387-4CA6-816F-3879F97B5CBC}" type="slidenum">
-              <a:rPr b="1" lang="en-US"/>
-              <a:t>51</a:t>
+              <a:t>57</a:t>
             </a:fld>
             <a:endParaRPr lang="en-US"/>
           </a:p>
@@ -20580,7 +22825,7 @@
         <p:spPr>
           <a:xfrm>
             <a:off x="0" y="658368"/>
-            <a:ext cx="1463040" cy="5833872"/>
+            <a:ext cx="2468880" cy="5833872"/>
           </a:xfrm>
           <a:prstGeom prst="rect">
             <a:avLst/>
@@ -20595,8 +22840,8 @@
         </p:nvSpPr>
         <p:spPr>
           <a:xfrm>
-            <a:off x="1691640" y="1005840"/>
-            <a:ext cx="10180015" cy="731520"/>
+            <a:off x="2697480" y="1005840"/>
+            <a:ext cx="9174175" cy="731520"/>
           </a:xfrm>
           <a:prstGeom prst="rect">
             <a:avLst/>
@@ -20636,8 +22881,8 @@
         </p:nvSpPr>
         <p:spPr>
           <a:xfrm>
-            <a:off x="1691640" y="1783080"/>
-            <a:ext cx="10180015" cy="4663440"/>
+            <a:off x="2697480" y="1783080"/>
+            <a:ext cx="9174175" cy="4663440"/>
           </a:xfrm>
           <a:prstGeom prst="rect">
             <a:avLst/>
@@ -20708,7 +22953,7 @@
                 <a:ea typeface="Times New Roman" pitchFamily="34" charset="-122"/>
                 <a:cs typeface="Times New Roman" pitchFamily="34" charset="-120"/>
               </a:rPr>
-              <a:t>Describe the problems of quantity and quality of water.</a:t>
+              <a:t>Describe the problems of quantity and quality of water and its uses.</a:t>
             </a:r>
             <a:endParaRPr lang="en-US" sz="4000" dirty="0"/>
           </a:p>
@@ -20730,7 +22975,7 @@
                 <a:ea typeface="Times New Roman" pitchFamily="34" charset="-122"/>
                 <a:cs typeface="Times New Roman" pitchFamily="34" charset="-120"/>
               </a:rPr>
-              <a:t>Propose ways to manage and use water well.</a:t>
+              <a:t>Propose ways to manage water well.</a:t>
             </a:r>
             <a:endParaRPr lang="en-US" sz="4000" dirty="0"/>
           </a:p>
@@ -21127,7 +23372,7 @@
         <p:spPr>
           <a:xfrm>
             <a:off x="0" y="658368"/>
-            <a:ext cx="5120640" cy="5833872"/>
+            <a:ext cx="2468880" cy="5833872"/>
           </a:xfrm>
           <a:prstGeom prst="rect">
             <a:avLst/>
@@ -21142,8 +23387,8 @@
         </p:nvSpPr>
         <p:spPr>
           <a:xfrm>
-            <a:off x="5349240" y="1005840"/>
-            <a:ext cx="6522415" cy="731520"/>
+            <a:off x="2697480" y="1005840"/>
+            <a:ext cx="9174175" cy="731520"/>
           </a:xfrm>
           <a:prstGeom prst="rect">
             <a:avLst/>
@@ -21183,8 +23428,8 @@
         </p:nvSpPr>
         <p:spPr>
           <a:xfrm>
-            <a:off x="5349240" y="1783080"/>
-            <a:ext cx="6522415" cy="4663440"/>
+            <a:off x="2697480" y="1783080"/>
+            <a:ext cx="9174175" cy="4663440"/>
           </a:xfrm>
           <a:prstGeom prst="rect">
             <a:avLst/>
@@ -21211,7 +23456,7 @@
                 <a:ea typeface="Times New Roman" pitchFamily="34" charset="-122"/>
                 <a:cs typeface="Times New Roman" pitchFamily="34" charset="-120"/>
               </a:rPr>
-              <a:t>In the dry season, the tap in Ali's quarter of Garoua runs only two days a week. His family buys water from sellers and sometimes drinks water from a well that is not clean.</a:t>
+              <a:t>In the dry season, the tap in Ali's quarter of Garoua runs only two days a week. His family buys water from sellers and sometimes drinks water from a well that is not clean. Ali asks: "Why is there not enough clean water, and what can we do?"</a:t>
             </a:r>
             <a:endParaRPr lang="en-US" sz="4000" dirty="0"/>
           </a:p>

--- a/lecons/F2/12_F2_M1_FS04_Water_Scarcity.pptx
+++ b/lecons/F2/12_F2_M1_FS04_Water_Scarcity.pptx
@@ -3198,7 +3198,7 @@
           <a:p>
             <a:r>
               <a:rPr lang="en-US" dirty="0"/>
-              <a:t>Let us copy Quality of Water. The quality of water is a problem for the following reasons. On this slide we have Open wells and rivers and Diseases. Write each point on a new line, with the key term first, and explain it in your own words when we revise.</a:t>
+              <a:t>Let us copy Quality of Water. The quality of water is explained as follows. On this slide we have Open wells and rivers and Diseases. Write each point on a new line, with the key term first, and explain it in your own words when we revise.</a:t>
             </a:r>
             <a:endParaRPr lang="en-US" dirty="0"/>
           </a:p>
@@ -3374,7 +3374,7 @@
           <a:p>
             <a:r>
               <a:rPr lang="en-US" dirty="0"/>
-              <a:t>Let us copy Uses of Water. Water has the following uses. On this slide we have Domestic uses. Write each point on a new line, with the key term first, and explain it in your own words when we revise.</a:t>
+              <a:t>Let us copy Uses of Water. The uses of water and its waste are the following. On this slide we have Domestic uses. Write each point on a new line, with the key term first, and explain it in your own words when we revise.</a:t>
             </a:r>
             <a:endParaRPr lang="en-US" dirty="0"/>
           </a:p>
@@ -14686,7 +14686,7 @@
                 <a:ea typeface="Times New Roman" pitchFamily="34" charset="-122"/>
                 <a:cs typeface="Times New Roman" pitchFamily="34" charset="-120"/>
               </a:rPr>
-              <a:t>The quality of water is a problem for the following reasons:</a:t>
+              <a:t>The quality of water is explained as follows:</a:t>
             </a:r>
             <a:endParaRPr lang="en-US" sz="4000" dirty="0"/>
           </a:p>
@@ -15254,7 +15254,7 @@
                 <a:ea typeface="Times New Roman" pitchFamily="34" charset="-122"/>
                 <a:cs typeface="Times New Roman" pitchFamily="34" charset="-120"/>
               </a:rPr>
-              <a:t>Water has the following uses:</a:t>
+              <a:t>The uses of water and its waste are the following:</a:t>
             </a:r>
             <a:endParaRPr lang="en-US" sz="4000" dirty="0"/>
           </a:p>

--- a/lecons/F2/12_F2_M1_FS04_Water_Scarcity.pptx
+++ b/lecons/F2/12_F2_M1_FS04_Water_Scarcity.pptx
@@ -3462,7 +3462,7 @@
           <a:p>
             <a:r>
               <a:rPr lang="en-US" dirty="0"/>
-              <a:t>Before we start the new lesson, let us correct the homework I gave you at the end of Lesson 5: Man in the Hot Desert Milieu. The question was: Write three ways people in the Far North of Cameroon save water. Take out your exercise books.</a:t>
+              <a:t>Before we start the new lesson, let us correct the homework I gave you at the end of Lesson 5: Man in the Hot Desert Milieu. The question was: Give two causes of water scarcity. Take out your exercise books.</a:t>
             </a:r>
             <a:endParaRPr lang="en-US" dirty="0"/>
           </a:p>
@@ -4430,7 +4430,7 @@
           <a:p>
             <a:r>
               <a:rPr lang="en-US" dirty="0"/>
-              <a:t>Here is a good answer. They store rainwater in jars, dig wells and use water carefully for cooking, washing and animals. Compare it with your own answer and correct your work in red.</a:t>
+              <a:t>Here is a good answer. Long dry seasons and population growth (also pollution and waste). Compare it with your own answer and correct your work in red.</a:t>
             </a:r>
             <a:endParaRPr lang="en-US" dirty="0"/>
           </a:p>
@@ -4606,7 +4606,7 @@
           <a:p>
             <a:r>
               <a:rPr lang="en-US" dirty="0"/>
-              <a:t>For your homework: Carry out a small enquiry: ask three families where they get water and what problems they have. We shall correct it at the beginning of our next lesson.</a:t>
+              <a:t>For your homework: Name three patterns of rural settlements. We shall correct it at the beginning of our next lesson.</a:t>
             </a:r>
             <a:endParaRPr lang="en-US" dirty="0"/>
           </a:p>
@@ -15530,7 +15530,7 @@
                 <a:ea typeface="Times New Roman" pitchFamily="34" charset="-122"/>
                 <a:cs typeface="Times New Roman" pitchFamily="34" charset="-120"/>
               </a:rPr>
-              <a:t>Write three ways people in the Far North of Cameroon save water.</a:t>
+              <a:t>Give two causes of water scarcity.</a:t>
             </a:r>
             <a:endParaRPr lang="en-US" sz="4000" dirty="0"/>
           </a:p>
@@ -18215,7 +18215,7 @@
                 <a:ea typeface="Times New Roman" pitchFamily="34" charset="-122"/>
                 <a:cs typeface="Times New Roman" pitchFamily="34" charset="-120"/>
               </a:rPr>
-              <a:t>They store rainwater in jars, dig wells and use water carefully for cooking, washing and animals.</a:t>
+              <a:t>Long dry seasons and population growth (also pollution and waste).</a:t>
             </a:r>
             <a:endParaRPr lang="en-US" sz="4000" dirty="0"/>
           </a:p>
@@ -18719,7 +18719,7 @@
                 <a:ea typeface="Times New Roman" pitchFamily="34" charset="-122"/>
                 <a:cs typeface="Times New Roman" pitchFamily="34" charset="-120"/>
               </a:rPr>
-              <a:t>Carry out a small enquiry: ask three families where they get water and what problems they have.</a:t>
+              <a:t>Name three patterns of rural settlements.</a:t>
             </a:r>
             <a:endParaRPr lang="en-US" sz="4000" dirty="0"/>
           </a:p>
@@ -21383,7 +21383,7 @@
                           <a:ea typeface="Calibri" pitchFamily="34" charset="-122"/>
                           <a:cs typeface="Calibri" pitchFamily="34" charset="-120"/>
                         </a:rPr>
-                        <a:t>Carry out a small enquiry: ask three families where they get water and what problems they have.</a:t>
+                        <a:t>Name three patterns of rural settlements.</a:t>
                       </a:r>
                       <a:endParaRPr lang="en-US" sz="1600" dirty="0">
                         <a:latin typeface="Calibri" charset="0"/>
